--- a/스마트시티_데이터거버넌스_BR마이닝_v4.pptx
+++ b/스마트시티_데이터거버넌스_BR마이닝_v4.pptx
@@ -3156,7 +3156,7 @@
             <a:avLst/>
           </a:prstGeom>
           <a:solidFill>
-            <a:srgbClr val="42A5F5"/>
+            <a:srgbClr val="CE93D8"/>
           </a:solidFill>
           <a:ln>
             <a:noFill/>
@@ -3199,7 +3199,7 @@
             <a:avLst/>
           </a:prstGeom>
           <a:solidFill>
-            <a:srgbClr val="1565C0"/>
+            <a:srgbClr val="7B1FA2"/>
           </a:solidFill>
           <a:ln>
             <a:noFill/>
@@ -3242,7 +3242,7 @@
             <a:avLst/>
           </a:prstGeom>
           <a:solidFill>
-            <a:srgbClr val="42A5F5"/>
+            <a:srgbClr val="CE93D8"/>
           </a:solidFill>
           <a:ln>
             <a:noFill/>
@@ -3421,7 +3421,7 @@
             <a:avLst/>
           </a:prstGeom>
           <a:solidFill>
-            <a:srgbClr val="42A5F5"/>
+            <a:srgbClr val="CE93D8"/>
           </a:solidFill>
           <a:ln>
             <a:noFill/>
@@ -3559,7 +3559,7 @@
             <a:avLst/>
           </a:prstGeom>
           <a:solidFill>
-            <a:srgbClr val="0D47A1"/>
+            <a:srgbClr val="4A148C"/>
           </a:solidFill>
           <a:ln>
             <a:noFill/>
@@ -3602,7 +3602,7 @@
             <a:avLst/>
           </a:prstGeom>
           <a:solidFill>
-            <a:srgbClr val="42A5F5"/>
+            <a:srgbClr val="CE93D8"/>
           </a:solidFill>
           <a:ln>
             <a:noFill/>
@@ -3713,7 +3713,7 @@
             <a:avLst/>
           </a:prstGeom>
           <a:solidFill>
-            <a:srgbClr val="1565C0"/>
+            <a:srgbClr val="7B1FA2"/>
           </a:solidFill>
           <a:ln>
             <a:noFill/>
@@ -3960,7 +3960,7 @@
             <a:avLst/>
           </a:prstGeom>
           <a:solidFill>
-            <a:srgbClr val="E3F2FD"/>
+            <a:srgbClr val="F3E5F5"/>
           </a:solidFill>
           <a:ln>
             <a:noFill/>
@@ -4150,7 +4150,7 @@
             <a:r>
               <a:rPr sz="900" b="1" i="0">
                 <a:solidFill>
-                  <a:srgbClr val="0D47A1"/>
+                  <a:srgbClr val="4A148C"/>
                 </a:solidFill>
               </a:rPr>
               <a:t>BR-SEL</a:t>
@@ -4440,7 +4440,7 @@
             <a:r>
               <a:rPr sz="900" b="1" i="0">
                 <a:solidFill>
-                  <a:srgbClr val="0D47A1"/>
+                  <a:srgbClr val="4A148C"/>
                 </a:solidFill>
               </a:rPr>
               <a:t>BR-SEL</a:t>
@@ -4540,7 +4540,7 @@
             <a:avLst/>
           </a:prstGeom>
           <a:solidFill>
-            <a:srgbClr val="E3F2FD"/>
+            <a:srgbClr val="F3E5F5"/>
           </a:solidFill>
           <a:ln>
             <a:noFill/>
@@ -4730,7 +4730,7 @@
             <a:r>
               <a:rPr sz="900" b="1" i="0">
                 <a:solidFill>
-                  <a:srgbClr val="0D47A1"/>
+                  <a:srgbClr val="4A148C"/>
                 </a:solidFill>
               </a:rPr>
               <a:t>300건</a:t>
@@ -5020,7 +5020,7 @@
             <a:r>
               <a:rPr sz="900" b="1" i="0">
                 <a:solidFill>
-                  <a:srgbClr val="0D47A1"/>
+                  <a:srgbClr val="4A148C"/>
                 </a:solidFill>
               </a:rPr>
               <a:t>FD=1.0 / Lift=19.88</a:t>
@@ -5120,7 +5120,7 @@
             <a:avLst/>
           </a:prstGeom>
           <a:solidFill>
-            <a:srgbClr val="E3F2FD"/>
+            <a:srgbClr val="F3E5F5"/>
           </a:solidFill>
           <a:ln>
             <a:noFill/>
@@ -5310,7 +5310,7 @@
             <a:r>
               <a:rPr sz="900" b="1" i="0">
                 <a:solidFill>
-                  <a:srgbClr val="0D47A1"/>
+                  <a:srgbClr val="4A148C"/>
                 </a:solidFill>
               </a:rPr>
               <a:t>FD=1.0 (8,381건)</a:t>
@@ -5600,7 +5600,7 @@
             <a:r>
               <a:rPr sz="900" b="1" i="0">
                 <a:solidFill>
-                  <a:srgbClr val="0D47A1"/>
+                  <a:srgbClr val="4A148C"/>
                 </a:solidFill>
               </a:rPr>
               <a:t>FD=1.0</a:t>
@@ -5700,7 +5700,7 @@
             <a:avLst/>
           </a:prstGeom>
           <a:solidFill>
-            <a:srgbClr val="E3F2FD"/>
+            <a:srgbClr val="F3E5F5"/>
           </a:solidFill>
           <a:ln>
             <a:noFill/>
@@ -5890,7 +5890,7 @@
             <a:r>
               <a:rPr sz="900" b="1" i="0">
                 <a:solidFill>
-                  <a:srgbClr val="0D47A1"/>
+                  <a:srgbClr val="4A148C"/>
                 </a:solidFill>
               </a:rPr>
               <a:t>75%가 기타</a:t>
@@ -6044,7 +6044,7 @@
             <a:r>
               <a:rPr sz="900" b="1" i="0">
                 <a:solidFill>
-                  <a:srgbClr val="0D47A1"/>
+                  <a:srgbClr val="4A148C"/>
                 </a:solidFill>
               </a:rPr>
               <a:t>BR-JAC-01</a:t>
@@ -6078,7 +6078,7 @@
             <a:r>
               <a:rPr sz="900" b="0" i="0">
                 <a:solidFill>
-                  <a:srgbClr val="0D47A1"/>
+                  <a:srgbClr val="4A148C"/>
                 </a:solidFill>
               </a:rPr>
               <a:t>Jaccard</a:t>
@@ -6180,7 +6180,7 @@
             <a:r>
               <a:rPr sz="900" b="1" i="0">
                 <a:solidFill>
-                  <a:srgbClr val="0D47A1"/>
+                  <a:srgbClr val="4A148C"/>
                 </a:solidFill>
               </a:rPr>
               <a:t>현재 0.409</a:t>
@@ -6280,7 +6280,7 @@
             <a:avLst/>
           </a:prstGeom>
           <a:solidFill>
-            <a:srgbClr val="E3F2FD"/>
+            <a:srgbClr val="F3E5F5"/>
           </a:solidFill>
           <a:ln>
             <a:noFill/>
@@ -6334,7 +6334,7 @@
             <a:r>
               <a:rPr sz="900" b="1" i="0">
                 <a:solidFill>
-                  <a:srgbClr val="0D47A1"/>
+                  <a:srgbClr val="4A148C"/>
                 </a:solidFill>
               </a:rPr>
               <a:t>BR-JAC-02</a:t>
@@ -6368,7 +6368,7 @@
             <a:r>
               <a:rPr sz="900" b="0" i="0">
                 <a:solidFill>
-                  <a:srgbClr val="0D47A1"/>
+                  <a:srgbClr val="4A148C"/>
                 </a:solidFill>
               </a:rPr>
               <a:t>Jaccard공간</a:t>
@@ -6470,7 +6470,7 @@
             <a:r>
               <a:rPr sz="900" b="1" i="0">
                 <a:solidFill>
-                  <a:srgbClr val="0D47A1"/>
+                  <a:srgbClr val="4A148C"/>
                 </a:solidFill>
               </a:rPr>
               <a:t>현재 0.134</a:t>
@@ -6760,7 +6760,7 @@
             <a:r>
               <a:rPr sz="900" b="1" i="0">
                 <a:solidFill>
-                  <a:srgbClr val="0D47A1"/>
+                  <a:srgbClr val="4A148C"/>
                 </a:solidFill>
               </a:rPr>
               <a:t>supp=3.8%</a:t>
@@ -6860,7 +6860,7 @@
             <a:avLst/>
           </a:prstGeom>
           <a:solidFill>
-            <a:srgbClr val="E3F2FD"/>
+            <a:srgbClr val="F3E5F5"/>
           </a:solidFill>
           <a:ln>
             <a:noFill/>
@@ -7050,7 +7050,7 @@
             <a:r>
               <a:rPr sz="900" b="1" i="0">
                 <a:solidFill>
-                  <a:srgbClr val="0D47A1"/>
+                  <a:srgbClr val="4A148C"/>
                 </a:solidFill>
               </a:rPr>
               <a:t>E=0.024 노이즈</a:t>
@@ -7340,7 +7340,7 @@
             <a:r>
               <a:rPr sz="900" b="1" i="0">
                 <a:solidFill>
-                  <a:srgbClr val="0D47A1"/>
+                  <a:srgbClr val="4A148C"/>
                 </a:solidFill>
               </a:rPr>
               <a:t>현행 100%</a:t>
@@ -7440,7 +7440,7 @@
             <a:avLst/>
           </a:prstGeom>
           <a:solidFill>
-            <a:srgbClr val="E3F2FD"/>
+            <a:srgbClr val="F3E5F5"/>
           </a:solidFill>
           <a:ln>
             <a:noFill/>
@@ -7630,7 +7630,7 @@
             <a:r>
               <a:rPr sz="900" b="1" i="0">
                 <a:solidFill>
-                  <a:srgbClr val="0D47A1"/>
+                  <a:srgbClr val="4A148C"/>
                 </a:solidFill>
               </a:rPr>
               <a:t>현행 2.2%</a:t>
@@ -7784,7 +7784,7 @@
             <a:r>
               <a:rPr sz="900" b="1" i="0">
                 <a:solidFill>
-                  <a:srgbClr val="0D47A1"/>
+                  <a:srgbClr val="4A148C"/>
                 </a:solidFill>
               </a:rPr>
               <a:t>BR-CROSS-01</a:t>
@@ -7818,7 +7818,7 @@
             <a:r>
               <a:rPr sz="900" b="0" i="0">
                 <a:solidFill>
-                  <a:srgbClr val="0D47A1"/>
+                  <a:srgbClr val="4A148C"/>
                 </a:solidFill>
               </a:rPr>
               <a:t>FD+Jaccard</a:t>
@@ -7920,7 +7920,7 @@
             <a:r>
               <a:rPr sz="900" b="1" i="0">
                 <a:solidFill>
-                  <a:srgbClr val="0D47A1"/>
+                  <a:srgbClr val="4A148C"/>
                 </a:solidFill>
               </a:rPr>
               <a:t>44,380m</a:t>
@@ -8081,7 +8081,7 @@
             <a:avLst/>
           </a:prstGeom>
           <a:solidFill>
-            <a:srgbClr val="0D47A1"/>
+            <a:srgbClr val="4A148C"/>
           </a:solidFill>
           <a:ln>
             <a:noFill/>
@@ -8124,7 +8124,7 @@
             <a:avLst/>
           </a:prstGeom>
           <a:solidFill>
-            <a:srgbClr val="42A5F5"/>
+            <a:srgbClr val="CE93D8"/>
           </a:solidFill>
           <a:ln>
             <a:noFill/>
@@ -8235,7 +8235,7 @@
             <a:avLst/>
           </a:prstGeom>
           <a:solidFill>
-            <a:srgbClr val="E3F2FD"/>
+            <a:srgbClr val="F3E5F5"/>
           </a:solidFill>
           <a:ln>
             <a:noFill/>
@@ -8278,7 +8278,7 @@
             <a:avLst/>
           </a:prstGeom>
           <a:solidFill>
-            <a:srgbClr val="1565C0"/>
+            <a:srgbClr val="7B1FA2"/>
           </a:solidFill>
           <a:ln>
             <a:noFill/>
@@ -8355,7 +8355,7 @@
             <a:avLst/>
           </a:prstGeom>
           <a:solidFill>
-            <a:srgbClr val="1565C0"/>
+            <a:srgbClr val="7B1FA2"/>
           </a:solidFill>
           <a:ln>
             <a:noFill/>
@@ -8466,7 +8466,7 @@
             <a:avLst/>
           </a:prstGeom>
           <a:solidFill>
-            <a:srgbClr val="1565C0"/>
+            <a:srgbClr val="7B1FA2"/>
           </a:solidFill>
           <a:ln>
             <a:noFill/>
@@ -8577,7 +8577,7 @@
             <a:avLst/>
           </a:prstGeom>
           <a:solidFill>
-            <a:srgbClr val="1565C0"/>
+            <a:srgbClr val="7B1FA2"/>
           </a:solidFill>
           <a:ln>
             <a:noFill/>
@@ -8688,7 +8688,7 @@
             <a:avLst/>
           </a:prstGeom>
           <a:solidFill>
-            <a:srgbClr val="1565C0"/>
+            <a:srgbClr val="7B1FA2"/>
           </a:solidFill>
           <a:ln>
             <a:noFill/>
@@ -8799,7 +8799,7 @@
             <a:avLst/>
           </a:prstGeom>
           <a:solidFill>
-            <a:srgbClr val="1565C0"/>
+            <a:srgbClr val="7B1FA2"/>
           </a:solidFill>
           <a:ln>
             <a:noFill/>
@@ -8910,7 +8910,7 @@
             <a:avLst/>
           </a:prstGeom>
           <a:solidFill>
-            <a:srgbClr val="1565C0"/>
+            <a:srgbClr val="7B1FA2"/>
           </a:solidFill>
           <a:ln>
             <a:noFill/>
@@ -9021,7 +9021,7 @@
             <a:avLst/>
           </a:prstGeom>
           <a:solidFill>
-            <a:srgbClr val="E3F2FD"/>
+            <a:srgbClr val="F3E5F5"/>
           </a:solidFill>
           <a:ln>
             <a:noFill/>
@@ -9064,7 +9064,7 @@
             <a:avLst/>
           </a:prstGeom>
           <a:solidFill>
-            <a:srgbClr val="0D47A1"/>
+            <a:srgbClr val="4A148C"/>
           </a:solidFill>
           <a:ln>
             <a:noFill/>
@@ -9345,7 +9345,7 @@
             <a:avLst/>
           </a:prstGeom>
           <a:solidFill>
-            <a:srgbClr val="0D47A1"/>
+            <a:srgbClr val="4A148C"/>
           </a:solidFill>
           <a:ln>
             <a:noFill/>
@@ -9486,7 +9486,7 @@
             <a:avLst/>
           </a:prstGeom>
           <a:solidFill>
-            <a:srgbClr val="0D47A1"/>
+            <a:srgbClr val="4A148C"/>
           </a:solidFill>
           <a:ln>
             <a:noFill/>
@@ -9529,7 +9529,7 @@
             <a:avLst/>
           </a:prstGeom>
           <a:solidFill>
-            <a:srgbClr val="42A5F5"/>
+            <a:srgbClr val="CE93D8"/>
           </a:solidFill>
           <a:ln>
             <a:noFill/>
@@ -9640,7 +9640,7 @@
             <a:avLst/>
           </a:prstGeom>
           <a:solidFill>
-            <a:srgbClr val="E3F2FD"/>
+            <a:srgbClr val="F3E5F5"/>
           </a:solidFill>
           <a:ln>
             <a:noFill/>
@@ -9683,7 +9683,7 @@
             <a:avLst/>
           </a:prstGeom>
           <a:solidFill>
-            <a:srgbClr val="1565C0"/>
+            <a:srgbClr val="7B1FA2"/>
           </a:solidFill>
           <a:ln>
             <a:noFill/>
@@ -9930,7 +9930,7 @@
             <a:avLst/>
           </a:prstGeom>
           <a:solidFill>
-            <a:srgbClr val="E3F2FD"/>
+            <a:srgbClr val="F3E5F5"/>
           </a:solidFill>
           <a:ln>
             <a:noFill/>
@@ -9973,7 +9973,7 @@
             <a:avLst/>
           </a:prstGeom>
           <a:solidFill>
-            <a:srgbClr val="0D47A1"/>
+            <a:srgbClr val="4A148C"/>
           </a:solidFill>
           <a:ln>
             <a:noFill/>
@@ -10220,7 +10220,7 @@
             <a:avLst/>
           </a:prstGeom>
           <a:solidFill>
-            <a:srgbClr val="E3F2FD"/>
+            <a:srgbClr val="F3E5F5"/>
           </a:solidFill>
           <a:ln>
             <a:noFill/>
@@ -10274,7 +10274,7 @@
             <a:r>
               <a:rPr sz="1300" b="1" i="0">
                 <a:solidFill>
-                  <a:srgbClr val="1565C0"/>
+                  <a:srgbClr val="7B1FA2"/>
                 </a:solidFill>
               </a:rPr>
               <a:t>BI  (Business Intelligence)</a:t>
@@ -10331,7 +10331,7 @@
             <a:avLst/>
           </a:prstGeom>
           <a:solidFill>
-            <a:srgbClr val="1565C0"/>
+            <a:srgbClr val="7B1FA2"/>
           </a:solidFill>
           <a:ln>
             <a:noFill/>
@@ -10408,7 +10408,7 @@
             <a:avLst/>
           </a:prstGeom>
           <a:solidFill>
-            <a:srgbClr val="1565C0"/>
+            <a:srgbClr val="7B1FA2"/>
           </a:solidFill>
           <a:ln>
             <a:noFill/>
@@ -10700,7 +10700,7 @@
             <a:avLst/>
           </a:prstGeom>
           <a:solidFill>
-            <a:srgbClr val="0D47A1"/>
+            <a:srgbClr val="4A148C"/>
           </a:solidFill>
           <a:ln>
             <a:noFill/>
@@ -10743,7 +10743,7 @@
             <a:avLst/>
           </a:prstGeom>
           <a:solidFill>
-            <a:srgbClr val="42A5F5"/>
+            <a:srgbClr val="CE93D8"/>
           </a:solidFill>
           <a:ln>
             <a:noFill/>
@@ -10854,7 +10854,7 @@
             <a:avLst/>
           </a:prstGeom>
           <a:solidFill>
-            <a:srgbClr val="1565C0"/>
+            <a:srgbClr val="7B1FA2"/>
           </a:solidFill>
           <a:ln>
             <a:noFill/>
@@ -10931,7 +10931,7 @@
             <a:avLst/>
           </a:prstGeom>
           <a:solidFill>
-            <a:srgbClr val="E3F2FD"/>
+            <a:srgbClr val="F3E5F5"/>
           </a:solidFill>
           <a:ln>
             <a:noFill/>
@@ -11028,7 +11028,7 @@
             <a:r>
               <a:rPr sz="1100" b="1" i="0">
                 <a:solidFill>
-                  <a:srgbClr val="0D47A1"/>
+                  <a:srgbClr val="4A148C"/>
                 </a:solidFill>
               </a:rPr>
               <a:t>table_map</a:t>
@@ -11139,7 +11139,7 @@
             <a:r>
               <a:rPr sz="1100" b="1" i="0">
                 <a:solidFill>
-                  <a:srgbClr val="0D47A1"/>
+                  <a:srgbClr val="4A148C"/>
                 </a:solidFill>
               </a:rPr>
               <a:t>column_map</a:t>
@@ -11250,7 +11250,7 @@
             <a:r>
               <a:rPr sz="1100" b="1" i="0">
                 <a:solidFill>
-                  <a:srgbClr val="0D47A1"/>
+                  <a:srgbClr val="4A148C"/>
                 </a:solidFill>
               </a:rPr>
               <a:t>column_pair_map</a:t>
@@ -11361,7 +11361,7 @@
             <a:r>
               <a:rPr sz="1100" b="1" i="0">
                 <a:solidFill>
-                  <a:srgbClr val="0D47A1"/>
+                  <a:srgbClr val="4A148C"/>
                 </a:solidFill>
               </a:rPr>
               <a:t>distinct_value</a:t>
@@ -11472,7 +11472,7 @@
             <a:r>
               <a:rPr sz="1100" b="1" i="0">
                 <a:solidFill>
-                  <a:srgbClr val="0D47A1"/>
+                  <a:srgbClr val="4A148C"/>
                 </a:solidFill>
               </a:rPr>
               <a:t>분석 결과</a:t>
@@ -11583,7 +11583,7 @@
             <a:r>
               <a:rPr sz="1100" b="1" i="0">
                 <a:solidFill>
-                  <a:srgbClr val="0D47A1"/>
+                  <a:srgbClr val="4A148C"/>
                 </a:solidFill>
               </a:rPr>
               <a:t>역할</a:t>
@@ -11640,7 +11640,7 @@
             <a:avLst/>
           </a:prstGeom>
           <a:solidFill>
-            <a:srgbClr val="0D47A1"/>
+            <a:srgbClr val="4A148C"/>
           </a:solidFill>
           <a:ln>
             <a:noFill/>
@@ -11717,7 +11717,7 @@
             <a:avLst/>
           </a:prstGeom>
           <a:solidFill>
-            <a:srgbClr val="E3F2FD"/>
+            <a:srgbClr val="F3E5F5"/>
           </a:solidFill>
           <a:ln>
             <a:noFill/>
@@ -11814,7 +11814,7 @@
             <a:r>
               <a:rPr sz="1100" b="1" i="0">
                 <a:solidFill>
-                  <a:srgbClr val="0D47A1"/>
+                  <a:srgbClr val="4A148C"/>
                 </a:solidFill>
               </a:rPr>
               <a:t>총 데이터셋</a:t>
@@ -11925,7 +11925,7 @@
             <a:r>
               <a:rPr sz="1100" b="1" i="0">
                 <a:solidFill>
-                  <a:srgbClr val="0D47A1"/>
+                  <a:srgbClr val="4A148C"/>
                 </a:solidFill>
               </a:rPr>
               <a:t>FILE</a:t>
@@ -12036,7 +12036,7 @@
             <a:r>
               <a:rPr sz="1100" b="1" i="0">
                 <a:solidFill>
-                  <a:srgbClr val="0D47A1"/>
+                  <a:srgbClr val="4A148C"/>
                 </a:solidFill>
               </a:rPr>
               <a:t>API</a:t>
@@ -12147,7 +12147,7 @@
             <a:r>
               <a:rPr sz="1100" b="1" i="0">
                 <a:solidFill>
-                  <a:srgbClr val="0D47A1"/>
+                  <a:srgbClr val="4A148C"/>
                 </a:solidFill>
               </a:rPr>
               <a:t>대분류</a:t>
@@ -12258,7 +12258,7 @@
             <a:r>
               <a:rPr sz="1100" b="1" i="0">
                 <a:solidFill>
-                  <a:srgbClr val="0D47A1"/>
+                  <a:srgbClr val="4A148C"/>
                 </a:solidFill>
               </a:rPr>
               <a:t>선별</a:t>
@@ -12369,7 +12369,7 @@
             <a:r>
               <a:rPr sz="1100" b="1" i="0">
                 <a:solidFill>
-                  <a:srgbClr val="0D47A1"/>
+                  <a:srgbClr val="4A148C"/>
                 </a:solidFill>
               </a:rPr>
               <a:t>역할</a:t>
@@ -12426,7 +12426,7 @@
             <a:avLst/>
           </a:prstGeom>
           <a:solidFill>
-            <a:srgbClr val="1565C0"/>
+            <a:srgbClr val="7B1FA2"/>
           </a:solidFill>
           <a:ln>
             <a:noFill/>
@@ -12503,7 +12503,7 @@
             <a:avLst/>
           </a:prstGeom>
           <a:solidFill>
-            <a:srgbClr val="E3F2FD"/>
+            <a:srgbClr val="F3E5F5"/>
           </a:solidFill>
           <a:ln>
             <a:noFill/>
@@ -12600,7 +12600,7 @@
             <a:r>
               <a:rPr sz="1100" b="1" i="0">
                 <a:solidFill>
-                  <a:srgbClr val="0D47A1"/>
+                  <a:srgbClr val="4A148C"/>
                 </a:solidFill>
               </a:rPr>
               <a:t>충북 교통약자+사고</a:t>
@@ -12711,7 +12711,7 @@
             <a:r>
               <a:rPr sz="1100" b="1" i="0">
                 <a:solidFill>
-                  <a:srgbClr val="0D47A1"/>
+                  <a:srgbClr val="4A148C"/>
                 </a:solidFill>
               </a:rPr>
               <a:t>서울 미세먼지</a:t>
@@ -12822,7 +12822,7 @@
             <a:r>
               <a:rPr sz="1100" b="1" i="0">
                 <a:solidFill>
-                  <a:srgbClr val="0D47A1"/>
+                  <a:srgbClr val="4A148C"/>
                 </a:solidFill>
               </a:rPr>
               <a:t>대구 대기질</a:t>
@@ -12933,7 +12933,7 @@
             <a:r>
               <a:rPr sz="1100" b="1" i="0">
                 <a:solidFill>
-                  <a:srgbClr val="0D47A1"/>
+                  <a:srgbClr val="4A148C"/>
                 </a:solidFill>
               </a:rPr>
               <a:t>충주/도로공사 CCTV</a:t>
@@ -13044,7 +13044,7 @@
             <a:r>
               <a:rPr sz="1100" b="1" i="0">
                 <a:solidFill>
-                  <a:srgbClr val="0D47A1"/>
+                  <a:srgbClr val="4A148C"/>
                 </a:solidFill>
               </a:rPr>
               <a:t>인천 IoT 센서</a:t>
@@ -13155,7 +13155,7 @@
             <a:r>
               <a:rPr sz="1100" b="1" i="0">
                 <a:solidFill>
-                  <a:srgbClr val="0D47A1"/>
+                  <a:srgbClr val="4A148C"/>
                 </a:solidFill>
               </a:rPr>
               <a:t>역할</a:t>
@@ -13212,7 +13212,7 @@
             <a:avLst/>
           </a:prstGeom>
           <a:solidFill>
-            <a:srgbClr val="1565C0"/>
+            <a:srgbClr val="7B1FA2"/>
           </a:solidFill>
           <a:ln>
             <a:noFill/>
@@ -13323,7 +13323,7 @@
             <a:avLst/>
           </a:prstGeom>
           <a:solidFill>
-            <a:srgbClr val="1565C0"/>
+            <a:srgbClr val="7B1FA2"/>
           </a:solidFill>
           <a:ln>
             <a:noFill/>
@@ -13434,7 +13434,7 @@
             <a:avLst/>
           </a:prstGeom>
           <a:solidFill>
-            <a:srgbClr val="1565C0"/>
+            <a:srgbClr val="7B1FA2"/>
           </a:solidFill>
           <a:ln>
             <a:noFill/>
@@ -13606,7 +13606,7 @@
             <a:avLst/>
           </a:prstGeom>
           <a:solidFill>
-            <a:srgbClr val="0D47A1"/>
+            <a:srgbClr val="4A148C"/>
           </a:solidFill>
           <a:ln>
             <a:noFill/>
@@ -13649,7 +13649,7 @@
             <a:avLst/>
           </a:prstGeom>
           <a:solidFill>
-            <a:srgbClr val="42A5F5"/>
+            <a:srgbClr val="CE93D8"/>
           </a:solidFill>
           <a:ln>
             <a:noFill/>
@@ -13760,7 +13760,7 @@
             <a:avLst/>
           </a:prstGeom>
           <a:solidFill>
-            <a:srgbClr val="0D47A1"/>
+            <a:srgbClr val="4A148C"/>
           </a:solidFill>
           <a:ln>
             <a:noFill/>
@@ -13848,7 +13848,7 @@
             <a:r>
               <a:rPr sz="1200" b="1" i="0">
                 <a:solidFill>
-                  <a:srgbClr val="0D47A1"/>
+                  <a:srgbClr val="4A148C"/>
                 </a:solidFill>
               </a:rPr>
               <a:t>변수별 Entropy 계산: H = -Σ p·log₂p</a:t>
@@ -13871,7 +13871,7 @@
             <a:avLst/>
           </a:prstGeom>
           <a:solidFill>
-            <a:srgbClr val="1565C0"/>
+            <a:srgbClr val="7B1FA2"/>
           </a:solidFill>
           <a:ln>
             <a:noFill/>
@@ -14017,7 +14017,7 @@
             <a:avLst/>
           </a:prstGeom>
           <a:solidFill>
-            <a:srgbClr val="0D47A1"/>
+            <a:srgbClr val="4A148C"/>
           </a:solidFill>
           <a:ln>
             <a:noFill/>
@@ -14309,7 +14309,7 @@
             <a:avLst/>
           </a:prstGeom>
           <a:solidFill>
-            <a:srgbClr val="0D47A1"/>
+            <a:srgbClr val="4A148C"/>
           </a:solidFill>
           <a:ln>
             <a:noFill/>
@@ -14397,7 +14397,7 @@
             <a:r>
               <a:rPr sz="1200" b="1" i="0">
                 <a:solidFill>
-                  <a:srgbClr val="0D47A1"/>
+                  <a:srgbClr val="4A148C"/>
                 </a:solidFill>
               </a:rPr>
               <a:t>Entropy 임계값 기반 자동 판정</a:t>
@@ -14420,7 +14420,7 @@
             <a:avLst/>
           </a:prstGeom>
           <a:solidFill>
-            <a:srgbClr val="1565C0"/>
+            <a:srgbClr val="7B1FA2"/>
           </a:solidFill>
           <a:ln>
             <a:noFill/>
@@ -14633,7 +14633,7 @@
             <a:avLst/>
           </a:prstGeom>
           <a:solidFill>
-            <a:srgbClr val="E3F2FD"/>
+            <a:srgbClr val="F3E5F5"/>
           </a:solidFill>
           <a:ln>
             <a:noFill/>
@@ -14755,7 +14755,7 @@
             <a:r>
               <a:rPr sz="1100" b="1" i="0">
                 <a:solidFill>
-                  <a:srgbClr val="1565C0"/>
+                  <a:srgbClr val="7B1FA2"/>
                 </a:solidFill>
               </a:rPr>
               <a:t>✅ 주 분석 축</a:t>
@@ -14823,7 +14823,7 @@
             <a:r>
               <a:rPr sz="1100" b="1" i="0">
                 <a:solidFill>
-                  <a:srgbClr val="0D47A1"/>
+                  <a:srgbClr val="4A148C"/>
                 </a:solidFill>
               </a:rPr>
               <a:t>분석 대상</a:t>
@@ -14968,7 +14968,7 @@
             <a:r>
               <a:rPr sz="1100" b="1" i="0">
                 <a:solidFill>
-                  <a:srgbClr val="1565C0"/>
+                  <a:srgbClr val="7B1FA2"/>
                 </a:solidFill>
               </a:rPr>
               <a:t>✅ 보조 분석 축</a:t>
@@ -15036,7 +15036,7 @@
             <a:r>
               <a:rPr sz="1100" b="1" i="0">
                 <a:solidFill>
-                  <a:srgbClr val="0D47A1"/>
+                  <a:srgbClr val="4A148C"/>
                 </a:solidFill>
               </a:rPr>
               <a:t>보조 활용</a:t>
@@ -15059,7 +15059,7 @@
             <a:avLst/>
           </a:prstGeom>
           <a:solidFill>
-            <a:srgbClr val="E3F2FD"/>
+            <a:srgbClr val="F3E5F5"/>
           </a:solidFill>
           <a:ln>
             <a:noFill/>
@@ -15249,7 +15249,7 @@
             <a:r>
               <a:rPr sz="1100" b="1" i="0">
                 <a:solidFill>
-                  <a:srgbClr val="0D47A1"/>
+                  <a:srgbClr val="4A148C"/>
                 </a:solidFill>
               </a:rPr>
               <a:t>리덕션(제거)</a:t>
@@ -15453,7 +15453,7 @@
             <a:avLst/>
           </a:prstGeom>
           <a:solidFill>
-            <a:srgbClr val="0D47A1"/>
+            <a:srgbClr val="4A148C"/>
           </a:solidFill>
           <a:ln>
             <a:noFill/>
@@ -15496,7 +15496,7 @@
             <a:avLst/>
           </a:prstGeom>
           <a:solidFill>
-            <a:srgbClr val="42A5F5"/>
+            <a:srgbClr val="CE93D8"/>
           </a:solidFill>
           <a:ln>
             <a:noFill/>
@@ -15607,7 +15607,7 @@
             <a:avLst/>
           </a:prstGeom>
           <a:solidFill>
-            <a:srgbClr val="0D47A1"/>
+            <a:srgbClr val="4A148C"/>
           </a:solidFill>
           <a:ln>
             <a:noFill/>
@@ -15695,7 +15695,7 @@
             <a:r>
               <a:rPr sz="1200" b="1" i="0">
                 <a:solidFill>
-                  <a:srgbClr val="0D47A1"/>
+                  <a:srgbClr val="4A148C"/>
                 </a:solidFill>
               </a:rPr>
               <a:t>pd.qcut(값, q=5) → L0(최소)~L4(최대) 5단계 이산화</a:t>
@@ -15718,7 +15718,7 @@
             <a:avLst/>
           </a:prstGeom>
           <a:solidFill>
-            <a:srgbClr val="E3F2FD"/>
+            <a:srgbClr val="F3E5F5"/>
           </a:solidFill>
           <a:ln>
             <a:noFill/>
@@ -15873,7 +15873,7 @@
             <a:avLst/>
           </a:prstGeom>
           <a:solidFill>
-            <a:srgbClr val="42A5F5"/>
+            <a:srgbClr val="CE93D8"/>
           </a:solidFill>
           <a:ln>
             <a:noFill/>
@@ -15985,7 +15985,7 @@
             <a:avLst/>
           </a:prstGeom>
           <a:solidFill>
-            <a:srgbClr val="1565C0"/>
+            <a:srgbClr val="7B1FA2"/>
           </a:solidFill>
           <a:ln>
             <a:noFill/>
@@ -16097,7 +16097,7 @@
             <a:avLst/>
           </a:prstGeom>
           <a:solidFill>
-            <a:srgbClr val="0D47A1"/>
+            <a:srgbClr val="4A148C"/>
           </a:solidFill>
           <a:ln>
             <a:noFill/>
@@ -16321,7 +16321,7 @@
             <a:avLst/>
           </a:prstGeom>
           <a:solidFill>
-            <a:srgbClr val="0D47A1"/>
+            <a:srgbClr val="4A148C"/>
           </a:solidFill>
           <a:ln>
             <a:noFill/>
@@ -16409,7 +16409,7 @@
             <a:r>
               <a:rPr sz="1200" b="1" i="0">
                 <a:solidFill>
-                  <a:srgbClr val="0D47A1"/>
+                  <a:srgbClr val="4A148C"/>
                 </a:solidFill>
               </a:rPr>
               <a:t>이산화 적용 결과 — 주요 컬럼</a:t>
@@ -16432,7 +16432,7 @@
             <a:avLst/>
           </a:prstGeom>
           <a:solidFill>
-            <a:srgbClr val="E3F2FD"/>
+            <a:srgbClr val="F3E5F5"/>
           </a:solidFill>
           <a:ln>
             <a:noFill/>
@@ -16475,7 +16475,7 @@
             <a:avLst/>
           </a:prstGeom>
           <a:solidFill>
-            <a:srgbClr val="1565C0"/>
+            <a:srgbClr val="7B1FA2"/>
           </a:solidFill>
           <a:ln>
             <a:noFill/>
@@ -16552,7 +16552,7 @@
             <a:avLst/>
           </a:prstGeom>
           <a:solidFill>
-            <a:srgbClr val="E3F2FD"/>
+            <a:srgbClr val="F3E5F5"/>
           </a:solidFill>
           <a:ln>
             <a:noFill/>
@@ -16731,7 +16731,7 @@
             <a:avLst/>
           </a:prstGeom>
           <a:solidFill>
-            <a:srgbClr val="1565C0"/>
+            <a:srgbClr val="7B1FA2"/>
           </a:solidFill>
           <a:ln>
             <a:noFill/>
@@ -16910,7 +16910,7 @@
             <a:avLst/>
           </a:prstGeom>
           <a:solidFill>
-            <a:srgbClr val="E3F2FD"/>
+            <a:srgbClr val="F3E5F5"/>
           </a:solidFill>
           <a:ln>
             <a:noFill/>
@@ -17089,7 +17089,7 @@
             <a:avLst/>
           </a:prstGeom>
           <a:solidFill>
-            <a:srgbClr val="1565C0"/>
+            <a:srgbClr val="7B1FA2"/>
           </a:solidFill>
           <a:ln>
             <a:noFill/>
@@ -17268,7 +17268,7 @@
             <a:avLst/>
           </a:prstGeom>
           <a:solidFill>
-            <a:srgbClr val="1565C0"/>
+            <a:srgbClr val="7B1FA2"/>
           </a:solidFill>
           <a:ln>
             <a:noFill/>
@@ -17447,7 +17447,7 @@
             <a:avLst/>
           </a:prstGeom>
           <a:solidFill>
-            <a:srgbClr val="E3F2FD"/>
+            <a:srgbClr val="F3E5F5"/>
           </a:solidFill>
           <a:ln>
             <a:noFill/>
@@ -17490,7 +17490,7 @@
             <a:avLst/>
           </a:prstGeom>
           <a:solidFill>
-            <a:srgbClr val="0D47A1"/>
+            <a:srgbClr val="4A148C"/>
           </a:solidFill>
           <a:ln>
             <a:noFill/>
@@ -17567,7 +17567,7 @@
             <a:avLst/>
           </a:prstGeom>
           <a:solidFill>
-            <a:srgbClr val="E3F2FD"/>
+            <a:srgbClr val="F3E5F5"/>
           </a:solidFill>
           <a:ln>
             <a:noFill/>
@@ -17925,7 +17925,7 @@
             <a:avLst/>
           </a:prstGeom>
           <a:solidFill>
-            <a:srgbClr val="E3F2FD"/>
+            <a:srgbClr val="F3E5F5"/>
           </a:solidFill>
           <a:ln>
             <a:noFill/>
@@ -18104,7 +18104,7 @@
             <a:avLst/>
           </a:prstGeom>
           <a:solidFill>
-            <a:srgbClr val="1565C0"/>
+            <a:srgbClr val="7B1FA2"/>
           </a:solidFill>
           <a:ln>
             <a:noFill/>
@@ -18283,7 +18283,7 @@
             <a:avLst/>
           </a:prstGeom>
           <a:solidFill>
-            <a:srgbClr val="1565C0"/>
+            <a:srgbClr val="7B1FA2"/>
           </a:solidFill>
           <a:ln>
             <a:noFill/>
@@ -18523,7 +18523,7 @@
             <a:avLst/>
           </a:prstGeom>
           <a:solidFill>
-            <a:srgbClr val="0D47A1"/>
+            <a:srgbClr val="4A148C"/>
           </a:solidFill>
           <a:ln>
             <a:noFill/>
@@ -18566,7 +18566,7 @@
             <a:avLst/>
           </a:prstGeom>
           <a:solidFill>
-            <a:srgbClr val="42A5F5"/>
+            <a:srgbClr val="CE93D8"/>
           </a:solidFill>
           <a:ln>
             <a:noFill/>
@@ -18677,7 +18677,7 @@
             <a:avLst/>
           </a:prstGeom>
           <a:solidFill>
-            <a:srgbClr val="0D47A1"/>
+            <a:srgbClr val="4A148C"/>
           </a:solidFill>
           <a:ln>
             <a:noFill/>
@@ -18765,7 +18765,7 @@
             <a:r>
               <a:rPr sz="1200" b="1" i="0">
                 <a:solidFill>
-                  <a:srgbClr val="0D47A1"/>
+                  <a:srgbClr val="4A148C"/>
                 </a:solidFill>
               </a:rPr>
               <a:t>FP-growth: min_support=0.05, confidence≥0.95 → BR</a:t>
@@ -18788,7 +18788,7 @@
             <a:avLst/>
           </a:prstGeom>
           <a:solidFill>
-            <a:srgbClr val="E3F2FD"/>
+            <a:srgbClr val="F3E5F5"/>
           </a:solidFill>
           <a:ln>
             <a:noFill/>
@@ -18831,7 +18831,7 @@
             <a:avLst/>
           </a:prstGeom>
           <a:solidFill>
-            <a:srgbClr val="1565C0"/>
+            <a:srgbClr val="7B1FA2"/>
           </a:solidFill>
           <a:ln>
             <a:noFill/>
@@ -18908,7 +18908,7 @@
             <a:avLst/>
           </a:prstGeom>
           <a:solidFill>
-            <a:srgbClr val="0D47A1"/>
+            <a:srgbClr val="4A148C"/>
           </a:solidFill>
           <a:ln>
             <a:noFill/>
@@ -19019,7 +19019,7 @@
             <a:avLst/>
           </a:prstGeom>
           <a:solidFill>
-            <a:srgbClr val="42A5F5"/>
+            <a:srgbClr val="CE93D8"/>
           </a:solidFill>
           <a:ln>
             <a:noFill/>
@@ -19130,7 +19130,7 @@
             <a:avLst/>
           </a:prstGeom>
           <a:solidFill>
-            <a:srgbClr val="1565C0"/>
+            <a:srgbClr val="7B1FA2"/>
           </a:solidFill>
           <a:ln>
             <a:noFill/>
@@ -19241,7 +19241,7 @@
             <a:avLst/>
           </a:prstGeom>
           <a:solidFill>
-            <a:srgbClr val="0D47A1"/>
+            <a:srgbClr val="4A148C"/>
           </a:solidFill>
           <a:ln>
             <a:noFill/>
@@ -19474,7 +19474,7 @@
             <a:avLst/>
           </a:prstGeom>
           <a:solidFill>
-            <a:srgbClr val="E3F2FD"/>
+            <a:srgbClr val="F3E5F5"/>
           </a:solidFill>
           <a:ln>
             <a:noFill/>
@@ -19517,7 +19517,7 @@
             <a:avLst/>
           </a:prstGeom>
           <a:solidFill>
-            <a:srgbClr val="0D47A1"/>
+            <a:srgbClr val="4A148C"/>
           </a:solidFill>
           <a:ln>
             <a:noFill/>
@@ -19594,7 +19594,7 @@
             <a:avLst/>
           </a:prstGeom>
           <a:solidFill>
-            <a:srgbClr val="1565C0"/>
+            <a:srgbClr val="7B1FA2"/>
           </a:solidFill>
           <a:ln>
             <a:noFill/>
@@ -19716,7 +19716,7 @@
             <a:r>
               <a:rPr sz="1200" b="1" i="0">
                 <a:solidFill>
-                  <a:srgbClr val="0D47A1"/>
+                  <a:srgbClr val="4A148C"/>
                 </a:solidFill>
               </a:rPr>
               <a:t>Lift 해석 (기술적 정확성):</a:t>
@@ -19959,7 +19959,7 @@
             <a:avLst/>
           </a:prstGeom>
           <a:solidFill>
-            <a:srgbClr val="0D47A1"/>
+            <a:srgbClr val="4A148C"/>
           </a:solidFill>
           <a:ln>
             <a:noFill/>
@@ -20002,7 +20002,7 @@
             <a:avLst/>
           </a:prstGeom>
           <a:solidFill>
-            <a:srgbClr val="42A5F5"/>
+            <a:srgbClr val="CE93D8"/>
           </a:solidFill>
           <a:ln>
             <a:noFill/>
@@ -20113,7 +20113,7 @@
             <a:avLst/>
           </a:prstGeom>
           <a:solidFill>
-            <a:srgbClr val="E3F2FD"/>
+            <a:srgbClr val="F3E5F5"/>
           </a:solidFill>
           <a:ln>
             <a:noFill/>
@@ -20156,7 +20156,7 @@
             <a:avLst/>
           </a:prstGeom>
           <a:solidFill>
-            <a:srgbClr val="1565C0"/>
+            <a:srgbClr val="7B1FA2"/>
           </a:solidFill>
           <a:ln>
             <a:noFill/>
@@ -20244,7 +20244,7 @@
             <a:r>
               <a:rPr sz="1150" b="0" i="0">
                 <a:solidFill>
-                  <a:srgbClr val="0D47A1"/>
+                  <a:srgbClr val="4A148C"/>
                 </a:solidFill>
               </a:rPr>
               <a:t>공식: FD신뢰도 = (A별 B고유값수==1) 비율
@@ -20268,7 +20268,7 @@
             <a:avLst/>
           </a:prstGeom>
           <a:solidFill>
-            <a:srgbClr val="1565C0"/>
+            <a:srgbClr val="7B1FA2"/>
           </a:solidFill>
           <a:ln>
             <a:noFill/>
@@ -20447,7 +20447,7 @@
             <a:avLst/>
           </a:prstGeom>
           <a:solidFill>
-            <a:srgbClr val="E3F2FD"/>
+            <a:srgbClr val="F3E5F5"/>
           </a:solidFill>
           <a:ln>
             <a:noFill/>
@@ -20569,7 +20569,7 @@
             <a:r>
               <a:rPr sz="1000" b="1" i="0">
                 <a:solidFill>
-                  <a:srgbClr val="0D47A1"/>
+                  <a:srgbClr val="4A148C"/>
                 </a:solidFill>
               </a:rPr>
               <a:t>BR-FD-01</a:t>
@@ -20748,7 +20748,7 @@
             <a:r>
               <a:rPr sz="1000" b="1" i="0">
                 <a:solidFill>
-                  <a:srgbClr val="0D47A1"/>
+                  <a:srgbClr val="4A148C"/>
                 </a:solidFill>
               </a:rPr>
               <a:t>BR-FD-02</a:t>
@@ -20805,7 +20805,7 @@
             <a:avLst/>
           </a:prstGeom>
           <a:solidFill>
-            <a:srgbClr val="E3F2FD"/>
+            <a:srgbClr val="F3E5F5"/>
           </a:solidFill>
           <a:ln>
             <a:noFill/>
@@ -20927,7 +20927,7 @@
             <a:r>
               <a:rPr sz="1000" b="1" i="0">
                 <a:solidFill>
-                  <a:srgbClr val="0D47A1"/>
+                  <a:srgbClr val="4A148C"/>
                 </a:solidFill>
               </a:rPr>
               <a:t>BR-FD-03</a:t>
@@ -21106,7 +21106,7 @@
             <a:r>
               <a:rPr sz="1000" b="1" i="0">
                 <a:solidFill>
-                  <a:srgbClr val="0D47A1"/>
+                  <a:srgbClr val="4A148C"/>
                 </a:solidFill>
               </a:rPr>
               <a:t>BR-FD-04</a:t>
@@ -21163,7 +21163,7 @@
             <a:avLst/>
           </a:prstGeom>
           <a:solidFill>
-            <a:srgbClr val="1565C0"/>
+            <a:srgbClr val="7B1FA2"/>
           </a:solidFill>
           <a:ln>
             <a:noFill/>
@@ -21240,7 +21240,7 @@
             <a:avLst/>
           </a:prstGeom>
           <a:solidFill>
-            <a:srgbClr val="E3F2FD"/>
+            <a:srgbClr val="F3E5F5"/>
           </a:solidFill>
           <a:ln>
             <a:noFill/>
@@ -21328,7 +21328,7 @@
             <a:r>
               <a:rPr sz="1000" b="1" i="0">
                 <a:solidFill>
-                  <a:srgbClr val="1565C0"/>
+                  <a:srgbClr val="7B1FA2"/>
                 </a:solidFill>
               </a:rPr>
               <a:t>어린이</a:t>
@@ -21362,7 +21362,7 @@
             <a:r>
               <a:rPr sz="1000" b="0" i="0">
                 <a:solidFill>
-                  <a:srgbClr val="1565C0"/>
+                  <a:srgbClr val="7B1FA2"/>
                 </a:solidFill>
               </a:rPr>
               <a:t>1,431건</a:t>
@@ -21473,7 +21473,7 @@
             <a:r>
               <a:rPr sz="1000" b="1" i="0">
                 <a:solidFill>
-                  <a:srgbClr val="1565C0"/>
+                  <a:srgbClr val="7B1FA2"/>
                 </a:solidFill>
               </a:rPr>
               <a:t>노약자</a:t>
@@ -21507,7 +21507,7 @@
             <a:r>
               <a:rPr sz="1000" b="0" i="0">
                 <a:solidFill>
-                  <a:srgbClr val="1565C0"/>
+                  <a:srgbClr val="7B1FA2"/>
                 </a:solidFill>
               </a:rPr>
               <a:t>1,573건</a:t>
@@ -21530,7 +21530,7 @@
             <a:avLst/>
           </a:prstGeom>
           <a:solidFill>
-            <a:srgbClr val="E3F2FD"/>
+            <a:srgbClr val="F3E5F5"/>
           </a:solidFill>
           <a:ln>
             <a:noFill/>
@@ -21675,7 +21675,7 @@
             <a:avLst/>
           </a:prstGeom>
           <a:solidFill>
-            <a:srgbClr val="E3F2FD"/>
+            <a:srgbClr val="F3E5F5"/>
           </a:solidFill>
           <a:ln>
             <a:noFill/>
@@ -21718,7 +21718,7 @@
             <a:avLst/>
           </a:prstGeom>
           <a:solidFill>
-            <a:srgbClr val="0D47A1"/>
+            <a:srgbClr val="4A148C"/>
           </a:solidFill>
           <a:ln>
             <a:noFill/>
@@ -21806,7 +21806,7 @@
             <a:r>
               <a:rPr sz="1150" b="0" i="0">
                 <a:solidFill>
-                  <a:srgbClr val="0D47A1"/>
+                  <a:srgbClr val="4A148C"/>
                 </a:solidFill>
               </a:rPr>
               <a:t>공식: |X∩Y|/|X∪Y| (값 집합·범위 중첩 비율)
@@ -21873,7 +21873,7 @@
             <a:avLst/>
           </a:prstGeom>
           <a:solidFill>
-            <a:srgbClr val="1565C0"/>
+            <a:srgbClr val="7B1FA2"/>
           </a:solidFill>
           <a:ln>
             <a:noFill/>
@@ -21951,7 +21951,7 @@
             <a:avLst/>
           </a:prstGeom>
           <a:solidFill>
-            <a:srgbClr val="0D47A1"/>
+            <a:srgbClr val="4A148C"/>
           </a:solidFill>
           <a:ln>
             <a:noFill/>
@@ -22183,7 +22183,7 @@
             <a:avLst/>
           </a:prstGeom>
           <a:solidFill>
-            <a:srgbClr val="1565C0"/>
+            <a:srgbClr val="7B1FA2"/>
           </a:solidFill>
           <a:ln>
             <a:noFill/>
@@ -22261,7 +22261,7 @@
             <a:avLst/>
           </a:prstGeom>
           <a:solidFill>
-            <a:srgbClr val="0D47A1"/>
+            <a:srgbClr val="4A148C"/>
           </a:solidFill>
           <a:ln>
             <a:noFill/>
@@ -22493,7 +22493,7 @@
             <a:avLst/>
           </a:prstGeom>
           <a:solidFill>
-            <a:srgbClr val="1565C0"/>
+            <a:srgbClr val="7B1FA2"/>
           </a:solidFill>
           <a:ln>
             <a:noFill/>
@@ -22571,7 +22571,7 @@
             <a:avLst/>
           </a:prstGeom>
           <a:solidFill>
-            <a:srgbClr val="0D47A1"/>
+            <a:srgbClr val="4A148C"/>
           </a:solidFill>
           <a:ln>
             <a:noFill/>
@@ -22821,7 +22821,7 @@
             <a:avLst/>
           </a:prstGeom>
           <a:solidFill>
-            <a:srgbClr val="0D47A1"/>
+            <a:srgbClr val="4A148C"/>
           </a:solidFill>
           <a:ln>
             <a:noFill/>
@@ -22864,7 +22864,7 @@
             <a:avLst/>
           </a:prstGeom>
           <a:solidFill>
-            <a:srgbClr val="42A5F5"/>
+            <a:srgbClr val="CE93D8"/>
           </a:solidFill>
           <a:ln>
             <a:noFill/>
@@ -22975,7 +22975,7 @@
             <a:avLst/>
           </a:prstGeom>
           <a:solidFill>
-            <a:srgbClr val="E3F2FD"/>
+            <a:srgbClr val="F3E5F5"/>
           </a:solidFill>
           <a:ln>
             <a:noFill/>
@@ -23131,7 +23131,7 @@
             <a:avLst/>
           </a:prstGeom>
           <a:solidFill>
-            <a:srgbClr val="E3F2FD"/>
+            <a:srgbClr val="F3E5F5"/>
           </a:solidFill>
           <a:ln>
             <a:noFill/>
@@ -23287,7 +23287,7 @@
             <a:avLst/>
           </a:prstGeom>
           <a:solidFill>
-            <a:srgbClr val="1565C0"/>
+            <a:srgbClr val="7B1FA2"/>
           </a:solidFill>
           <a:ln>
             <a:noFill/>
@@ -23500,7 +23500,7 @@
             <a:avLst/>
           </a:prstGeom>
           <a:solidFill>
-            <a:srgbClr val="E3F2FD"/>
+            <a:srgbClr val="F3E5F5"/>
           </a:solidFill>
           <a:ln>
             <a:noFill/>
@@ -23554,7 +23554,7 @@
             <a:r>
               <a:rPr sz="950" b="1" i="0">
                 <a:solidFill>
-                  <a:srgbClr val="0D47A1"/>
+                  <a:srgbClr val="4A148C"/>
                 </a:solidFill>
               </a:rPr>
               <a:t>BR-FD-01</a:t>
@@ -23810,7 +23810,7 @@
             <a:r>
               <a:rPr sz="950" b="1" i="0">
                 <a:solidFill>
-                  <a:srgbClr val="0D47A1"/>
+                  <a:srgbClr val="4A148C"/>
                 </a:solidFill>
               </a:rPr>
               <a:t>BR-FD-02</a:t>
@@ -24012,7 +24012,7 @@
             <a:avLst/>
           </a:prstGeom>
           <a:solidFill>
-            <a:srgbClr val="E3F2FD"/>
+            <a:srgbClr val="F3E5F5"/>
           </a:solidFill>
           <a:ln>
             <a:noFill/>
@@ -24066,7 +24066,7 @@
             <a:r>
               <a:rPr sz="950" b="1" i="0">
                 <a:solidFill>
-                  <a:srgbClr val="0D47A1"/>
+                  <a:srgbClr val="4A148C"/>
                 </a:solidFill>
               </a:rPr>
               <a:t>BR-FD-03</a:t>
@@ -24322,7 +24322,7 @@
             <a:r>
               <a:rPr sz="950" b="1" i="0">
                 <a:solidFill>
-                  <a:srgbClr val="0D47A1"/>
+                  <a:srgbClr val="4A148C"/>
                 </a:solidFill>
               </a:rPr>
               <a:t>BR-JAC-01</a:t>
@@ -24524,7 +24524,7 @@
             <a:avLst/>
           </a:prstGeom>
           <a:solidFill>
-            <a:srgbClr val="E3F2FD"/>
+            <a:srgbClr val="F3E5F5"/>
           </a:solidFill>
           <a:ln>
             <a:noFill/>
@@ -24578,7 +24578,7 @@
             <a:r>
               <a:rPr sz="950" b="1" i="0">
                 <a:solidFill>
-                  <a:srgbClr val="0D47A1"/>
+                  <a:srgbClr val="4A148C"/>
                 </a:solidFill>
               </a:rPr>
               <a:t>BR-JAC-02</a:t>
@@ -24834,7 +24834,7 @@
             <a:r>
               <a:rPr sz="950" b="1" i="0">
                 <a:solidFill>
-                  <a:srgbClr val="0D47A1"/>
+                  <a:srgbClr val="4A148C"/>
                 </a:solidFill>
               </a:rPr>
               <a:t>BR-FD-04</a:t>
@@ -25036,7 +25036,7 @@
             <a:avLst/>
           </a:prstGeom>
           <a:solidFill>
-            <a:srgbClr val="0D47A1"/>
+            <a:srgbClr val="4A148C"/>
           </a:solidFill>
           <a:ln>
             <a:noFill/>
@@ -25220,7 +25220,7 @@
             <a:avLst/>
           </a:prstGeom>
           <a:solidFill>
-            <a:srgbClr val="0D47A1"/>
+            <a:srgbClr val="4A148C"/>
           </a:solidFill>
           <a:ln>
             <a:noFill/>
@@ -25263,7 +25263,7 @@
             <a:avLst/>
           </a:prstGeom>
           <a:solidFill>
-            <a:srgbClr val="42A5F5"/>
+            <a:srgbClr val="CE93D8"/>
           </a:solidFill>
           <a:ln>
             <a:noFill/>
@@ -25374,7 +25374,7 @@
             <a:avLst/>
           </a:prstGeom>
           <a:solidFill>
-            <a:srgbClr val="1565C0"/>
+            <a:srgbClr val="7B1FA2"/>
           </a:solidFill>
           <a:ln>
             <a:noFill/>
@@ -25485,7 +25485,7 @@
             <a:avLst/>
           </a:prstGeom>
           <a:solidFill>
-            <a:srgbClr val="0D47A1"/>
+            <a:srgbClr val="4A148C"/>
           </a:solidFill>
           <a:ln>
             <a:noFill/>
@@ -25597,7 +25597,7 @@
             <a:avLst/>
           </a:prstGeom>
           <a:solidFill>
-            <a:srgbClr val="1565C0"/>
+            <a:srgbClr val="7B1FA2"/>
           </a:solidFill>
           <a:ln>
             <a:noFill/>
@@ -25709,7 +25709,7 @@
             <a:avLst/>
           </a:prstGeom>
           <a:solidFill>
-            <a:srgbClr val="1565C0"/>
+            <a:srgbClr val="7B1FA2"/>
           </a:solidFill>
           <a:ln>
             <a:noFill/>
@@ -25922,7 +25922,7 @@
             <a:avLst/>
           </a:prstGeom>
           <a:solidFill>
-            <a:srgbClr val="E3F2FD"/>
+            <a:srgbClr val="F3E5F5"/>
           </a:solidFill>
           <a:ln>
             <a:noFill/>
@@ -26112,7 +26112,7 @@
             <a:r>
               <a:rPr sz="1100" b="1" i="0">
                 <a:solidFill>
-                  <a:srgbClr val="0D47A1"/>
+                  <a:srgbClr val="4A148C"/>
                 </a:solidFill>
               </a:rPr>
               <a:t>BR-CROSS-01</a:t>
@@ -26325,7 +26325,7 @@
             <a:r>
               <a:rPr sz="1100" b="1" i="0">
                 <a:solidFill>
-                  <a:srgbClr val="0D47A1"/>
+                  <a:srgbClr val="4A148C"/>
                 </a:solidFill>
               </a:rPr>
               <a:t>BR-FD-02</a:t>
@@ -26348,7 +26348,7 @@
             <a:avLst/>
           </a:prstGeom>
           <a:solidFill>
-            <a:srgbClr val="E3F2FD"/>
+            <a:srgbClr val="F3E5F5"/>
           </a:solidFill>
           <a:ln>
             <a:noFill/>
@@ -26538,7 +26538,7 @@
             <a:r>
               <a:rPr sz="1100" b="1" i="0">
                 <a:solidFill>
-                  <a:srgbClr val="0D47A1"/>
+                  <a:srgbClr val="4A148C"/>
                 </a:solidFill>
               </a:rPr>
               <a:t>BR-FD-02</a:t>
@@ -26751,7 +26751,7 @@
             <a:r>
               <a:rPr sz="1100" b="1" i="0">
                 <a:solidFill>
-                  <a:srgbClr val="0D47A1"/>
+                  <a:srgbClr val="4A148C"/>
                 </a:solidFill>
               </a:rPr>
               <a:t>BR-JAC-02</a:t>
@@ -26774,7 +26774,7 @@
             <a:avLst/>
           </a:prstGeom>
           <a:solidFill>
-            <a:srgbClr val="42A5F5"/>
+            <a:srgbClr val="CE93D8"/>
           </a:solidFill>
           <a:ln>
             <a:noFill/>
@@ -26817,7 +26817,7 @@
             <a:avLst/>
           </a:prstGeom>
           <a:solidFill>
-            <a:srgbClr val="1565C0"/>
+            <a:srgbClr val="7B1FA2"/>
           </a:solidFill>
           <a:ln>
             <a:noFill/>
@@ -26929,7 +26929,7 @@
             <a:avLst/>
           </a:prstGeom>
           <a:solidFill>
-            <a:srgbClr val="0D47A1"/>
+            <a:srgbClr val="4A148C"/>
           </a:solidFill>
           <a:ln>
             <a:noFill/>
@@ -27041,7 +27041,7 @@
             <a:avLst/>
           </a:prstGeom>
           <a:solidFill>
-            <a:srgbClr val="1565C0"/>
+            <a:srgbClr val="7B1FA2"/>
           </a:solidFill>
           <a:ln>
             <a:noFill/>
@@ -27153,7 +27153,7 @@
             <a:avLst/>
           </a:prstGeom>
           <a:solidFill>
-            <a:srgbClr val="0D47A1"/>
+            <a:srgbClr val="4A148C"/>
           </a:solidFill>
           <a:ln>
             <a:noFill/>

--- a/스마트시티_데이터거버넌스_BR마이닝_v4.pptx
+++ b/스마트시티_데이터거버넌스_BR마이닝_v4.pptx
@@ -3156,7 +3156,7 @@
             <a:avLst/>
           </a:prstGeom>
           <a:solidFill>
-            <a:srgbClr val="CE93D8"/>
+            <a:srgbClr val="42A5F5"/>
           </a:solidFill>
           <a:ln>
             <a:noFill/>
@@ -3199,7 +3199,7 @@
             <a:avLst/>
           </a:prstGeom>
           <a:solidFill>
-            <a:srgbClr val="7B1FA2"/>
+            <a:srgbClr val="1565C0"/>
           </a:solidFill>
           <a:ln>
             <a:noFill/>
@@ -3242,7 +3242,7 @@
             <a:avLst/>
           </a:prstGeom>
           <a:solidFill>
-            <a:srgbClr val="CE93D8"/>
+            <a:srgbClr val="42A5F5"/>
           </a:solidFill>
           <a:ln>
             <a:noFill/>
@@ -3421,7 +3421,7 @@
             <a:avLst/>
           </a:prstGeom>
           <a:solidFill>
-            <a:srgbClr val="CE93D8"/>
+            <a:srgbClr val="42A5F5"/>
           </a:solidFill>
           <a:ln>
             <a:noFill/>
@@ -3559,7 +3559,7 @@
             <a:avLst/>
           </a:prstGeom>
           <a:solidFill>
-            <a:srgbClr val="4A148C"/>
+            <a:srgbClr val="0D47A1"/>
           </a:solidFill>
           <a:ln>
             <a:noFill/>
@@ -3602,7 +3602,7 @@
             <a:avLst/>
           </a:prstGeom>
           <a:solidFill>
-            <a:srgbClr val="CE93D8"/>
+            <a:srgbClr val="42A5F5"/>
           </a:solidFill>
           <a:ln>
             <a:noFill/>
@@ -3713,7 +3713,7 @@
             <a:avLst/>
           </a:prstGeom>
           <a:solidFill>
-            <a:srgbClr val="7B1FA2"/>
+            <a:srgbClr val="1565C0"/>
           </a:solidFill>
           <a:ln>
             <a:noFill/>
@@ -3960,7 +3960,7 @@
             <a:avLst/>
           </a:prstGeom>
           <a:solidFill>
-            <a:srgbClr val="F3E5F5"/>
+            <a:srgbClr val="E3F2FD"/>
           </a:solidFill>
           <a:ln>
             <a:noFill/>
@@ -4150,7 +4150,7 @@
             <a:r>
               <a:rPr sz="900" b="1" i="0">
                 <a:solidFill>
-                  <a:srgbClr val="4A148C"/>
+                  <a:srgbClr val="0D47A1"/>
                 </a:solidFill>
               </a:rPr>
               <a:t>BR-SEL</a:t>
@@ -4173,7 +4173,7 @@
             <a:avLst/>
           </a:prstGeom>
           <a:solidFill>
-            <a:srgbClr val="F57C00"/>
+            <a:srgbClr val="E1BEE7"/>
           </a:solidFill>
           <a:ln>
             <a:noFill/>
@@ -4440,7 +4440,7 @@
             <a:r>
               <a:rPr sz="900" b="1" i="0">
                 <a:solidFill>
-                  <a:srgbClr val="4A148C"/>
+                  <a:srgbClr val="0D47A1"/>
                 </a:solidFill>
               </a:rPr>
               <a:t>BR-SEL</a:t>
@@ -4463,7 +4463,7 @@
             <a:avLst/>
           </a:prstGeom>
           <a:solidFill>
-            <a:srgbClr val="F57C00"/>
+            <a:srgbClr val="E1BEE7"/>
           </a:solidFill>
           <a:ln>
             <a:noFill/>
@@ -4540,7 +4540,7 @@
             <a:avLst/>
           </a:prstGeom>
           <a:solidFill>
-            <a:srgbClr val="F3E5F5"/>
+            <a:srgbClr val="E3F2FD"/>
           </a:solidFill>
           <a:ln>
             <a:noFill/>
@@ -4730,7 +4730,7 @@
             <a:r>
               <a:rPr sz="900" b="1" i="0">
                 <a:solidFill>
-                  <a:srgbClr val="4A148C"/>
+                  <a:srgbClr val="0D47A1"/>
                 </a:solidFill>
               </a:rPr>
               <a:t>300건</a:t>
@@ -4753,7 +4753,7 @@
             <a:avLst/>
           </a:prstGeom>
           <a:solidFill>
-            <a:srgbClr val="F57C00"/>
+            <a:srgbClr val="E1BEE7"/>
           </a:solidFill>
           <a:ln>
             <a:noFill/>
@@ -5020,7 +5020,7 @@
             <a:r>
               <a:rPr sz="900" b="1" i="0">
                 <a:solidFill>
-                  <a:srgbClr val="4A148C"/>
+                  <a:srgbClr val="0D47A1"/>
                 </a:solidFill>
               </a:rPr>
               <a:t>FD=1.0 / Lift=19.88</a:t>
@@ -5043,7 +5043,7 @@
             <a:avLst/>
           </a:prstGeom>
           <a:solidFill>
-            <a:srgbClr val="C62828"/>
+            <a:srgbClr val="6A1B9A"/>
           </a:solidFill>
           <a:ln>
             <a:noFill/>
@@ -5120,7 +5120,7 @@
             <a:avLst/>
           </a:prstGeom>
           <a:solidFill>
-            <a:srgbClr val="F3E5F5"/>
+            <a:srgbClr val="E3F2FD"/>
           </a:solidFill>
           <a:ln>
             <a:noFill/>
@@ -5310,7 +5310,7 @@
             <a:r>
               <a:rPr sz="900" b="1" i="0">
                 <a:solidFill>
-                  <a:srgbClr val="4A148C"/>
+                  <a:srgbClr val="0D47A1"/>
                 </a:solidFill>
               </a:rPr>
               <a:t>FD=1.0 (8,381건)</a:t>
@@ -5333,7 +5333,7 @@
             <a:avLst/>
           </a:prstGeom>
           <a:solidFill>
-            <a:srgbClr val="C62828"/>
+            <a:srgbClr val="6A1B9A"/>
           </a:solidFill>
           <a:ln>
             <a:noFill/>
@@ -5600,7 +5600,7 @@
             <a:r>
               <a:rPr sz="900" b="1" i="0">
                 <a:solidFill>
-                  <a:srgbClr val="4A148C"/>
+                  <a:srgbClr val="0D47A1"/>
                 </a:solidFill>
               </a:rPr>
               <a:t>FD=1.0</a:t>
@@ -5623,7 +5623,7 @@
             <a:avLst/>
           </a:prstGeom>
           <a:solidFill>
-            <a:srgbClr val="C62828"/>
+            <a:srgbClr val="6A1B9A"/>
           </a:solidFill>
           <a:ln>
             <a:noFill/>
@@ -5700,7 +5700,7 @@
             <a:avLst/>
           </a:prstGeom>
           <a:solidFill>
-            <a:srgbClr val="F3E5F5"/>
+            <a:srgbClr val="E3F2FD"/>
           </a:solidFill>
           <a:ln>
             <a:noFill/>
@@ -5890,7 +5890,7 @@
             <a:r>
               <a:rPr sz="900" b="1" i="0">
                 <a:solidFill>
-                  <a:srgbClr val="4A148C"/>
+                  <a:srgbClr val="0D47A1"/>
                 </a:solidFill>
               </a:rPr>
               <a:t>75%가 기타</a:t>
@@ -5913,7 +5913,7 @@
             <a:avLst/>
           </a:prstGeom>
           <a:solidFill>
-            <a:srgbClr val="F57C00"/>
+            <a:srgbClr val="E1BEE7"/>
           </a:solidFill>
           <a:ln>
             <a:noFill/>
@@ -6044,7 +6044,7 @@
             <a:r>
               <a:rPr sz="900" b="1" i="0">
                 <a:solidFill>
-                  <a:srgbClr val="4A148C"/>
+                  <a:srgbClr val="0D47A1"/>
                 </a:solidFill>
               </a:rPr>
               <a:t>BR-JAC-01</a:t>
@@ -6078,7 +6078,7 @@
             <a:r>
               <a:rPr sz="900" b="0" i="0">
                 <a:solidFill>
-                  <a:srgbClr val="4A148C"/>
+                  <a:srgbClr val="0D47A1"/>
                 </a:solidFill>
               </a:rPr>
               <a:t>Jaccard</a:t>
@@ -6180,7 +6180,7 @@
             <a:r>
               <a:rPr sz="900" b="1" i="0">
                 <a:solidFill>
-                  <a:srgbClr val="4A148C"/>
+                  <a:srgbClr val="0D47A1"/>
                 </a:solidFill>
               </a:rPr>
               <a:t>현재 0.409</a:t>
@@ -6203,7 +6203,7 @@
             <a:avLst/>
           </a:prstGeom>
           <a:solidFill>
-            <a:srgbClr val="F57C00"/>
+            <a:srgbClr val="E1BEE7"/>
           </a:solidFill>
           <a:ln>
             <a:noFill/>
@@ -6280,7 +6280,7 @@
             <a:avLst/>
           </a:prstGeom>
           <a:solidFill>
-            <a:srgbClr val="F3E5F5"/>
+            <a:srgbClr val="E3F2FD"/>
           </a:solidFill>
           <a:ln>
             <a:noFill/>
@@ -6334,7 +6334,7 @@
             <a:r>
               <a:rPr sz="900" b="1" i="0">
                 <a:solidFill>
-                  <a:srgbClr val="4A148C"/>
+                  <a:srgbClr val="0D47A1"/>
                 </a:solidFill>
               </a:rPr>
               <a:t>BR-JAC-02</a:t>
@@ -6368,7 +6368,7 @@
             <a:r>
               <a:rPr sz="900" b="0" i="0">
                 <a:solidFill>
-                  <a:srgbClr val="4A148C"/>
+                  <a:srgbClr val="0D47A1"/>
                 </a:solidFill>
               </a:rPr>
               <a:t>Jaccard공간</a:t>
@@ -6470,7 +6470,7 @@
             <a:r>
               <a:rPr sz="900" b="1" i="0">
                 <a:solidFill>
-                  <a:srgbClr val="4A148C"/>
+                  <a:srgbClr val="0D47A1"/>
                 </a:solidFill>
               </a:rPr>
               <a:t>현재 0.134</a:t>
@@ -6493,7 +6493,7 @@
             <a:avLst/>
           </a:prstGeom>
           <a:solidFill>
-            <a:srgbClr val="F57C00"/>
+            <a:srgbClr val="E1BEE7"/>
           </a:solidFill>
           <a:ln>
             <a:noFill/>
@@ -6760,7 +6760,7 @@
             <a:r>
               <a:rPr sz="900" b="1" i="0">
                 <a:solidFill>
-                  <a:srgbClr val="4A148C"/>
+                  <a:srgbClr val="0D47A1"/>
                 </a:solidFill>
               </a:rPr>
               <a:t>supp=3.8%</a:t>
@@ -6783,7 +6783,7 @@
             <a:avLst/>
           </a:prstGeom>
           <a:solidFill>
-            <a:srgbClr val="F57C00"/>
+            <a:srgbClr val="E1BEE7"/>
           </a:solidFill>
           <a:ln>
             <a:noFill/>
@@ -6860,7 +6860,7 @@
             <a:avLst/>
           </a:prstGeom>
           <a:solidFill>
-            <a:srgbClr val="F3E5F5"/>
+            <a:srgbClr val="E3F2FD"/>
           </a:solidFill>
           <a:ln>
             <a:noFill/>
@@ -7050,7 +7050,7 @@
             <a:r>
               <a:rPr sz="900" b="1" i="0">
                 <a:solidFill>
-                  <a:srgbClr val="4A148C"/>
+                  <a:srgbClr val="0D47A1"/>
                 </a:solidFill>
               </a:rPr>
               <a:t>E=0.024 노이즈</a:t>
@@ -7073,7 +7073,7 @@
             <a:avLst/>
           </a:prstGeom>
           <a:solidFill>
-            <a:srgbClr val="F57C00"/>
+            <a:srgbClr val="E1BEE7"/>
           </a:solidFill>
           <a:ln>
             <a:noFill/>
@@ -7340,7 +7340,7 @@
             <a:r>
               <a:rPr sz="900" b="1" i="0">
                 <a:solidFill>
-                  <a:srgbClr val="4A148C"/>
+                  <a:srgbClr val="0D47A1"/>
                 </a:solidFill>
               </a:rPr>
               <a:t>현행 100%</a:t>
@@ -7363,7 +7363,7 @@
             <a:avLst/>
           </a:prstGeom>
           <a:solidFill>
-            <a:srgbClr val="C62828"/>
+            <a:srgbClr val="6A1B9A"/>
           </a:solidFill>
           <a:ln>
             <a:noFill/>
@@ -7440,7 +7440,7 @@
             <a:avLst/>
           </a:prstGeom>
           <a:solidFill>
-            <a:srgbClr val="F3E5F5"/>
+            <a:srgbClr val="E3F2FD"/>
           </a:solidFill>
           <a:ln>
             <a:noFill/>
@@ -7630,7 +7630,7 @@
             <a:r>
               <a:rPr sz="900" b="1" i="0">
                 <a:solidFill>
-                  <a:srgbClr val="4A148C"/>
+                  <a:srgbClr val="0D47A1"/>
                 </a:solidFill>
               </a:rPr>
               <a:t>현행 2.2%</a:t>
@@ -7653,7 +7653,7 @@
             <a:avLst/>
           </a:prstGeom>
           <a:solidFill>
-            <a:srgbClr val="F57C00"/>
+            <a:srgbClr val="E1BEE7"/>
           </a:solidFill>
           <a:ln>
             <a:noFill/>
@@ -7784,7 +7784,7 @@
             <a:r>
               <a:rPr sz="900" b="1" i="0">
                 <a:solidFill>
-                  <a:srgbClr val="4A148C"/>
+                  <a:srgbClr val="0D47A1"/>
                 </a:solidFill>
               </a:rPr>
               <a:t>BR-CROSS-01</a:t>
@@ -7818,7 +7818,7 @@
             <a:r>
               <a:rPr sz="900" b="0" i="0">
                 <a:solidFill>
-                  <a:srgbClr val="4A148C"/>
+                  <a:srgbClr val="0D47A1"/>
                 </a:solidFill>
               </a:rPr>
               <a:t>FD+Jaccard</a:t>
@@ -7920,7 +7920,7 @@
             <a:r>
               <a:rPr sz="900" b="1" i="0">
                 <a:solidFill>
-                  <a:srgbClr val="4A148C"/>
+                  <a:srgbClr val="0D47A1"/>
                 </a:solidFill>
               </a:rPr>
               <a:t>44,380m</a:t>
@@ -7943,7 +7943,7 @@
             <a:avLst/>
           </a:prstGeom>
           <a:solidFill>
-            <a:srgbClr val="F57C00"/>
+            <a:srgbClr val="E1BEE7"/>
           </a:solidFill>
           <a:ln>
             <a:noFill/>
@@ -8081,7 +8081,7 @@
             <a:avLst/>
           </a:prstGeom>
           <a:solidFill>
-            <a:srgbClr val="4A148C"/>
+            <a:srgbClr val="0D47A1"/>
           </a:solidFill>
           <a:ln>
             <a:noFill/>
@@ -8124,7 +8124,7 @@
             <a:avLst/>
           </a:prstGeom>
           <a:solidFill>
-            <a:srgbClr val="CE93D8"/>
+            <a:srgbClr val="42A5F5"/>
           </a:solidFill>
           <a:ln>
             <a:noFill/>
@@ -8235,7 +8235,7 @@
             <a:avLst/>
           </a:prstGeom>
           <a:solidFill>
-            <a:srgbClr val="F3E5F5"/>
+            <a:srgbClr val="E3F2FD"/>
           </a:solidFill>
           <a:ln>
             <a:noFill/>
@@ -8278,7 +8278,7 @@
             <a:avLst/>
           </a:prstGeom>
           <a:solidFill>
-            <a:srgbClr val="7B1FA2"/>
+            <a:srgbClr val="1565C0"/>
           </a:solidFill>
           <a:ln>
             <a:noFill/>
@@ -8355,7 +8355,7 @@
             <a:avLst/>
           </a:prstGeom>
           <a:solidFill>
-            <a:srgbClr val="7B1FA2"/>
+            <a:srgbClr val="1565C0"/>
           </a:solidFill>
           <a:ln>
             <a:noFill/>
@@ -8466,7 +8466,7 @@
             <a:avLst/>
           </a:prstGeom>
           <a:solidFill>
-            <a:srgbClr val="7B1FA2"/>
+            <a:srgbClr val="1565C0"/>
           </a:solidFill>
           <a:ln>
             <a:noFill/>
@@ -8577,7 +8577,7 @@
             <a:avLst/>
           </a:prstGeom>
           <a:solidFill>
-            <a:srgbClr val="7B1FA2"/>
+            <a:srgbClr val="1565C0"/>
           </a:solidFill>
           <a:ln>
             <a:noFill/>
@@ -8688,7 +8688,7 @@
             <a:avLst/>
           </a:prstGeom>
           <a:solidFill>
-            <a:srgbClr val="7B1FA2"/>
+            <a:srgbClr val="1565C0"/>
           </a:solidFill>
           <a:ln>
             <a:noFill/>
@@ -8799,7 +8799,7 @@
             <a:avLst/>
           </a:prstGeom>
           <a:solidFill>
-            <a:srgbClr val="7B1FA2"/>
+            <a:srgbClr val="1565C0"/>
           </a:solidFill>
           <a:ln>
             <a:noFill/>
@@ -8910,7 +8910,7 @@
             <a:avLst/>
           </a:prstGeom>
           <a:solidFill>
-            <a:srgbClr val="7B1FA2"/>
+            <a:srgbClr val="1565C0"/>
           </a:solidFill>
           <a:ln>
             <a:noFill/>
@@ -9021,7 +9021,7 @@
             <a:avLst/>
           </a:prstGeom>
           <a:solidFill>
-            <a:srgbClr val="F3E5F5"/>
+            <a:srgbClr val="E3F2FD"/>
           </a:solidFill>
           <a:ln>
             <a:noFill/>
@@ -9064,7 +9064,7 @@
             <a:avLst/>
           </a:prstGeom>
           <a:solidFill>
-            <a:srgbClr val="4A148C"/>
+            <a:srgbClr val="0D47A1"/>
           </a:solidFill>
           <a:ln>
             <a:noFill/>
@@ -9345,7 +9345,7 @@
             <a:avLst/>
           </a:prstGeom>
           <a:solidFill>
-            <a:srgbClr val="4A148C"/>
+            <a:srgbClr val="0D47A1"/>
           </a:solidFill>
           <a:ln>
             <a:noFill/>
@@ -9486,7 +9486,7 @@
             <a:avLst/>
           </a:prstGeom>
           <a:solidFill>
-            <a:srgbClr val="4A148C"/>
+            <a:srgbClr val="0D47A1"/>
           </a:solidFill>
           <a:ln>
             <a:noFill/>
@@ -9529,7 +9529,7 @@
             <a:avLst/>
           </a:prstGeom>
           <a:solidFill>
-            <a:srgbClr val="CE93D8"/>
+            <a:srgbClr val="42A5F5"/>
           </a:solidFill>
           <a:ln>
             <a:noFill/>
@@ -9640,7 +9640,7 @@
             <a:avLst/>
           </a:prstGeom>
           <a:solidFill>
-            <a:srgbClr val="F3E5F5"/>
+            <a:srgbClr val="E3F2FD"/>
           </a:solidFill>
           <a:ln>
             <a:noFill/>
@@ -9683,7 +9683,7 @@
             <a:avLst/>
           </a:prstGeom>
           <a:solidFill>
-            <a:srgbClr val="7B1FA2"/>
+            <a:srgbClr val="1565C0"/>
           </a:solidFill>
           <a:ln>
             <a:noFill/>
@@ -9930,7 +9930,7 @@
             <a:avLst/>
           </a:prstGeom>
           <a:solidFill>
-            <a:srgbClr val="F3E5F5"/>
+            <a:srgbClr val="E3F2FD"/>
           </a:solidFill>
           <a:ln>
             <a:noFill/>
@@ -9973,7 +9973,7 @@
             <a:avLst/>
           </a:prstGeom>
           <a:solidFill>
-            <a:srgbClr val="4A148C"/>
+            <a:srgbClr val="0D47A1"/>
           </a:solidFill>
           <a:ln>
             <a:noFill/>
@@ -10220,7 +10220,7 @@
             <a:avLst/>
           </a:prstGeom>
           <a:solidFill>
-            <a:srgbClr val="F3E5F5"/>
+            <a:srgbClr val="E3F2FD"/>
           </a:solidFill>
           <a:ln>
             <a:noFill/>
@@ -10274,7 +10274,7 @@
             <a:r>
               <a:rPr sz="1300" b="1" i="0">
                 <a:solidFill>
-                  <a:srgbClr val="7B1FA2"/>
+                  <a:srgbClr val="1565C0"/>
                 </a:solidFill>
               </a:rPr>
               <a:t>BI  (Business Intelligence)</a:t>
@@ -10331,7 +10331,7 @@
             <a:avLst/>
           </a:prstGeom>
           <a:solidFill>
-            <a:srgbClr val="7B1FA2"/>
+            <a:srgbClr val="1565C0"/>
           </a:solidFill>
           <a:ln>
             <a:noFill/>
@@ -10408,7 +10408,7 @@
             <a:avLst/>
           </a:prstGeom>
           <a:solidFill>
-            <a:srgbClr val="7B1FA2"/>
+            <a:srgbClr val="1565C0"/>
           </a:solidFill>
           <a:ln>
             <a:noFill/>
@@ -10700,7 +10700,7 @@
             <a:avLst/>
           </a:prstGeom>
           <a:solidFill>
-            <a:srgbClr val="4A148C"/>
+            <a:srgbClr val="0D47A1"/>
           </a:solidFill>
           <a:ln>
             <a:noFill/>
@@ -10743,7 +10743,7 @@
             <a:avLst/>
           </a:prstGeom>
           <a:solidFill>
-            <a:srgbClr val="CE93D8"/>
+            <a:srgbClr val="42A5F5"/>
           </a:solidFill>
           <a:ln>
             <a:noFill/>
@@ -10854,7 +10854,7 @@
             <a:avLst/>
           </a:prstGeom>
           <a:solidFill>
-            <a:srgbClr val="7B1FA2"/>
+            <a:srgbClr val="1565C0"/>
           </a:solidFill>
           <a:ln>
             <a:noFill/>
@@ -10931,7 +10931,7 @@
             <a:avLst/>
           </a:prstGeom>
           <a:solidFill>
-            <a:srgbClr val="F3E5F5"/>
+            <a:srgbClr val="E3F2FD"/>
           </a:solidFill>
           <a:ln>
             <a:noFill/>
@@ -11028,7 +11028,7 @@
             <a:r>
               <a:rPr sz="1100" b="1" i="0">
                 <a:solidFill>
-                  <a:srgbClr val="4A148C"/>
+                  <a:srgbClr val="0D47A1"/>
                 </a:solidFill>
               </a:rPr>
               <a:t>table_map</a:t>
@@ -11139,7 +11139,7 @@
             <a:r>
               <a:rPr sz="1100" b="1" i="0">
                 <a:solidFill>
-                  <a:srgbClr val="4A148C"/>
+                  <a:srgbClr val="0D47A1"/>
                 </a:solidFill>
               </a:rPr>
               <a:t>column_map</a:t>
@@ -11250,7 +11250,7 @@
             <a:r>
               <a:rPr sz="1100" b="1" i="0">
                 <a:solidFill>
-                  <a:srgbClr val="4A148C"/>
+                  <a:srgbClr val="0D47A1"/>
                 </a:solidFill>
               </a:rPr>
               <a:t>column_pair_map</a:t>
@@ -11361,7 +11361,7 @@
             <a:r>
               <a:rPr sz="1100" b="1" i="0">
                 <a:solidFill>
-                  <a:srgbClr val="4A148C"/>
+                  <a:srgbClr val="0D47A1"/>
                 </a:solidFill>
               </a:rPr>
               <a:t>distinct_value</a:t>
@@ -11472,7 +11472,7 @@
             <a:r>
               <a:rPr sz="1100" b="1" i="0">
                 <a:solidFill>
-                  <a:srgbClr val="4A148C"/>
+                  <a:srgbClr val="0D47A1"/>
                 </a:solidFill>
               </a:rPr>
               <a:t>분석 결과</a:t>
@@ -11583,7 +11583,7 @@
             <a:r>
               <a:rPr sz="1100" b="1" i="0">
                 <a:solidFill>
-                  <a:srgbClr val="4A148C"/>
+                  <a:srgbClr val="0D47A1"/>
                 </a:solidFill>
               </a:rPr>
               <a:t>역할</a:t>
@@ -11640,7 +11640,7 @@
             <a:avLst/>
           </a:prstGeom>
           <a:solidFill>
-            <a:srgbClr val="4A148C"/>
+            <a:srgbClr val="0D47A1"/>
           </a:solidFill>
           <a:ln>
             <a:noFill/>
@@ -11717,7 +11717,7 @@
             <a:avLst/>
           </a:prstGeom>
           <a:solidFill>
-            <a:srgbClr val="F3E5F5"/>
+            <a:srgbClr val="E3F2FD"/>
           </a:solidFill>
           <a:ln>
             <a:noFill/>
@@ -11814,7 +11814,7 @@
             <a:r>
               <a:rPr sz="1100" b="1" i="0">
                 <a:solidFill>
-                  <a:srgbClr val="4A148C"/>
+                  <a:srgbClr val="0D47A1"/>
                 </a:solidFill>
               </a:rPr>
               <a:t>총 데이터셋</a:t>
@@ -11925,7 +11925,7 @@
             <a:r>
               <a:rPr sz="1100" b="1" i="0">
                 <a:solidFill>
-                  <a:srgbClr val="4A148C"/>
+                  <a:srgbClr val="0D47A1"/>
                 </a:solidFill>
               </a:rPr>
               <a:t>FILE</a:t>
@@ -12036,7 +12036,7 @@
             <a:r>
               <a:rPr sz="1100" b="1" i="0">
                 <a:solidFill>
-                  <a:srgbClr val="4A148C"/>
+                  <a:srgbClr val="0D47A1"/>
                 </a:solidFill>
               </a:rPr>
               <a:t>API</a:t>
@@ -12147,7 +12147,7 @@
             <a:r>
               <a:rPr sz="1100" b="1" i="0">
                 <a:solidFill>
-                  <a:srgbClr val="4A148C"/>
+                  <a:srgbClr val="0D47A1"/>
                 </a:solidFill>
               </a:rPr>
               <a:t>대분류</a:t>
@@ -12258,7 +12258,7 @@
             <a:r>
               <a:rPr sz="1100" b="1" i="0">
                 <a:solidFill>
-                  <a:srgbClr val="4A148C"/>
+                  <a:srgbClr val="0D47A1"/>
                 </a:solidFill>
               </a:rPr>
               <a:t>선별</a:t>
@@ -12369,7 +12369,7 @@
             <a:r>
               <a:rPr sz="1100" b="1" i="0">
                 <a:solidFill>
-                  <a:srgbClr val="4A148C"/>
+                  <a:srgbClr val="0D47A1"/>
                 </a:solidFill>
               </a:rPr>
               <a:t>역할</a:t>
@@ -12426,7 +12426,7 @@
             <a:avLst/>
           </a:prstGeom>
           <a:solidFill>
-            <a:srgbClr val="7B1FA2"/>
+            <a:srgbClr val="1565C0"/>
           </a:solidFill>
           <a:ln>
             <a:noFill/>
@@ -12503,7 +12503,7 @@
             <a:avLst/>
           </a:prstGeom>
           <a:solidFill>
-            <a:srgbClr val="F3E5F5"/>
+            <a:srgbClr val="E3F2FD"/>
           </a:solidFill>
           <a:ln>
             <a:noFill/>
@@ -12600,7 +12600,7 @@
             <a:r>
               <a:rPr sz="1100" b="1" i="0">
                 <a:solidFill>
-                  <a:srgbClr val="4A148C"/>
+                  <a:srgbClr val="0D47A1"/>
                 </a:solidFill>
               </a:rPr>
               <a:t>충북 교통약자+사고</a:t>
@@ -12711,7 +12711,7 @@
             <a:r>
               <a:rPr sz="1100" b="1" i="0">
                 <a:solidFill>
-                  <a:srgbClr val="4A148C"/>
+                  <a:srgbClr val="0D47A1"/>
                 </a:solidFill>
               </a:rPr>
               <a:t>서울 미세먼지</a:t>
@@ -12822,7 +12822,7 @@
             <a:r>
               <a:rPr sz="1100" b="1" i="0">
                 <a:solidFill>
-                  <a:srgbClr val="4A148C"/>
+                  <a:srgbClr val="0D47A1"/>
                 </a:solidFill>
               </a:rPr>
               <a:t>대구 대기질</a:t>
@@ -12933,7 +12933,7 @@
             <a:r>
               <a:rPr sz="1100" b="1" i="0">
                 <a:solidFill>
-                  <a:srgbClr val="4A148C"/>
+                  <a:srgbClr val="0D47A1"/>
                 </a:solidFill>
               </a:rPr>
               <a:t>충주/도로공사 CCTV</a:t>
@@ -13044,7 +13044,7 @@
             <a:r>
               <a:rPr sz="1100" b="1" i="0">
                 <a:solidFill>
-                  <a:srgbClr val="4A148C"/>
+                  <a:srgbClr val="0D47A1"/>
                 </a:solidFill>
               </a:rPr>
               <a:t>인천 IoT 센서</a:t>
@@ -13155,7 +13155,7 @@
             <a:r>
               <a:rPr sz="1100" b="1" i="0">
                 <a:solidFill>
-                  <a:srgbClr val="4A148C"/>
+                  <a:srgbClr val="0D47A1"/>
                 </a:solidFill>
               </a:rPr>
               <a:t>역할</a:t>
@@ -13212,7 +13212,7 @@
             <a:avLst/>
           </a:prstGeom>
           <a:solidFill>
-            <a:srgbClr val="7B1FA2"/>
+            <a:srgbClr val="1565C0"/>
           </a:solidFill>
           <a:ln>
             <a:noFill/>
@@ -13323,7 +13323,7 @@
             <a:avLst/>
           </a:prstGeom>
           <a:solidFill>
-            <a:srgbClr val="7B1FA2"/>
+            <a:srgbClr val="1565C0"/>
           </a:solidFill>
           <a:ln>
             <a:noFill/>
@@ -13434,7 +13434,7 @@
             <a:avLst/>
           </a:prstGeom>
           <a:solidFill>
-            <a:srgbClr val="7B1FA2"/>
+            <a:srgbClr val="1565C0"/>
           </a:solidFill>
           <a:ln>
             <a:noFill/>
@@ -13606,7 +13606,7 @@
             <a:avLst/>
           </a:prstGeom>
           <a:solidFill>
-            <a:srgbClr val="4A148C"/>
+            <a:srgbClr val="0D47A1"/>
           </a:solidFill>
           <a:ln>
             <a:noFill/>
@@ -13649,7 +13649,7 @@
             <a:avLst/>
           </a:prstGeom>
           <a:solidFill>
-            <a:srgbClr val="CE93D8"/>
+            <a:srgbClr val="42A5F5"/>
           </a:solidFill>
           <a:ln>
             <a:noFill/>
@@ -13760,7 +13760,7 @@
             <a:avLst/>
           </a:prstGeom>
           <a:solidFill>
-            <a:srgbClr val="4A148C"/>
+            <a:srgbClr val="0D47A1"/>
           </a:solidFill>
           <a:ln>
             <a:noFill/>
@@ -13848,7 +13848,7 @@
             <a:r>
               <a:rPr sz="1200" b="1" i="0">
                 <a:solidFill>
-                  <a:srgbClr val="4A148C"/>
+                  <a:srgbClr val="0D47A1"/>
                 </a:solidFill>
               </a:rPr>
               <a:t>변수별 Entropy 계산: H = -Σ p·log₂p</a:t>
@@ -13871,7 +13871,7 @@
             <a:avLst/>
           </a:prstGeom>
           <a:solidFill>
-            <a:srgbClr val="7B1FA2"/>
+            <a:srgbClr val="1565C0"/>
           </a:solidFill>
           <a:ln>
             <a:noFill/>
@@ -14017,7 +14017,7 @@
             <a:avLst/>
           </a:prstGeom>
           <a:solidFill>
-            <a:srgbClr val="4A148C"/>
+            <a:srgbClr val="0D47A1"/>
           </a:solidFill>
           <a:ln>
             <a:noFill/>
@@ -14309,7 +14309,7 @@
             <a:avLst/>
           </a:prstGeom>
           <a:solidFill>
-            <a:srgbClr val="4A148C"/>
+            <a:srgbClr val="0D47A1"/>
           </a:solidFill>
           <a:ln>
             <a:noFill/>
@@ -14397,7 +14397,7 @@
             <a:r>
               <a:rPr sz="1200" b="1" i="0">
                 <a:solidFill>
-                  <a:srgbClr val="4A148C"/>
+                  <a:srgbClr val="0D47A1"/>
                 </a:solidFill>
               </a:rPr>
               <a:t>Entropy 임계값 기반 자동 판정</a:t>
@@ -14420,7 +14420,7 @@
             <a:avLst/>
           </a:prstGeom>
           <a:solidFill>
-            <a:srgbClr val="7B1FA2"/>
+            <a:srgbClr val="1565C0"/>
           </a:solidFill>
           <a:ln>
             <a:noFill/>
@@ -14633,7 +14633,7 @@
             <a:avLst/>
           </a:prstGeom>
           <a:solidFill>
-            <a:srgbClr val="F3E5F5"/>
+            <a:srgbClr val="E3F2FD"/>
           </a:solidFill>
           <a:ln>
             <a:noFill/>
@@ -14755,7 +14755,7 @@
             <a:r>
               <a:rPr sz="1100" b="1" i="0">
                 <a:solidFill>
-                  <a:srgbClr val="7B1FA2"/>
+                  <a:srgbClr val="1565C0"/>
                 </a:solidFill>
               </a:rPr>
               <a:t>✅ 주 분석 축</a:t>
@@ -14823,7 +14823,7 @@
             <a:r>
               <a:rPr sz="1100" b="1" i="0">
                 <a:solidFill>
-                  <a:srgbClr val="4A148C"/>
+                  <a:srgbClr val="0D47A1"/>
                 </a:solidFill>
               </a:rPr>
               <a:t>분석 대상</a:t>
@@ -14968,7 +14968,7 @@
             <a:r>
               <a:rPr sz="1100" b="1" i="0">
                 <a:solidFill>
-                  <a:srgbClr val="7B1FA2"/>
+                  <a:srgbClr val="1565C0"/>
                 </a:solidFill>
               </a:rPr>
               <a:t>✅ 보조 분석 축</a:t>
@@ -15036,7 +15036,7 @@
             <a:r>
               <a:rPr sz="1100" b="1" i="0">
                 <a:solidFill>
-                  <a:srgbClr val="4A148C"/>
+                  <a:srgbClr val="0D47A1"/>
                 </a:solidFill>
               </a:rPr>
               <a:t>보조 활용</a:t>
@@ -15059,7 +15059,7 @@
             <a:avLst/>
           </a:prstGeom>
           <a:solidFill>
-            <a:srgbClr val="F3E5F5"/>
+            <a:srgbClr val="E3F2FD"/>
           </a:solidFill>
           <a:ln>
             <a:noFill/>
@@ -15181,7 +15181,7 @@
             <a:r>
               <a:rPr sz="1100" b="1" i="0">
                 <a:solidFill>
-                  <a:srgbClr val="C62828"/>
+                  <a:srgbClr val="6A1B9A"/>
                 </a:solidFill>
               </a:rPr>
               <a:t>❌ 노이즈 제거</a:t>
@@ -15249,7 +15249,7 @@
             <a:r>
               <a:rPr sz="1100" b="1" i="0">
                 <a:solidFill>
-                  <a:srgbClr val="4A148C"/>
+                  <a:srgbClr val="0D47A1"/>
                 </a:solidFill>
               </a:rPr>
               <a:t>리덕션(제거)</a:t>
@@ -15453,7 +15453,7 @@
             <a:avLst/>
           </a:prstGeom>
           <a:solidFill>
-            <a:srgbClr val="4A148C"/>
+            <a:srgbClr val="0D47A1"/>
           </a:solidFill>
           <a:ln>
             <a:noFill/>
@@ -15496,7 +15496,7 @@
             <a:avLst/>
           </a:prstGeom>
           <a:solidFill>
-            <a:srgbClr val="CE93D8"/>
+            <a:srgbClr val="42A5F5"/>
           </a:solidFill>
           <a:ln>
             <a:noFill/>
@@ -15607,7 +15607,7 @@
             <a:avLst/>
           </a:prstGeom>
           <a:solidFill>
-            <a:srgbClr val="4A148C"/>
+            <a:srgbClr val="0D47A1"/>
           </a:solidFill>
           <a:ln>
             <a:noFill/>
@@ -15695,7 +15695,7 @@
             <a:r>
               <a:rPr sz="1200" b="1" i="0">
                 <a:solidFill>
-                  <a:srgbClr val="4A148C"/>
+                  <a:srgbClr val="0D47A1"/>
                 </a:solidFill>
               </a:rPr>
               <a:t>pd.qcut(값, q=5) → L0(최소)~L4(최대) 5단계 이산화</a:t>
@@ -15718,7 +15718,7 @@
             <a:avLst/>
           </a:prstGeom>
           <a:solidFill>
-            <a:srgbClr val="F3E5F5"/>
+            <a:srgbClr val="E3F2FD"/>
           </a:solidFill>
           <a:ln>
             <a:noFill/>
@@ -15873,7 +15873,7 @@
             <a:avLst/>
           </a:prstGeom>
           <a:solidFill>
-            <a:srgbClr val="CE93D8"/>
+            <a:srgbClr val="42A5F5"/>
           </a:solidFill>
           <a:ln>
             <a:noFill/>
@@ -15985,7 +15985,7 @@
             <a:avLst/>
           </a:prstGeom>
           <a:solidFill>
-            <a:srgbClr val="7B1FA2"/>
+            <a:srgbClr val="1565C0"/>
           </a:solidFill>
           <a:ln>
             <a:noFill/>
@@ -16097,7 +16097,7 @@
             <a:avLst/>
           </a:prstGeom>
           <a:solidFill>
-            <a:srgbClr val="4A148C"/>
+            <a:srgbClr val="0D47A1"/>
           </a:solidFill>
           <a:ln>
             <a:noFill/>
@@ -16321,7 +16321,7 @@
             <a:avLst/>
           </a:prstGeom>
           <a:solidFill>
-            <a:srgbClr val="4A148C"/>
+            <a:srgbClr val="0D47A1"/>
           </a:solidFill>
           <a:ln>
             <a:noFill/>
@@ -16409,7 +16409,7 @@
             <a:r>
               <a:rPr sz="1200" b="1" i="0">
                 <a:solidFill>
-                  <a:srgbClr val="4A148C"/>
+                  <a:srgbClr val="0D47A1"/>
                 </a:solidFill>
               </a:rPr>
               <a:t>이산화 적용 결과 — 주요 컬럼</a:t>
@@ -16432,7 +16432,7 @@
             <a:avLst/>
           </a:prstGeom>
           <a:solidFill>
-            <a:srgbClr val="F3E5F5"/>
+            <a:srgbClr val="E3F2FD"/>
           </a:solidFill>
           <a:ln>
             <a:noFill/>
@@ -16475,7 +16475,7 @@
             <a:avLst/>
           </a:prstGeom>
           <a:solidFill>
-            <a:srgbClr val="7B1FA2"/>
+            <a:srgbClr val="1565C0"/>
           </a:solidFill>
           <a:ln>
             <a:noFill/>
@@ -16552,7 +16552,7 @@
             <a:avLst/>
           </a:prstGeom>
           <a:solidFill>
-            <a:srgbClr val="F3E5F5"/>
+            <a:srgbClr val="E3F2FD"/>
           </a:solidFill>
           <a:ln>
             <a:noFill/>
@@ -16731,7 +16731,7 @@
             <a:avLst/>
           </a:prstGeom>
           <a:solidFill>
-            <a:srgbClr val="7B1FA2"/>
+            <a:srgbClr val="1565C0"/>
           </a:solidFill>
           <a:ln>
             <a:noFill/>
@@ -16910,7 +16910,7 @@
             <a:avLst/>
           </a:prstGeom>
           <a:solidFill>
-            <a:srgbClr val="F3E5F5"/>
+            <a:srgbClr val="E3F2FD"/>
           </a:solidFill>
           <a:ln>
             <a:noFill/>
@@ -17089,7 +17089,7 @@
             <a:avLst/>
           </a:prstGeom>
           <a:solidFill>
-            <a:srgbClr val="7B1FA2"/>
+            <a:srgbClr val="1565C0"/>
           </a:solidFill>
           <a:ln>
             <a:noFill/>
@@ -17268,7 +17268,7 @@
             <a:avLst/>
           </a:prstGeom>
           <a:solidFill>
-            <a:srgbClr val="7B1FA2"/>
+            <a:srgbClr val="1565C0"/>
           </a:solidFill>
           <a:ln>
             <a:noFill/>
@@ -17447,7 +17447,7 @@
             <a:avLst/>
           </a:prstGeom>
           <a:solidFill>
-            <a:srgbClr val="F3E5F5"/>
+            <a:srgbClr val="E3F2FD"/>
           </a:solidFill>
           <a:ln>
             <a:noFill/>
@@ -17490,7 +17490,7 @@
             <a:avLst/>
           </a:prstGeom>
           <a:solidFill>
-            <a:srgbClr val="4A148C"/>
+            <a:srgbClr val="0D47A1"/>
           </a:solidFill>
           <a:ln>
             <a:noFill/>
@@ -17567,7 +17567,7 @@
             <a:avLst/>
           </a:prstGeom>
           <a:solidFill>
-            <a:srgbClr val="F3E5F5"/>
+            <a:srgbClr val="E3F2FD"/>
           </a:solidFill>
           <a:ln>
             <a:noFill/>
@@ -17925,7 +17925,7 @@
             <a:avLst/>
           </a:prstGeom>
           <a:solidFill>
-            <a:srgbClr val="F3E5F5"/>
+            <a:srgbClr val="E3F2FD"/>
           </a:solidFill>
           <a:ln>
             <a:noFill/>
@@ -18104,7 +18104,7 @@
             <a:avLst/>
           </a:prstGeom>
           <a:solidFill>
-            <a:srgbClr val="7B1FA2"/>
+            <a:srgbClr val="1565C0"/>
           </a:solidFill>
           <a:ln>
             <a:noFill/>
@@ -18283,7 +18283,7 @@
             <a:avLst/>
           </a:prstGeom>
           <a:solidFill>
-            <a:srgbClr val="7B1FA2"/>
+            <a:srgbClr val="1565C0"/>
           </a:solidFill>
           <a:ln>
             <a:noFill/>
@@ -18523,7 +18523,7 @@
             <a:avLst/>
           </a:prstGeom>
           <a:solidFill>
-            <a:srgbClr val="4A148C"/>
+            <a:srgbClr val="0D47A1"/>
           </a:solidFill>
           <a:ln>
             <a:noFill/>
@@ -18566,7 +18566,7 @@
             <a:avLst/>
           </a:prstGeom>
           <a:solidFill>
-            <a:srgbClr val="CE93D8"/>
+            <a:srgbClr val="42A5F5"/>
           </a:solidFill>
           <a:ln>
             <a:noFill/>
@@ -18677,7 +18677,7 @@
             <a:avLst/>
           </a:prstGeom>
           <a:solidFill>
-            <a:srgbClr val="4A148C"/>
+            <a:srgbClr val="0D47A1"/>
           </a:solidFill>
           <a:ln>
             <a:noFill/>
@@ -18765,7 +18765,7 @@
             <a:r>
               <a:rPr sz="1200" b="1" i="0">
                 <a:solidFill>
-                  <a:srgbClr val="4A148C"/>
+                  <a:srgbClr val="0D47A1"/>
                 </a:solidFill>
               </a:rPr>
               <a:t>FP-growth: min_support=0.05, confidence≥0.95 → BR</a:t>
@@ -18788,7 +18788,7 @@
             <a:avLst/>
           </a:prstGeom>
           <a:solidFill>
-            <a:srgbClr val="F3E5F5"/>
+            <a:srgbClr val="E3F2FD"/>
           </a:solidFill>
           <a:ln>
             <a:noFill/>
@@ -18831,7 +18831,7 @@
             <a:avLst/>
           </a:prstGeom>
           <a:solidFill>
-            <a:srgbClr val="7B1FA2"/>
+            <a:srgbClr val="1565C0"/>
           </a:solidFill>
           <a:ln>
             <a:noFill/>
@@ -18908,7 +18908,7 @@
             <a:avLst/>
           </a:prstGeom>
           <a:solidFill>
-            <a:srgbClr val="4A148C"/>
+            <a:srgbClr val="0D47A1"/>
           </a:solidFill>
           <a:ln>
             <a:noFill/>
@@ -19019,7 +19019,7 @@
             <a:avLst/>
           </a:prstGeom>
           <a:solidFill>
-            <a:srgbClr val="CE93D8"/>
+            <a:srgbClr val="42A5F5"/>
           </a:solidFill>
           <a:ln>
             <a:noFill/>
@@ -19130,7 +19130,7 @@
             <a:avLst/>
           </a:prstGeom>
           <a:solidFill>
-            <a:srgbClr val="7B1FA2"/>
+            <a:srgbClr val="1565C0"/>
           </a:solidFill>
           <a:ln>
             <a:noFill/>
@@ -19241,7 +19241,7 @@
             <a:avLst/>
           </a:prstGeom>
           <a:solidFill>
-            <a:srgbClr val="4A148C"/>
+            <a:srgbClr val="0D47A1"/>
           </a:solidFill>
           <a:ln>
             <a:noFill/>
@@ -19474,7 +19474,7 @@
             <a:avLst/>
           </a:prstGeom>
           <a:solidFill>
-            <a:srgbClr val="F3E5F5"/>
+            <a:srgbClr val="E3F2FD"/>
           </a:solidFill>
           <a:ln>
             <a:noFill/>
@@ -19517,7 +19517,7 @@
             <a:avLst/>
           </a:prstGeom>
           <a:solidFill>
-            <a:srgbClr val="4A148C"/>
+            <a:srgbClr val="0D47A1"/>
           </a:solidFill>
           <a:ln>
             <a:noFill/>
@@ -19594,7 +19594,7 @@
             <a:avLst/>
           </a:prstGeom>
           <a:solidFill>
-            <a:srgbClr val="7B1FA2"/>
+            <a:srgbClr val="1565C0"/>
           </a:solidFill>
           <a:ln>
             <a:noFill/>
@@ -19716,7 +19716,7 @@
             <a:r>
               <a:rPr sz="1200" b="1" i="0">
                 <a:solidFill>
-                  <a:srgbClr val="4A148C"/>
+                  <a:srgbClr val="0D47A1"/>
                 </a:solidFill>
               </a:rPr>
               <a:t>Lift 해석 (기술적 정확성):</a:t>
@@ -19959,7 +19959,7 @@
             <a:avLst/>
           </a:prstGeom>
           <a:solidFill>
-            <a:srgbClr val="4A148C"/>
+            <a:srgbClr val="0D47A1"/>
           </a:solidFill>
           <a:ln>
             <a:noFill/>
@@ -20002,7 +20002,7 @@
             <a:avLst/>
           </a:prstGeom>
           <a:solidFill>
-            <a:srgbClr val="CE93D8"/>
+            <a:srgbClr val="42A5F5"/>
           </a:solidFill>
           <a:ln>
             <a:noFill/>
@@ -20113,7 +20113,7 @@
             <a:avLst/>
           </a:prstGeom>
           <a:solidFill>
-            <a:srgbClr val="F3E5F5"/>
+            <a:srgbClr val="E3F2FD"/>
           </a:solidFill>
           <a:ln>
             <a:noFill/>
@@ -20156,7 +20156,7 @@
             <a:avLst/>
           </a:prstGeom>
           <a:solidFill>
-            <a:srgbClr val="7B1FA2"/>
+            <a:srgbClr val="1565C0"/>
           </a:solidFill>
           <a:ln>
             <a:noFill/>
@@ -20244,7 +20244,7 @@
             <a:r>
               <a:rPr sz="1150" b="0" i="0">
                 <a:solidFill>
-                  <a:srgbClr val="4A148C"/>
+                  <a:srgbClr val="0D47A1"/>
                 </a:solidFill>
               </a:rPr>
               <a:t>공식: FD신뢰도 = (A별 B고유값수==1) 비율
@@ -20268,7 +20268,7 @@
             <a:avLst/>
           </a:prstGeom>
           <a:solidFill>
-            <a:srgbClr val="7B1FA2"/>
+            <a:srgbClr val="1565C0"/>
           </a:solidFill>
           <a:ln>
             <a:noFill/>
@@ -20447,7 +20447,7 @@
             <a:avLst/>
           </a:prstGeom>
           <a:solidFill>
-            <a:srgbClr val="F3E5F5"/>
+            <a:srgbClr val="E3F2FD"/>
           </a:solidFill>
           <a:ln>
             <a:noFill/>
@@ -20569,7 +20569,7 @@
             <a:r>
               <a:rPr sz="1000" b="1" i="0">
                 <a:solidFill>
-                  <a:srgbClr val="4A148C"/>
+                  <a:srgbClr val="0D47A1"/>
                 </a:solidFill>
               </a:rPr>
               <a:t>BR-FD-01</a:t>
@@ -20603,7 +20603,7 @@
             <a:r>
               <a:rPr sz="1000" b="1" i="0">
                 <a:solidFill>
-                  <a:srgbClr val="C62828"/>
+                  <a:srgbClr val="6A1B9A"/>
                 </a:solidFill>
               </a:rPr>
               <a:t>Hard</a:t>
@@ -20748,7 +20748,7 @@
             <a:r>
               <a:rPr sz="1000" b="1" i="0">
                 <a:solidFill>
-                  <a:srgbClr val="4A148C"/>
+                  <a:srgbClr val="0D47A1"/>
                 </a:solidFill>
               </a:rPr>
               <a:t>BR-FD-02</a:t>
@@ -20782,7 +20782,7 @@
             <a:r>
               <a:rPr sz="1000" b="1" i="0">
                 <a:solidFill>
-                  <a:srgbClr val="C62828"/>
+                  <a:srgbClr val="6A1B9A"/>
                 </a:solidFill>
               </a:rPr>
               <a:t>Hard</a:t>
@@ -20805,7 +20805,7 @@
             <a:avLst/>
           </a:prstGeom>
           <a:solidFill>
-            <a:srgbClr val="F3E5F5"/>
+            <a:srgbClr val="E3F2FD"/>
           </a:solidFill>
           <a:ln>
             <a:noFill/>
@@ -20927,7 +20927,7 @@
             <a:r>
               <a:rPr sz="1000" b="1" i="0">
                 <a:solidFill>
-                  <a:srgbClr val="4A148C"/>
+                  <a:srgbClr val="0D47A1"/>
                 </a:solidFill>
               </a:rPr>
               <a:t>BR-FD-03</a:t>
@@ -20961,7 +20961,7 @@
             <a:r>
               <a:rPr sz="1000" b="1" i="0">
                 <a:solidFill>
-                  <a:srgbClr val="C62828"/>
+                  <a:srgbClr val="6A1B9A"/>
                 </a:solidFill>
               </a:rPr>
               <a:t>Hard</a:t>
@@ -21106,7 +21106,7 @@
             <a:r>
               <a:rPr sz="1000" b="1" i="0">
                 <a:solidFill>
-                  <a:srgbClr val="4A148C"/>
+                  <a:srgbClr val="0D47A1"/>
                 </a:solidFill>
               </a:rPr>
               <a:t>BR-FD-04</a:t>
@@ -21140,7 +21140,7 @@
             <a:r>
               <a:rPr sz="1000" b="1" i="0">
                 <a:solidFill>
-                  <a:srgbClr val="F57C00"/>
+                  <a:srgbClr val="E1BEE7"/>
                 </a:solidFill>
               </a:rPr>
               <a:t>Soft→Flag</a:t>
@@ -21163,7 +21163,7 @@
             <a:avLst/>
           </a:prstGeom>
           <a:solidFill>
-            <a:srgbClr val="7B1FA2"/>
+            <a:srgbClr val="1565C0"/>
           </a:solidFill>
           <a:ln>
             <a:noFill/>
@@ -21240,7 +21240,7 @@
             <a:avLst/>
           </a:prstGeom>
           <a:solidFill>
-            <a:srgbClr val="F3E5F5"/>
+            <a:srgbClr val="E3F2FD"/>
           </a:solidFill>
           <a:ln>
             <a:noFill/>
@@ -21328,7 +21328,7 @@
             <a:r>
               <a:rPr sz="1000" b="1" i="0">
                 <a:solidFill>
-                  <a:srgbClr val="7B1FA2"/>
+                  <a:srgbClr val="1565C0"/>
                 </a:solidFill>
               </a:rPr>
               <a:t>어린이</a:t>
@@ -21362,7 +21362,7 @@
             <a:r>
               <a:rPr sz="1000" b="0" i="0">
                 <a:solidFill>
-                  <a:srgbClr val="7B1FA2"/>
+                  <a:srgbClr val="1565C0"/>
                 </a:solidFill>
               </a:rPr>
               <a:t>1,431건</a:t>
@@ -21473,7 +21473,7 @@
             <a:r>
               <a:rPr sz="1000" b="1" i="0">
                 <a:solidFill>
-                  <a:srgbClr val="7B1FA2"/>
+                  <a:srgbClr val="1565C0"/>
                 </a:solidFill>
               </a:rPr>
               <a:t>노약자</a:t>
@@ -21507,7 +21507,7 @@
             <a:r>
               <a:rPr sz="1000" b="0" i="0">
                 <a:solidFill>
-                  <a:srgbClr val="7B1FA2"/>
+                  <a:srgbClr val="1565C0"/>
                 </a:solidFill>
               </a:rPr>
               <a:t>1,573건</a:t>
@@ -21530,7 +21530,7 @@
             <a:avLst/>
           </a:prstGeom>
           <a:solidFill>
-            <a:srgbClr val="F3E5F5"/>
+            <a:srgbClr val="E3F2FD"/>
           </a:solidFill>
           <a:ln>
             <a:noFill/>
@@ -21618,7 +21618,7 @@
             <a:r>
               <a:rPr sz="1000" b="1" i="0">
                 <a:solidFill>
-                  <a:srgbClr val="F57C00"/>
+                  <a:srgbClr val="E1BEE7"/>
                 </a:solidFill>
               </a:rPr>
               <a:t>기타</a:t>
@@ -21652,7 +21652,7 @@
             <a:r>
               <a:rPr sz="1000" b="0" i="0">
                 <a:solidFill>
-                  <a:srgbClr val="F57C00"/>
+                  <a:srgbClr val="E1BEE7"/>
                 </a:solidFill>
               </a:rPr>
               <a:t>5,377건 → BR-FD-04 과제</a:t>
@@ -21675,7 +21675,7 @@
             <a:avLst/>
           </a:prstGeom>
           <a:solidFill>
-            <a:srgbClr val="F3E5F5"/>
+            <a:srgbClr val="E3F2FD"/>
           </a:solidFill>
           <a:ln>
             <a:noFill/>
@@ -21718,7 +21718,7 @@
             <a:avLst/>
           </a:prstGeom>
           <a:solidFill>
-            <a:srgbClr val="4A148C"/>
+            <a:srgbClr val="0D47A1"/>
           </a:solidFill>
           <a:ln>
             <a:noFill/>
@@ -21806,7 +21806,7 @@
             <a:r>
               <a:rPr sz="1150" b="0" i="0">
                 <a:solidFill>
-                  <a:srgbClr val="4A148C"/>
+                  <a:srgbClr val="0D47A1"/>
                 </a:solidFill>
               </a:rPr>
               <a:t>공식: |X∩Y|/|X∪Y| (값 집합·범위 중첩 비율)
@@ -21873,7 +21873,7 @@
             <a:avLst/>
           </a:prstGeom>
           <a:solidFill>
-            <a:srgbClr val="7B1FA2"/>
+            <a:srgbClr val="1565C0"/>
           </a:solidFill>
           <a:ln>
             <a:noFill/>
@@ -21951,7 +21951,7 @@
             <a:avLst/>
           </a:prstGeom>
           <a:solidFill>
-            <a:srgbClr val="4A148C"/>
+            <a:srgbClr val="0D47A1"/>
           </a:solidFill>
           <a:ln>
             <a:noFill/>
@@ -22063,7 +22063,7 @@
             <a:avLst/>
           </a:prstGeom>
           <a:solidFill>
-            <a:srgbClr val="F57C00"/>
+            <a:srgbClr val="E1BEE7"/>
           </a:solidFill>
           <a:ln>
             <a:noFill/>
@@ -22183,7 +22183,7 @@
             <a:avLst/>
           </a:prstGeom>
           <a:solidFill>
-            <a:srgbClr val="7B1FA2"/>
+            <a:srgbClr val="1565C0"/>
           </a:solidFill>
           <a:ln>
             <a:noFill/>
@@ -22261,7 +22261,7 @@
             <a:avLst/>
           </a:prstGeom>
           <a:solidFill>
-            <a:srgbClr val="4A148C"/>
+            <a:srgbClr val="0D47A1"/>
           </a:solidFill>
           <a:ln>
             <a:noFill/>
@@ -22373,7 +22373,7 @@
             <a:avLst/>
           </a:prstGeom>
           <a:solidFill>
-            <a:srgbClr val="F57C00"/>
+            <a:srgbClr val="E1BEE7"/>
           </a:solidFill>
           <a:ln>
             <a:noFill/>
@@ -22493,7 +22493,7 @@
             <a:avLst/>
           </a:prstGeom>
           <a:solidFill>
-            <a:srgbClr val="7B1FA2"/>
+            <a:srgbClr val="1565C0"/>
           </a:solidFill>
           <a:ln>
             <a:noFill/>
@@ -22571,7 +22571,7 @@
             <a:avLst/>
           </a:prstGeom>
           <a:solidFill>
-            <a:srgbClr val="4A148C"/>
+            <a:srgbClr val="0D47A1"/>
           </a:solidFill>
           <a:ln>
             <a:noFill/>
@@ -22683,7 +22683,7 @@
             <a:avLst/>
           </a:prstGeom>
           <a:solidFill>
-            <a:srgbClr val="C62828"/>
+            <a:srgbClr val="6A1B9A"/>
           </a:solidFill>
           <a:ln>
             <a:noFill/>
@@ -22821,7 +22821,7 @@
             <a:avLst/>
           </a:prstGeom>
           <a:solidFill>
-            <a:srgbClr val="4A148C"/>
+            <a:srgbClr val="0D47A1"/>
           </a:solidFill>
           <a:ln>
             <a:noFill/>
@@ -22864,7 +22864,7 @@
             <a:avLst/>
           </a:prstGeom>
           <a:solidFill>
-            <a:srgbClr val="CE93D8"/>
+            <a:srgbClr val="42A5F5"/>
           </a:solidFill>
           <a:ln>
             <a:noFill/>
@@ -22975,7 +22975,7 @@
             <a:avLst/>
           </a:prstGeom>
           <a:solidFill>
-            <a:srgbClr val="F3E5F5"/>
+            <a:srgbClr val="E3F2FD"/>
           </a:solidFill>
           <a:ln>
             <a:noFill/>
@@ -23013,6 +23013,599 @@
           <a:xfrm>
             <a:off x="274320" y="1234440"/>
             <a:ext cx="5394960" cy="384048"/>
+          </a:xfrm>
+          <a:prstGeom prst="rect">
+            <a:avLst/>
+          </a:prstGeom>
+          <a:solidFill>
+            <a:srgbClr val="6A1B9A"/>
+          </a:solidFill>
+          <a:ln>
+            <a:noFill/>
+          </a:ln>
+        </p:spPr>
+        <p:style>
+          <a:lnRef idx="1">
+            <a:schemeClr val="accent1"/>
+          </a:lnRef>
+          <a:fillRef idx="3">
+            <a:schemeClr val="accent1"/>
+          </a:fillRef>
+          <a:effectRef idx="2">
+            <a:schemeClr val="accent1"/>
+          </a:effectRef>
+          <a:fontRef idx="minor">
+            <a:schemeClr val="lt1"/>
+          </a:fontRef>
+        </p:style>
+        <p:txBody>
+          <a:bodyPr rtlCol="0" anchor="ctr"/>
+          <a:lstStyle/>
+          <a:p>
+            <a:pPr algn="ctr"/>
+          </a:p>
+        </p:txBody>
+      </p:sp>
+      <p:sp>
+        <p:nvSpPr>
+          <p:cNvPr id="9" name="TextBox 8"/>
+          <p:cNvSpPr txBox="1"/>
+          <p:nvPr/>
+        </p:nvSpPr>
+        <p:spPr>
+          <a:xfrm>
+            <a:off x="411480" y="1261872"/>
+            <a:ext cx="5120640" cy="347472"/>
+          </a:xfrm>
+          <a:prstGeom prst="rect">
+            <a:avLst/>
+          </a:prstGeom>
+          <a:noFill/>
+        </p:spPr>
+        <p:txBody>
+          <a:bodyPr wrap="square">
+            <a:spAutoFit/>
+          </a:bodyPr>
+          <a:lstStyle/>
+          <a:p>
+            <a:pPr algn="l"/>
+            <a:r>
+              <a:rPr sz="1300" b="1" i="0">
+                <a:solidFill>
+                  <a:srgbClr val="FFFFFF"/>
+                </a:solidFill>
+              </a:rPr>
+              <a:t>Hard Rule  (강제 차단·즉시 거부)</a:t>
+            </a:r>
+          </a:p>
+        </p:txBody>
+      </p:sp>
+      <p:sp>
+        <p:nvSpPr>
+          <p:cNvPr id="10" name="TextBox 9"/>
+          <p:cNvSpPr txBox="1"/>
+          <p:nvPr/>
+        </p:nvSpPr>
+        <p:spPr>
+          <a:xfrm>
+            <a:off x="457200" y="1719072"/>
+            <a:ext cx="5029200" cy="822960"/>
+          </a:xfrm>
+          <a:prstGeom prst="rect">
+            <a:avLst/>
+          </a:prstGeom>
+          <a:noFill/>
+        </p:spPr>
+        <p:txBody>
+          <a:bodyPr wrap="square">
+            <a:spAutoFit/>
+          </a:bodyPr>
+          <a:lstStyle/>
+          <a:p>
+            <a:pPr algn="l"/>
+            <a:r>
+              <a:rPr sz="1200" b="0" i="0">
+                <a:solidFill>
+                  <a:srgbClr val="212121"/>
+                </a:solidFill>
+              </a:rPr>
+              <a:t>• 위반 시 데이터 유입 자체를 차단
+• 시스템 생존에 필수 — FD=1.0 완전 종속 속성
+• 예: 위도/경도 NULL → 공간 분석 자체 불가</a:t>
+            </a:r>
+          </a:p>
+        </p:txBody>
+      </p:sp>
+      <p:sp>
+        <p:nvSpPr>
+          <p:cNvPr id="11" name="Rectangle 10"/>
+          <p:cNvSpPr/>
+          <p:nvPr/>
+        </p:nvSpPr>
+        <p:spPr>
+          <a:xfrm>
+            <a:off x="5943600" y="1234440"/>
+            <a:ext cx="5943600" cy="1371600"/>
+          </a:xfrm>
+          <a:prstGeom prst="rect">
+            <a:avLst/>
+          </a:prstGeom>
+          <a:solidFill>
+            <a:srgbClr val="E3F2FD"/>
+          </a:solidFill>
+          <a:ln>
+            <a:noFill/>
+          </a:ln>
+        </p:spPr>
+        <p:style>
+          <a:lnRef idx="1">
+            <a:schemeClr val="accent1"/>
+          </a:lnRef>
+          <a:fillRef idx="3">
+            <a:schemeClr val="accent1"/>
+          </a:fillRef>
+          <a:effectRef idx="2">
+            <a:schemeClr val="accent1"/>
+          </a:effectRef>
+          <a:fontRef idx="minor">
+            <a:schemeClr val="lt1"/>
+          </a:fontRef>
+        </p:style>
+        <p:txBody>
+          <a:bodyPr rtlCol="0" anchor="ctr"/>
+          <a:lstStyle/>
+          <a:p>
+            <a:pPr algn="ctr"/>
+          </a:p>
+        </p:txBody>
+      </p:sp>
+      <p:sp>
+        <p:nvSpPr>
+          <p:cNvPr id="12" name="Rectangle 11"/>
+          <p:cNvSpPr/>
+          <p:nvPr/>
+        </p:nvSpPr>
+        <p:spPr>
+          <a:xfrm>
+            <a:off x="5943600" y="1234440"/>
+            <a:ext cx="5943600" cy="384048"/>
+          </a:xfrm>
+          <a:prstGeom prst="rect">
+            <a:avLst/>
+          </a:prstGeom>
+          <a:solidFill>
+            <a:srgbClr val="E1BEE7"/>
+          </a:solidFill>
+          <a:ln>
+            <a:noFill/>
+          </a:ln>
+        </p:spPr>
+        <p:style>
+          <a:lnRef idx="1">
+            <a:schemeClr val="accent1"/>
+          </a:lnRef>
+          <a:fillRef idx="3">
+            <a:schemeClr val="accent1"/>
+          </a:fillRef>
+          <a:effectRef idx="2">
+            <a:schemeClr val="accent1"/>
+          </a:effectRef>
+          <a:fontRef idx="minor">
+            <a:schemeClr val="lt1"/>
+          </a:fontRef>
+        </p:style>
+        <p:txBody>
+          <a:bodyPr rtlCol="0" anchor="ctr"/>
+          <a:lstStyle/>
+          <a:p>
+            <a:pPr algn="ctr"/>
+          </a:p>
+        </p:txBody>
+      </p:sp>
+      <p:sp>
+        <p:nvSpPr>
+          <p:cNvPr id="13" name="TextBox 12"/>
+          <p:cNvSpPr txBox="1"/>
+          <p:nvPr/>
+        </p:nvSpPr>
+        <p:spPr>
+          <a:xfrm>
+            <a:off x="6080760" y="1261872"/>
+            <a:ext cx="5669280" cy="347472"/>
+          </a:xfrm>
+          <a:prstGeom prst="rect">
+            <a:avLst/>
+          </a:prstGeom>
+          <a:noFill/>
+        </p:spPr>
+        <p:txBody>
+          <a:bodyPr wrap="square">
+            <a:spAutoFit/>
+          </a:bodyPr>
+          <a:lstStyle/>
+          <a:p>
+            <a:pPr algn="l"/>
+            <a:r>
+              <a:rPr sz="1300" b="1" i="0">
+                <a:solidFill>
+                  <a:srgbClr val="6A1B9A"/>
+                </a:solidFill>
+              </a:rPr>
+              <a:t>Soft Rule  (Flag 태깅 + 관리자 알림)</a:t>
+            </a:r>
+          </a:p>
+        </p:txBody>
+      </p:sp>
+      <p:sp>
+        <p:nvSpPr>
+          <p:cNvPr id="14" name="TextBox 13"/>
+          <p:cNvSpPr txBox="1"/>
+          <p:nvPr/>
+        </p:nvSpPr>
+        <p:spPr>
+          <a:xfrm>
+            <a:off x="6126480" y="1719072"/>
+            <a:ext cx="5669280" cy="822960"/>
+          </a:xfrm>
+          <a:prstGeom prst="rect">
+            <a:avLst/>
+          </a:prstGeom>
+          <a:noFill/>
+        </p:spPr>
+        <p:txBody>
+          <a:bodyPr wrap="square">
+            <a:spAutoFit/>
+          </a:bodyPr>
+          <a:lstStyle/>
+          <a:p>
+            <a:pPr algn="l"/>
+            <a:r>
+              <a:rPr sz="1200" b="0" i="0">
+                <a:solidFill>
+                  <a:srgbClr val="212121"/>
+                </a:solidFill>
+              </a:rPr>
+              <a:t>• 위반 시 차단 대신 Anomaly Flag 기록
+• 도메인 확장 가능성 있는 규칙에 적용
+• 예: 기타 분류 → Log 후 관리자 검토 리포트</a:t>
+            </a:r>
+          </a:p>
+        </p:txBody>
+      </p:sp>
+      <p:sp>
+        <p:nvSpPr>
+          <p:cNvPr id="15" name="Rectangle 14"/>
+          <p:cNvSpPr/>
+          <p:nvPr/>
+        </p:nvSpPr>
+        <p:spPr>
+          <a:xfrm>
+            <a:off x="274320" y="2743200"/>
+            <a:ext cx="11612880" cy="347472"/>
+          </a:xfrm>
+          <a:prstGeom prst="rect">
+            <a:avLst/>
+          </a:prstGeom>
+          <a:solidFill>
+            <a:srgbClr val="1565C0"/>
+          </a:solidFill>
+          <a:ln>
+            <a:noFill/>
+          </a:ln>
+        </p:spPr>
+        <p:style>
+          <a:lnRef idx="1">
+            <a:schemeClr val="accent1"/>
+          </a:lnRef>
+          <a:fillRef idx="3">
+            <a:schemeClr val="accent1"/>
+          </a:fillRef>
+          <a:effectRef idx="2">
+            <a:schemeClr val="accent1"/>
+          </a:effectRef>
+          <a:fontRef idx="minor">
+            <a:schemeClr val="lt1"/>
+          </a:fontRef>
+        </p:style>
+        <p:txBody>
+          <a:bodyPr rtlCol="0" anchor="ctr"/>
+          <a:lstStyle/>
+          <a:p>
+            <a:pPr algn="ctr"/>
+          </a:p>
+        </p:txBody>
+      </p:sp>
+      <p:sp>
+        <p:nvSpPr>
+          <p:cNvPr id="16" name="TextBox 15"/>
+          <p:cNvSpPr txBox="1"/>
+          <p:nvPr/>
+        </p:nvSpPr>
+        <p:spPr>
+          <a:xfrm>
+            <a:off x="320040" y="2770632"/>
+            <a:ext cx="1828800" cy="274320"/>
+          </a:xfrm>
+          <a:prstGeom prst="rect">
+            <a:avLst/>
+          </a:prstGeom>
+          <a:noFill/>
+        </p:spPr>
+        <p:txBody>
+          <a:bodyPr wrap="square">
+            <a:spAutoFit/>
+          </a:bodyPr>
+          <a:lstStyle/>
+          <a:p>
+            <a:pPr algn="l"/>
+            <a:r>
+              <a:rPr sz="1100" b="1" i="0">
+                <a:solidFill>
+                  <a:srgbClr val="FFFFFF"/>
+                </a:solidFill>
+              </a:rPr>
+              <a:t>BR ID</a:t>
+            </a:r>
+          </a:p>
+        </p:txBody>
+      </p:sp>
+      <p:sp>
+        <p:nvSpPr>
+          <p:cNvPr id="17" name="TextBox 16"/>
+          <p:cNvSpPr txBox="1"/>
+          <p:nvPr/>
+        </p:nvSpPr>
+        <p:spPr>
+          <a:xfrm>
+            <a:off x="1554480" y="2770632"/>
+            <a:ext cx="1828800" cy="274320"/>
+          </a:xfrm>
+          <a:prstGeom prst="rect">
+            <a:avLst/>
+          </a:prstGeom>
+          <a:noFill/>
+        </p:spPr>
+        <p:txBody>
+          <a:bodyPr wrap="square">
+            <a:spAutoFit/>
+          </a:bodyPr>
+          <a:lstStyle/>
+          <a:p>
+            <a:pPr algn="l"/>
+            <a:r>
+              <a:rPr sz="1100" b="1" i="0">
+                <a:solidFill>
+                  <a:srgbClr val="FFFFFF"/>
+                </a:solidFill>
+              </a:rPr>
+              <a:t>규칙 요약</a:t>
+            </a:r>
+          </a:p>
+        </p:txBody>
+      </p:sp>
+      <p:sp>
+        <p:nvSpPr>
+          <p:cNvPr id="18" name="TextBox 17"/>
+          <p:cNvSpPr txBox="1"/>
+          <p:nvPr/>
+        </p:nvSpPr>
+        <p:spPr>
+          <a:xfrm>
+            <a:off x="5120640" y="2770632"/>
+            <a:ext cx="1828800" cy="274320"/>
+          </a:xfrm>
+          <a:prstGeom prst="rect">
+            <a:avLst/>
+          </a:prstGeom>
+          <a:noFill/>
+        </p:spPr>
+        <p:txBody>
+          <a:bodyPr wrap="square">
+            <a:spAutoFit/>
+          </a:bodyPr>
+          <a:lstStyle/>
+          <a:p>
+            <a:pPr algn="l"/>
+            <a:r>
+              <a:rPr sz="1100" b="1" i="0">
+                <a:solidFill>
+                  <a:srgbClr val="FFFFFF"/>
+                </a:solidFill>
+              </a:rPr>
+              <a:t>분류</a:t>
+            </a:r>
+          </a:p>
+        </p:txBody>
+      </p:sp>
+      <p:sp>
+        <p:nvSpPr>
+          <p:cNvPr id="19" name="TextBox 18"/>
+          <p:cNvSpPr txBox="1"/>
+          <p:nvPr/>
+        </p:nvSpPr>
+        <p:spPr>
+          <a:xfrm>
+            <a:off x="6583680" y="2770632"/>
+            <a:ext cx="1828800" cy="274320"/>
+          </a:xfrm>
+          <a:prstGeom prst="rect">
+            <a:avLst/>
+          </a:prstGeom>
+          <a:noFill/>
+        </p:spPr>
+        <p:txBody>
+          <a:bodyPr wrap="square">
+            <a:spAutoFit/>
+          </a:bodyPr>
+          <a:lstStyle/>
+          <a:p>
+            <a:pPr algn="l"/>
+            <a:r>
+              <a:rPr sz="1100" b="1" i="0">
+                <a:solidFill>
+                  <a:srgbClr val="FFFFFF"/>
+                </a:solidFill>
+              </a:rPr>
+              <a:t>판단 근거</a:t>
+            </a:r>
+          </a:p>
+        </p:txBody>
+      </p:sp>
+      <p:sp>
+        <p:nvSpPr>
+          <p:cNvPr id="20" name="TextBox 19"/>
+          <p:cNvSpPr txBox="1"/>
+          <p:nvPr/>
+        </p:nvSpPr>
+        <p:spPr>
+          <a:xfrm>
+            <a:off x="9966960" y="2770632"/>
+            <a:ext cx="1828800" cy="274320"/>
+          </a:xfrm>
+          <a:prstGeom prst="rect">
+            <a:avLst/>
+          </a:prstGeom>
+          <a:noFill/>
+        </p:spPr>
+        <p:txBody>
+          <a:bodyPr wrap="square">
+            <a:spAutoFit/>
+          </a:bodyPr>
+          <a:lstStyle/>
+          <a:p>
+            <a:pPr algn="l"/>
+            <a:r>
+              <a:rPr sz="1100" b="1" i="0">
+                <a:solidFill>
+                  <a:srgbClr val="FFFFFF"/>
+                </a:solidFill>
+              </a:rPr>
+              <a:t>확장성</a:t>
+            </a:r>
+          </a:p>
+        </p:txBody>
+      </p:sp>
+      <p:sp>
+        <p:nvSpPr>
+          <p:cNvPr id="21" name="Rectangle 20"/>
+          <p:cNvSpPr/>
+          <p:nvPr/>
+        </p:nvSpPr>
+        <p:spPr>
+          <a:xfrm>
+            <a:off x="274320" y="3127248"/>
+            <a:ext cx="11612880" cy="384048"/>
+          </a:xfrm>
+          <a:prstGeom prst="rect">
+            <a:avLst/>
+          </a:prstGeom>
+          <a:solidFill>
+            <a:srgbClr val="E3F2FD"/>
+          </a:solidFill>
+          <a:ln>
+            <a:noFill/>
+          </a:ln>
+        </p:spPr>
+        <p:style>
+          <a:lnRef idx="1">
+            <a:schemeClr val="accent1"/>
+          </a:lnRef>
+          <a:fillRef idx="3">
+            <a:schemeClr val="accent1"/>
+          </a:fillRef>
+          <a:effectRef idx="2">
+            <a:schemeClr val="accent1"/>
+          </a:effectRef>
+          <a:fontRef idx="minor">
+            <a:schemeClr val="lt1"/>
+          </a:fontRef>
+        </p:style>
+        <p:txBody>
+          <a:bodyPr rtlCol="0" anchor="ctr"/>
+          <a:lstStyle/>
+          <a:p>
+            <a:pPr algn="ctr"/>
+          </a:p>
+        </p:txBody>
+      </p:sp>
+      <p:sp>
+        <p:nvSpPr>
+          <p:cNvPr id="22" name="TextBox 21"/>
+          <p:cNvSpPr txBox="1"/>
+          <p:nvPr/>
+        </p:nvSpPr>
+        <p:spPr>
+          <a:xfrm>
+            <a:off x="320040" y="3218688"/>
+            <a:ext cx="1188720" cy="237744"/>
+          </a:xfrm>
+          <a:prstGeom prst="rect">
+            <a:avLst/>
+          </a:prstGeom>
+          <a:noFill/>
+        </p:spPr>
+        <p:txBody>
+          <a:bodyPr wrap="square">
+            <a:spAutoFit/>
+          </a:bodyPr>
+          <a:lstStyle/>
+          <a:p>
+            <a:pPr algn="l"/>
+            <a:r>
+              <a:rPr sz="950" b="1" i="0">
+                <a:solidFill>
+                  <a:srgbClr val="0D47A1"/>
+                </a:solidFill>
+              </a:rPr>
+              <a:t>BR-FD-01</a:t>
+            </a:r>
+          </a:p>
+        </p:txBody>
+      </p:sp>
+      <p:sp>
+        <p:nvSpPr>
+          <p:cNvPr id="23" name="TextBox 22"/>
+          <p:cNvSpPr txBox="1"/>
+          <p:nvPr/>
+        </p:nvSpPr>
+        <p:spPr>
+          <a:xfrm>
+            <a:off x="1554480" y="3218688"/>
+            <a:ext cx="3474720" cy="237744"/>
+          </a:xfrm>
+          <a:prstGeom prst="rect">
+            <a:avLst/>
+          </a:prstGeom>
+          <a:noFill/>
+        </p:spPr>
+        <p:txBody>
+          <a:bodyPr wrap="square">
+            <a:spAutoFit/>
+          </a:bodyPr>
+          <a:lstStyle/>
+          <a:p>
+            <a:pPr algn="l"/>
+            <a:r>
+              <a:rPr sz="1000" b="0" i="0">
+                <a:solidFill>
+                  <a:srgbClr val="212121"/>
+                </a:solidFill>
+              </a:rPr>
+              <a:t>위도/경도 NOT NULL</a:t>
+            </a:r>
+          </a:p>
+        </p:txBody>
+      </p:sp>
+      <p:sp>
+        <p:nvSpPr>
+          <p:cNvPr id="24" name="Rectangle 23"/>
+          <p:cNvSpPr/>
+          <p:nvPr/>
+        </p:nvSpPr>
+        <p:spPr>
+          <a:xfrm>
+            <a:off x="5120640" y="3182112"/>
+            <a:ext cx="1417320" cy="292608"/>
           </a:xfrm>
           <a:prstGeom prst="rect">
             <a:avLst/>
@@ -23048,90 +23641,122 @@
       </p:sp>
       <p:sp>
         <p:nvSpPr>
-          <p:cNvPr id="9" name="TextBox 8"/>
-          <p:cNvSpPr txBox="1"/>
-          <p:nvPr/>
-        </p:nvSpPr>
-        <p:spPr>
-          <a:xfrm>
-            <a:off x="411480" y="1261872"/>
-            <a:ext cx="5120640" cy="347472"/>
-          </a:xfrm>
-          <a:prstGeom prst="rect">
-            <a:avLst/>
-          </a:prstGeom>
-          <a:noFill/>
-        </p:spPr>
-        <p:txBody>
-          <a:bodyPr wrap="square">
-            <a:spAutoFit/>
-          </a:bodyPr>
-          <a:lstStyle/>
-          <a:p>
-            <a:pPr algn="l"/>
-            <a:r>
-              <a:rPr sz="1300" b="1" i="0">
+          <p:cNvPr id="25" name="TextBox 24"/>
+          <p:cNvSpPr txBox="1"/>
+          <p:nvPr/>
+        </p:nvSpPr>
+        <p:spPr>
+          <a:xfrm>
+            <a:off x="5148072" y="3218688"/>
+            <a:ext cx="1353312" cy="237744"/>
+          </a:xfrm>
+          <a:prstGeom prst="rect">
+            <a:avLst/>
+          </a:prstGeom>
+          <a:noFill/>
+        </p:spPr>
+        <p:txBody>
+          <a:bodyPr wrap="square">
+            <a:spAutoFit/>
+          </a:bodyPr>
+          <a:lstStyle/>
+          <a:p>
+            <a:pPr algn="ctr"/>
+            <a:r>
+              <a:rPr sz="950" b="1" i="0">
                 <a:solidFill>
                   <a:srgbClr val="FFFFFF"/>
                 </a:solidFill>
               </a:rPr>
-              <a:t>Hard Rule  (강제 차단·즉시 거부)</a:t>
-            </a:r>
-          </a:p>
-        </p:txBody>
-      </p:sp>
-      <p:sp>
-        <p:nvSpPr>
-          <p:cNvPr id="10" name="TextBox 9"/>
-          <p:cNvSpPr txBox="1"/>
-          <p:nvPr/>
-        </p:nvSpPr>
-        <p:spPr>
-          <a:xfrm>
-            <a:off x="457200" y="1719072"/>
-            <a:ext cx="5029200" cy="822960"/>
-          </a:xfrm>
-          <a:prstGeom prst="rect">
-            <a:avLst/>
-          </a:prstGeom>
-          <a:noFill/>
-        </p:spPr>
-        <p:txBody>
-          <a:bodyPr wrap="square">
-            <a:spAutoFit/>
-          </a:bodyPr>
-          <a:lstStyle/>
-          <a:p>
-            <a:pPr algn="l"/>
-            <a:r>
-              <a:rPr sz="1200" b="0" i="0">
+              <a:t>Hard</a:t>
+            </a:r>
+          </a:p>
+        </p:txBody>
+      </p:sp>
+      <p:sp>
+        <p:nvSpPr>
+          <p:cNvPr id="26" name="TextBox 25"/>
+          <p:cNvSpPr txBox="1"/>
+          <p:nvPr/>
+        </p:nvSpPr>
+        <p:spPr>
+          <a:xfrm>
+            <a:off x="6601968" y="3218688"/>
+            <a:ext cx="3291840" cy="237744"/>
+          </a:xfrm>
+          <a:prstGeom prst="rect">
+            <a:avLst/>
+          </a:prstGeom>
+          <a:noFill/>
+        </p:spPr>
+        <p:txBody>
+          <a:bodyPr wrap="square">
+            <a:spAutoFit/>
+          </a:bodyPr>
+          <a:lstStyle/>
+          <a:p>
+            <a:pPr algn="l"/>
+            <a:r>
+              <a:rPr sz="1000" b="0" i="0">
                 <a:solidFill>
                   <a:srgbClr val="212121"/>
                 </a:solidFill>
               </a:rPr>
-              <a:t>• 위반 시 데이터 유입 자체를 차단
-• 시스템 생존에 필수 — FD=1.0 완전 종속 속성
-• 예: 위도/경도 NULL → 공간 분석 자체 불가</a:t>
-            </a:r>
-          </a:p>
-        </p:txBody>
-      </p:sp>
-      <p:sp>
-        <p:nvSpPr>
-          <p:cNvPr id="11" name="Rectangle 10"/>
+              <a:t>FP Lift=19.88 의존 / 공간분석 불가</a:t>
+            </a:r>
+          </a:p>
+        </p:txBody>
+      </p:sp>
+      <p:sp>
+        <p:nvSpPr>
+          <p:cNvPr id="27" name="TextBox 26"/>
+          <p:cNvSpPr txBox="1"/>
+          <p:nvPr/>
+        </p:nvSpPr>
+        <p:spPr>
+          <a:xfrm>
+            <a:off x="9948672" y="3218688"/>
+            <a:ext cx="2103120" cy="237744"/>
+          </a:xfrm>
+          <a:prstGeom prst="rect">
+            <a:avLst/>
+          </a:prstGeom>
+          <a:noFill/>
+        </p:spPr>
+        <p:txBody>
+          <a:bodyPr wrap="square">
+            <a:spAutoFit/>
+          </a:bodyPr>
+          <a:lstStyle/>
+          <a:p>
+            <a:pPr algn="l"/>
+            <a:r>
+              <a:rPr sz="950" b="0" i="0">
+                <a:solidFill>
+                  <a:srgbClr val="616161"/>
+                </a:solidFill>
+              </a:rPr>
+              <a:t>없음(필수값)</a:t>
+            </a:r>
+          </a:p>
+        </p:txBody>
+      </p:sp>
+      <p:sp>
+        <p:nvSpPr>
+          <p:cNvPr id="28" name="Rectangle 27"/>
           <p:cNvSpPr/>
           <p:nvPr/>
         </p:nvSpPr>
         <p:spPr>
           <a:xfrm>
-            <a:off x="5943600" y="1234440"/>
-            <a:ext cx="5943600" cy="1371600"/>
+            <a:off x="274320" y="3520440"/>
+            <a:ext cx="11612880" cy="384048"/>
           </a:xfrm>
           <a:prstGeom prst="rect">
             <a:avLst/>
           </a:prstGeom>
           <a:solidFill>
-            <a:srgbClr val="F3E5F5"/>
+            <a:srgbClr val="FFFFFF"/>
           </a:solidFill>
           <a:ln>
             <a:noFill/>
@@ -23161,14 +23786,594 @@
       </p:sp>
       <p:sp>
         <p:nvSpPr>
-          <p:cNvPr id="12" name="Rectangle 11"/>
+          <p:cNvPr id="29" name="TextBox 28"/>
+          <p:cNvSpPr txBox="1"/>
+          <p:nvPr/>
+        </p:nvSpPr>
+        <p:spPr>
+          <a:xfrm>
+            <a:off x="320040" y="3611880"/>
+            <a:ext cx="1188720" cy="237744"/>
+          </a:xfrm>
+          <a:prstGeom prst="rect">
+            <a:avLst/>
+          </a:prstGeom>
+          <a:noFill/>
+        </p:spPr>
+        <p:txBody>
+          <a:bodyPr wrap="square">
+            <a:spAutoFit/>
+          </a:bodyPr>
+          <a:lstStyle/>
+          <a:p>
+            <a:pPr algn="l"/>
+            <a:r>
+              <a:rPr sz="950" b="1" i="0">
+                <a:solidFill>
+                  <a:srgbClr val="0D47A1"/>
+                </a:solidFill>
+              </a:rPr>
+              <a:t>BR-FD-02</a:t>
+            </a:r>
+          </a:p>
+        </p:txBody>
+      </p:sp>
+      <p:sp>
+        <p:nvSpPr>
+          <p:cNvPr id="30" name="TextBox 29"/>
+          <p:cNvSpPr txBox="1"/>
+          <p:nvPr/>
+        </p:nvSpPr>
+        <p:spPr>
+          <a:xfrm>
+            <a:off x="1554480" y="3611880"/>
+            <a:ext cx="3474720" cy="237744"/>
+          </a:xfrm>
+          <a:prstGeom prst="rect">
+            <a:avLst/>
+          </a:prstGeom>
+          <a:noFill/>
+        </p:spPr>
+        <p:txBody>
+          <a:bodyPr wrap="square">
+            <a:spAutoFit/>
+          </a:bodyPr>
+          <a:lstStyle/>
+          <a:p>
+            <a:pPr algn="l"/>
+            <a:r>
+              <a:rPr sz="1000" b="0" i="0">
+                <a:solidFill>
+                  <a:srgbClr val="212121"/>
+                </a:solidFill>
+              </a:rPr>
+              <a:t>사고종류→대상 FD=1.0</a:t>
+            </a:r>
+          </a:p>
+        </p:txBody>
+      </p:sp>
+      <p:sp>
+        <p:nvSpPr>
+          <p:cNvPr id="31" name="Rectangle 30"/>
           <p:cNvSpPr/>
           <p:nvPr/>
         </p:nvSpPr>
         <p:spPr>
           <a:xfrm>
-            <a:off x="5943600" y="1234440"/>
-            <a:ext cx="5943600" cy="384048"/>
+            <a:off x="5120640" y="3575304"/>
+            <a:ext cx="1417320" cy="292608"/>
+          </a:xfrm>
+          <a:prstGeom prst="rect">
+            <a:avLst/>
+          </a:prstGeom>
+          <a:solidFill>
+            <a:srgbClr val="C62828"/>
+          </a:solidFill>
+          <a:ln>
+            <a:noFill/>
+          </a:ln>
+        </p:spPr>
+        <p:style>
+          <a:lnRef idx="1">
+            <a:schemeClr val="accent1"/>
+          </a:lnRef>
+          <a:fillRef idx="3">
+            <a:schemeClr val="accent1"/>
+          </a:fillRef>
+          <a:effectRef idx="2">
+            <a:schemeClr val="accent1"/>
+          </a:effectRef>
+          <a:fontRef idx="minor">
+            <a:schemeClr val="lt1"/>
+          </a:fontRef>
+        </p:style>
+        <p:txBody>
+          <a:bodyPr rtlCol="0" anchor="ctr"/>
+          <a:lstStyle/>
+          <a:p>
+            <a:pPr algn="ctr"/>
+          </a:p>
+        </p:txBody>
+      </p:sp>
+      <p:sp>
+        <p:nvSpPr>
+          <p:cNvPr id="32" name="TextBox 31"/>
+          <p:cNvSpPr txBox="1"/>
+          <p:nvPr/>
+        </p:nvSpPr>
+        <p:spPr>
+          <a:xfrm>
+            <a:off x="5148072" y="3611880"/>
+            <a:ext cx="1353312" cy="237744"/>
+          </a:xfrm>
+          <a:prstGeom prst="rect">
+            <a:avLst/>
+          </a:prstGeom>
+          <a:noFill/>
+        </p:spPr>
+        <p:txBody>
+          <a:bodyPr wrap="square">
+            <a:spAutoFit/>
+          </a:bodyPr>
+          <a:lstStyle/>
+          <a:p>
+            <a:pPr algn="ctr"/>
+            <a:r>
+              <a:rPr sz="950" b="1" i="0">
+                <a:solidFill>
+                  <a:srgbClr val="FFFFFF"/>
+                </a:solidFill>
+              </a:rPr>
+              <a:t>Hard</a:t>
+            </a:r>
+          </a:p>
+        </p:txBody>
+      </p:sp>
+      <p:sp>
+        <p:nvSpPr>
+          <p:cNvPr id="33" name="TextBox 32"/>
+          <p:cNvSpPr txBox="1"/>
+          <p:nvPr/>
+        </p:nvSpPr>
+        <p:spPr>
+          <a:xfrm>
+            <a:off x="6601968" y="3611880"/>
+            <a:ext cx="3291840" cy="237744"/>
+          </a:xfrm>
+          <a:prstGeom prst="rect">
+            <a:avLst/>
+          </a:prstGeom>
+          <a:noFill/>
+        </p:spPr>
+        <p:txBody>
+          <a:bodyPr wrap="square">
+            <a:spAutoFit/>
+          </a:bodyPr>
+          <a:lstStyle/>
+          <a:p>
+            <a:pPr algn="l"/>
+            <a:r>
+              <a:rPr sz="1000" b="0" i="0">
+                <a:solidFill>
+                  <a:srgbClr val="212121"/>
+                </a:solidFill>
+              </a:rPr>
+              <a:t>완전 FD — 위반=데이터 오염</a:t>
+            </a:r>
+          </a:p>
+        </p:txBody>
+      </p:sp>
+      <p:sp>
+        <p:nvSpPr>
+          <p:cNvPr id="34" name="TextBox 33"/>
+          <p:cNvSpPr txBox="1"/>
+          <p:nvPr/>
+        </p:nvSpPr>
+        <p:spPr>
+          <a:xfrm>
+            <a:off x="9948672" y="3611880"/>
+            <a:ext cx="2103120" cy="237744"/>
+          </a:xfrm>
+          <a:prstGeom prst="rect">
+            <a:avLst/>
+          </a:prstGeom>
+          <a:noFill/>
+        </p:spPr>
+        <p:txBody>
+          <a:bodyPr wrap="square">
+            <a:spAutoFit/>
+          </a:bodyPr>
+          <a:lstStyle/>
+          <a:p>
+            <a:pPr algn="l"/>
+            <a:r>
+              <a:rPr sz="950" b="0" i="0">
+                <a:solidFill>
+                  <a:srgbClr val="616161"/>
+                </a:solidFill>
+              </a:rPr>
+              <a:t>신규유형 시 FD 재측정</a:t>
+            </a:r>
+          </a:p>
+        </p:txBody>
+      </p:sp>
+      <p:sp>
+        <p:nvSpPr>
+          <p:cNvPr id="35" name="Rectangle 34"/>
+          <p:cNvSpPr/>
+          <p:nvPr/>
+        </p:nvSpPr>
+        <p:spPr>
+          <a:xfrm>
+            <a:off x="274320" y="3913632"/>
+            <a:ext cx="11612880" cy="384048"/>
+          </a:xfrm>
+          <a:prstGeom prst="rect">
+            <a:avLst/>
+          </a:prstGeom>
+          <a:solidFill>
+            <a:srgbClr val="E3F2FD"/>
+          </a:solidFill>
+          <a:ln>
+            <a:noFill/>
+          </a:ln>
+        </p:spPr>
+        <p:style>
+          <a:lnRef idx="1">
+            <a:schemeClr val="accent1"/>
+          </a:lnRef>
+          <a:fillRef idx="3">
+            <a:schemeClr val="accent1"/>
+          </a:fillRef>
+          <a:effectRef idx="2">
+            <a:schemeClr val="accent1"/>
+          </a:effectRef>
+          <a:fontRef idx="minor">
+            <a:schemeClr val="lt1"/>
+          </a:fontRef>
+        </p:style>
+        <p:txBody>
+          <a:bodyPr rtlCol="0" anchor="ctr"/>
+          <a:lstStyle/>
+          <a:p>
+            <a:pPr algn="ctr"/>
+          </a:p>
+        </p:txBody>
+      </p:sp>
+      <p:sp>
+        <p:nvSpPr>
+          <p:cNvPr id="36" name="TextBox 35"/>
+          <p:cNvSpPr txBox="1"/>
+          <p:nvPr/>
+        </p:nvSpPr>
+        <p:spPr>
+          <a:xfrm>
+            <a:off x="320040" y="4005072"/>
+            <a:ext cx="1188720" cy="237744"/>
+          </a:xfrm>
+          <a:prstGeom prst="rect">
+            <a:avLst/>
+          </a:prstGeom>
+          <a:noFill/>
+        </p:spPr>
+        <p:txBody>
+          <a:bodyPr wrap="square">
+            <a:spAutoFit/>
+          </a:bodyPr>
+          <a:lstStyle/>
+          <a:p>
+            <a:pPr algn="l"/>
+            <a:r>
+              <a:rPr sz="950" b="1" i="0">
+                <a:solidFill>
+                  <a:srgbClr val="0D47A1"/>
+                </a:solidFill>
+              </a:rPr>
+              <a:t>BR-FD-03</a:t>
+            </a:r>
+          </a:p>
+        </p:txBody>
+      </p:sp>
+      <p:sp>
+        <p:nvSpPr>
+          <p:cNvPr id="37" name="TextBox 36"/>
+          <p:cNvSpPr txBox="1"/>
+          <p:nvPr/>
+        </p:nvSpPr>
+        <p:spPr>
+          <a:xfrm>
+            <a:off x="1554480" y="4005072"/>
+            <a:ext cx="3474720" cy="237744"/>
+          </a:xfrm>
+          <a:prstGeom prst="rect">
+            <a:avLst/>
+          </a:prstGeom>
+          <a:noFill/>
+        </p:spPr>
+        <p:txBody>
+          <a:bodyPr wrap="square">
+            <a:spAutoFit/>
+          </a:bodyPr>
+          <a:lstStyle/>
+          <a:p>
+            <a:pPr algn="l"/>
+            <a:r>
+              <a:rPr sz="1000" b="0" i="0">
+                <a:solidFill>
+                  <a:srgbClr val="212121"/>
+                </a:solidFill>
+              </a:rPr>
+              <a:t>시설ID→명칭/주소 NOT NULL</a:t>
+            </a:r>
+          </a:p>
+        </p:txBody>
+      </p:sp>
+      <p:sp>
+        <p:nvSpPr>
+          <p:cNvPr id="38" name="Rectangle 37"/>
+          <p:cNvSpPr/>
+          <p:nvPr/>
+        </p:nvSpPr>
+        <p:spPr>
+          <a:xfrm>
+            <a:off x="5120640" y="3968496"/>
+            <a:ext cx="1417320" cy="292608"/>
+          </a:xfrm>
+          <a:prstGeom prst="rect">
+            <a:avLst/>
+          </a:prstGeom>
+          <a:solidFill>
+            <a:srgbClr val="C62828"/>
+          </a:solidFill>
+          <a:ln>
+            <a:noFill/>
+          </a:ln>
+        </p:spPr>
+        <p:style>
+          <a:lnRef idx="1">
+            <a:schemeClr val="accent1"/>
+          </a:lnRef>
+          <a:fillRef idx="3">
+            <a:schemeClr val="accent1"/>
+          </a:fillRef>
+          <a:effectRef idx="2">
+            <a:schemeClr val="accent1"/>
+          </a:effectRef>
+          <a:fontRef idx="minor">
+            <a:schemeClr val="lt1"/>
+          </a:fontRef>
+        </p:style>
+        <p:txBody>
+          <a:bodyPr rtlCol="0" anchor="ctr"/>
+          <a:lstStyle/>
+          <a:p>
+            <a:pPr algn="ctr"/>
+          </a:p>
+        </p:txBody>
+      </p:sp>
+      <p:sp>
+        <p:nvSpPr>
+          <p:cNvPr id="39" name="TextBox 38"/>
+          <p:cNvSpPr txBox="1"/>
+          <p:nvPr/>
+        </p:nvSpPr>
+        <p:spPr>
+          <a:xfrm>
+            <a:off x="5148072" y="4005072"/>
+            <a:ext cx="1353312" cy="237744"/>
+          </a:xfrm>
+          <a:prstGeom prst="rect">
+            <a:avLst/>
+          </a:prstGeom>
+          <a:noFill/>
+        </p:spPr>
+        <p:txBody>
+          <a:bodyPr wrap="square">
+            <a:spAutoFit/>
+          </a:bodyPr>
+          <a:lstStyle/>
+          <a:p>
+            <a:pPr algn="ctr"/>
+            <a:r>
+              <a:rPr sz="950" b="1" i="0">
+                <a:solidFill>
+                  <a:srgbClr val="FFFFFF"/>
+                </a:solidFill>
+              </a:rPr>
+              <a:t>Hard</a:t>
+            </a:r>
+          </a:p>
+        </p:txBody>
+      </p:sp>
+      <p:sp>
+        <p:nvSpPr>
+          <p:cNvPr id="40" name="TextBox 39"/>
+          <p:cNvSpPr txBox="1"/>
+          <p:nvPr/>
+        </p:nvSpPr>
+        <p:spPr>
+          <a:xfrm>
+            <a:off x="6601968" y="4005072"/>
+            <a:ext cx="3291840" cy="237744"/>
+          </a:xfrm>
+          <a:prstGeom prst="rect">
+            <a:avLst/>
+          </a:prstGeom>
+          <a:noFill/>
+        </p:spPr>
+        <p:txBody>
+          <a:bodyPr wrap="square">
+            <a:spAutoFit/>
+          </a:bodyPr>
+          <a:lstStyle/>
+          <a:p>
+            <a:pPr algn="l"/>
+            <a:r>
+              <a:rPr sz="1000" b="0" i="0">
+                <a:solidFill>
+                  <a:srgbClr val="212121"/>
+                </a:solidFill>
+              </a:rPr>
+              <a:t>식별 불가→운영 규칙 적용 불가</a:t>
+            </a:r>
+          </a:p>
+        </p:txBody>
+      </p:sp>
+      <p:sp>
+        <p:nvSpPr>
+          <p:cNvPr id="41" name="TextBox 40"/>
+          <p:cNvSpPr txBox="1"/>
+          <p:nvPr/>
+        </p:nvSpPr>
+        <p:spPr>
+          <a:xfrm>
+            <a:off x="9948672" y="4005072"/>
+            <a:ext cx="2103120" cy="237744"/>
+          </a:xfrm>
+          <a:prstGeom prst="rect">
+            <a:avLst/>
+          </a:prstGeom>
+          <a:noFill/>
+        </p:spPr>
+        <p:txBody>
+          <a:bodyPr wrap="square">
+            <a:spAutoFit/>
+          </a:bodyPr>
+          <a:lstStyle/>
+          <a:p>
+            <a:pPr algn="l"/>
+            <a:r>
+              <a:rPr sz="950" b="0" i="0">
+                <a:solidFill>
+                  <a:srgbClr val="616161"/>
+                </a:solidFill>
+              </a:rPr>
+              <a:t>없음(필수값)</a:t>
+            </a:r>
+          </a:p>
+        </p:txBody>
+      </p:sp>
+      <p:sp>
+        <p:nvSpPr>
+          <p:cNvPr id="42" name="Rectangle 41"/>
+          <p:cNvSpPr/>
+          <p:nvPr/>
+        </p:nvSpPr>
+        <p:spPr>
+          <a:xfrm>
+            <a:off x="274320" y="4306824"/>
+            <a:ext cx="11612880" cy="384048"/>
+          </a:xfrm>
+          <a:prstGeom prst="rect">
+            <a:avLst/>
+          </a:prstGeom>
+          <a:solidFill>
+            <a:srgbClr val="FFFFFF"/>
+          </a:solidFill>
+          <a:ln>
+            <a:noFill/>
+          </a:ln>
+        </p:spPr>
+        <p:style>
+          <a:lnRef idx="1">
+            <a:schemeClr val="accent1"/>
+          </a:lnRef>
+          <a:fillRef idx="3">
+            <a:schemeClr val="accent1"/>
+          </a:fillRef>
+          <a:effectRef idx="2">
+            <a:schemeClr val="accent1"/>
+          </a:effectRef>
+          <a:fontRef idx="minor">
+            <a:schemeClr val="lt1"/>
+          </a:fontRef>
+        </p:style>
+        <p:txBody>
+          <a:bodyPr rtlCol="0" anchor="ctr"/>
+          <a:lstStyle/>
+          <a:p>
+            <a:pPr algn="ctr"/>
+          </a:p>
+        </p:txBody>
+      </p:sp>
+      <p:sp>
+        <p:nvSpPr>
+          <p:cNvPr id="43" name="TextBox 42"/>
+          <p:cNvSpPr txBox="1"/>
+          <p:nvPr/>
+        </p:nvSpPr>
+        <p:spPr>
+          <a:xfrm>
+            <a:off x="320040" y="4398264"/>
+            <a:ext cx="1188720" cy="237744"/>
+          </a:xfrm>
+          <a:prstGeom prst="rect">
+            <a:avLst/>
+          </a:prstGeom>
+          <a:noFill/>
+        </p:spPr>
+        <p:txBody>
+          <a:bodyPr wrap="square">
+            <a:spAutoFit/>
+          </a:bodyPr>
+          <a:lstStyle/>
+          <a:p>
+            <a:pPr algn="l"/>
+            <a:r>
+              <a:rPr sz="950" b="1" i="0">
+                <a:solidFill>
+                  <a:srgbClr val="0D47A1"/>
+                </a:solidFill>
+              </a:rPr>
+              <a:t>BR-JAC-01</a:t>
+            </a:r>
+          </a:p>
+        </p:txBody>
+      </p:sp>
+      <p:sp>
+        <p:nvSpPr>
+          <p:cNvPr id="44" name="TextBox 43"/>
+          <p:cNvSpPr txBox="1"/>
+          <p:nvPr/>
+        </p:nvSpPr>
+        <p:spPr>
+          <a:xfrm>
+            <a:off x="1554480" y="4398264"/>
+            <a:ext cx="3474720" cy="237744"/>
+          </a:xfrm>
+          <a:prstGeom prst="rect">
+            <a:avLst/>
+          </a:prstGeom>
+          <a:noFill/>
+        </p:spPr>
+        <p:txBody>
+          <a:bodyPr wrap="square">
+            <a:spAutoFit/>
+          </a:bodyPr>
+          <a:lstStyle/>
+          <a:p>
+            <a:pPr algn="l"/>
+            <a:r>
+              <a:rPr sz="1000" b="0" i="0">
+                <a:solidFill>
+                  <a:srgbClr val="212121"/>
+                </a:solidFill>
+              </a:rPr>
+              <a:t>PM10 Jaccard≥0.7 연계</a:t>
+            </a:r>
+          </a:p>
+        </p:txBody>
+      </p:sp>
+      <p:sp>
+        <p:nvSpPr>
+          <p:cNvPr id="45" name="Rectangle 44"/>
+          <p:cNvSpPr/>
+          <p:nvPr/>
+        </p:nvSpPr>
+        <p:spPr>
+          <a:xfrm>
+            <a:off x="5120640" y="4361688"/>
+            <a:ext cx="1417320" cy="292608"/>
           </a:xfrm>
           <a:prstGeom prst="rect">
             <a:avLst/>
@@ -23204,90 +24409,122 @@
       </p:sp>
       <p:sp>
         <p:nvSpPr>
-          <p:cNvPr id="13" name="TextBox 12"/>
-          <p:cNvSpPr txBox="1"/>
-          <p:nvPr/>
-        </p:nvSpPr>
-        <p:spPr>
-          <a:xfrm>
-            <a:off x="6080760" y="1261872"/>
-            <a:ext cx="5669280" cy="347472"/>
-          </a:xfrm>
-          <a:prstGeom prst="rect">
-            <a:avLst/>
-          </a:prstGeom>
-          <a:noFill/>
-        </p:spPr>
-        <p:txBody>
-          <a:bodyPr wrap="square">
-            <a:spAutoFit/>
-          </a:bodyPr>
-          <a:lstStyle/>
-          <a:p>
-            <a:pPr algn="l"/>
-            <a:r>
-              <a:rPr sz="1300" b="1" i="0">
+          <p:cNvPr id="46" name="TextBox 45"/>
+          <p:cNvSpPr txBox="1"/>
+          <p:nvPr/>
+        </p:nvSpPr>
+        <p:spPr>
+          <a:xfrm>
+            <a:off x="5148072" y="4398264"/>
+            <a:ext cx="1353312" cy="237744"/>
+          </a:xfrm>
+          <a:prstGeom prst="rect">
+            <a:avLst/>
+          </a:prstGeom>
+          <a:noFill/>
+        </p:spPr>
+        <p:txBody>
+          <a:bodyPr wrap="square">
+            <a:spAutoFit/>
+          </a:bodyPr>
+          <a:lstStyle/>
+          <a:p>
+            <a:pPr algn="ctr"/>
+            <a:r>
+              <a:rPr sz="950" b="1" i="0">
                 <a:solidFill>
                   <a:srgbClr val="FFFFFF"/>
                 </a:solidFill>
               </a:rPr>
-              <a:t>Soft Rule  (Flag 태깅 + 관리자 알림)</a:t>
-            </a:r>
-          </a:p>
-        </p:txBody>
-      </p:sp>
-      <p:sp>
-        <p:nvSpPr>
-          <p:cNvPr id="14" name="TextBox 13"/>
-          <p:cNvSpPr txBox="1"/>
-          <p:nvPr/>
-        </p:nvSpPr>
-        <p:spPr>
-          <a:xfrm>
-            <a:off x="6126480" y="1719072"/>
-            <a:ext cx="5669280" cy="822960"/>
-          </a:xfrm>
-          <a:prstGeom prst="rect">
-            <a:avLst/>
-          </a:prstGeom>
-          <a:noFill/>
-        </p:spPr>
-        <p:txBody>
-          <a:bodyPr wrap="square">
-            <a:spAutoFit/>
-          </a:bodyPr>
-          <a:lstStyle/>
-          <a:p>
-            <a:pPr algn="l"/>
-            <a:r>
-              <a:rPr sz="1200" b="0" i="0">
+              <a:t>Soft→Flag</a:t>
+            </a:r>
+          </a:p>
+        </p:txBody>
+      </p:sp>
+      <p:sp>
+        <p:nvSpPr>
+          <p:cNvPr id="47" name="TextBox 46"/>
+          <p:cNvSpPr txBox="1"/>
+          <p:nvPr/>
+        </p:nvSpPr>
+        <p:spPr>
+          <a:xfrm>
+            <a:off x="6601968" y="4398264"/>
+            <a:ext cx="3291840" cy="237744"/>
+          </a:xfrm>
+          <a:prstGeom prst="rect">
+            <a:avLst/>
+          </a:prstGeom>
+          <a:noFill/>
+        </p:spPr>
+        <p:txBody>
+          <a:bodyPr wrap="square">
+            <a:spAutoFit/>
+          </a:bodyPr>
+          <a:lstStyle/>
+          <a:p>
+            <a:pPr algn="l"/>
+            <a:r>
+              <a:rPr sz="1000" b="0" i="0">
                 <a:solidFill>
                   <a:srgbClr val="212121"/>
                 </a:solidFill>
               </a:rPr>
-              <a:t>• 위반 시 차단 대신 Anomaly Flag 기록
-• 도메인 확장 가능성 있는 규칙에 적용
-• 예: 기타 분류 → Log 후 관리자 검토 리포트</a:t>
-            </a:r>
-          </a:p>
-        </p:txBody>
-      </p:sp>
-      <p:sp>
-        <p:nvSpPr>
-          <p:cNvPr id="15" name="Rectangle 14"/>
+              <a:t>기준 미달 시 표준화 알림 발송</a:t>
+            </a:r>
+          </a:p>
+        </p:txBody>
+      </p:sp>
+      <p:sp>
+        <p:nvSpPr>
+          <p:cNvPr id="48" name="TextBox 47"/>
+          <p:cNvSpPr txBox="1"/>
+          <p:nvPr/>
+        </p:nvSpPr>
+        <p:spPr>
+          <a:xfrm>
+            <a:off x="9948672" y="4398264"/>
+            <a:ext cx="2103120" cy="237744"/>
+          </a:xfrm>
+          <a:prstGeom prst="rect">
+            <a:avLst/>
+          </a:prstGeom>
+          <a:noFill/>
+        </p:spPr>
+        <p:txBody>
+          <a:bodyPr wrap="square">
+            <a:spAutoFit/>
+          </a:bodyPr>
+          <a:lstStyle/>
+          <a:p>
+            <a:pPr algn="l"/>
+            <a:r>
+              <a:rPr sz="950" b="0" i="0">
+                <a:solidFill>
+                  <a:srgbClr val="616161"/>
+                </a:solidFill>
+              </a:rPr>
+              <a:t>측정장비 교체 시 갱신</a:t>
+            </a:r>
+          </a:p>
+        </p:txBody>
+      </p:sp>
+      <p:sp>
+        <p:nvSpPr>
+          <p:cNvPr id="49" name="Rectangle 48"/>
           <p:cNvSpPr/>
           <p:nvPr/>
         </p:nvSpPr>
         <p:spPr>
           <a:xfrm>
-            <a:off x="274320" y="2743200"/>
-            <a:ext cx="11612880" cy="347472"/>
+            <a:off x="274320" y="4700016"/>
+            <a:ext cx="11612880" cy="384048"/>
           </a:xfrm>
           <a:prstGeom prst="rect">
             <a:avLst/>
           </a:prstGeom>
           <a:solidFill>
-            <a:srgbClr val="7B1FA2"/>
+            <a:srgbClr val="E3F2FD"/>
           </a:solidFill>
           <a:ln>
             <a:noFill/>
@@ -23317,190 +24554,88 @@
       </p:sp>
       <p:sp>
         <p:nvSpPr>
-          <p:cNvPr id="16" name="TextBox 15"/>
-          <p:cNvSpPr txBox="1"/>
-          <p:nvPr/>
-        </p:nvSpPr>
-        <p:spPr>
-          <a:xfrm>
-            <a:off x="320040" y="2770632"/>
-            <a:ext cx="1828800" cy="274320"/>
-          </a:xfrm>
-          <a:prstGeom prst="rect">
-            <a:avLst/>
-          </a:prstGeom>
-          <a:noFill/>
-        </p:spPr>
-        <p:txBody>
-          <a:bodyPr wrap="square">
-            <a:spAutoFit/>
-          </a:bodyPr>
-          <a:lstStyle/>
-          <a:p>
-            <a:pPr algn="l"/>
-            <a:r>
-              <a:rPr sz="1100" b="1" i="0">
-                <a:solidFill>
-                  <a:srgbClr val="FFFFFF"/>
-                </a:solidFill>
-              </a:rPr>
-              <a:t>BR ID</a:t>
-            </a:r>
-          </a:p>
-        </p:txBody>
-      </p:sp>
-      <p:sp>
-        <p:nvSpPr>
-          <p:cNvPr id="17" name="TextBox 16"/>
-          <p:cNvSpPr txBox="1"/>
-          <p:nvPr/>
-        </p:nvSpPr>
-        <p:spPr>
-          <a:xfrm>
-            <a:off x="1554480" y="2770632"/>
-            <a:ext cx="1828800" cy="274320"/>
-          </a:xfrm>
-          <a:prstGeom prst="rect">
-            <a:avLst/>
-          </a:prstGeom>
-          <a:noFill/>
-        </p:spPr>
-        <p:txBody>
-          <a:bodyPr wrap="square">
-            <a:spAutoFit/>
-          </a:bodyPr>
-          <a:lstStyle/>
-          <a:p>
-            <a:pPr algn="l"/>
-            <a:r>
-              <a:rPr sz="1100" b="1" i="0">
-                <a:solidFill>
-                  <a:srgbClr val="FFFFFF"/>
-                </a:solidFill>
-              </a:rPr>
-              <a:t>규칙 요약</a:t>
-            </a:r>
-          </a:p>
-        </p:txBody>
-      </p:sp>
-      <p:sp>
-        <p:nvSpPr>
-          <p:cNvPr id="18" name="TextBox 17"/>
-          <p:cNvSpPr txBox="1"/>
-          <p:nvPr/>
-        </p:nvSpPr>
-        <p:spPr>
-          <a:xfrm>
-            <a:off x="5120640" y="2770632"/>
-            <a:ext cx="1828800" cy="274320"/>
-          </a:xfrm>
-          <a:prstGeom prst="rect">
-            <a:avLst/>
-          </a:prstGeom>
-          <a:noFill/>
-        </p:spPr>
-        <p:txBody>
-          <a:bodyPr wrap="square">
-            <a:spAutoFit/>
-          </a:bodyPr>
-          <a:lstStyle/>
-          <a:p>
-            <a:pPr algn="l"/>
-            <a:r>
-              <a:rPr sz="1100" b="1" i="0">
-                <a:solidFill>
-                  <a:srgbClr val="FFFFFF"/>
-                </a:solidFill>
-              </a:rPr>
-              <a:t>분류</a:t>
-            </a:r>
-          </a:p>
-        </p:txBody>
-      </p:sp>
-      <p:sp>
-        <p:nvSpPr>
-          <p:cNvPr id="19" name="TextBox 18"/>
-          <p:cNvSpPr txBox="1"/>
-          <p:nvPr/>
-        </p:nvSpPr>
-        <p:spPr>
-          <a:xfrm>
-            <a:off x="6583680" y="2770632"/>
-            <a:ext cx="1828800" cy="274320"/>
-          </a:xfrm>
-          <a:prstGeom prst="rect">
-            <a:avLst/>
-          </a:prstGeom>
-          <a:noFill/>
-        </p:spPr>
-        <p:txBody>
-          <a:bodyPr wrap="square">
-            <a:spAutoFit/>
-          </a:bodyPr>
-          <a:lstStyle/>
-          <a:p>
-            <a:pPr algn="l"/>
-            <a:r>
-              <a:rPr sz="1100" b="1" i="0">
-                <a:solidFill>
-                  <a:srgbClr val="FFFFFF"/>
-                </a:solidFill>
-              </a:rPr>
-              <a:t>판단 근거</a:t>
-            </a:r>
-          </a:p>
-        </p:txBody>
-      </p:sp>
-      <p:sp>
-        <p:nvSpPr>
-          <p:cNvPr id="20" name="TextBox 19"/>
-          <p:cNvSpPr txBox="1"/>
-          <p:nvPr/>
-        </p:nvSpPr>
-        <p:spPr>
-          <a:xfrm>
-            <a:off x="9966960" y="2770632"/>
-            <a:ext cx="1828800" cy="274320"/>
-          </a:xfrm>
-          <a:prstGeom prst="rect">
-            <a:avLst/>
-          </a:prstGeom>
-          <a:noFill/>
-        </p:spPr>
-        <p:txBody>
-          <a:bodyPr wrap="square">
-            <a:spAutoFit/>
-          </a:bodyPr>
-          <a:lstStyle/>
-          <a:p>
-            <a:pPr algn="l"/>
-            <a:r>
-              <a:rPr sz="1100" b="1" i="0">
-                <a:solidFill>
-                  <a:srgbClr val="FFFFFF"/>
-                </a:solidFill>
-              </a:rPr>
-              <a:t>확장성</a:t>
-            </a:r>
-          </a:p>
-        </p:txBody>
-      </p:sp>
-      <p:sp>
-        <p:nvSpPr>
-          <p:cNvPr id="21" name="Rectangle 20"/>
+          <p:cNvPr id="50" name="TextBox 49"/>
+          <p:cNvSpPr txBox="1"/>
+          <p:nvPr/>
+        </p:nvSpPr>
+        <p:spPr>
+          <a:xfrm>
+            <a:off x="320040" y="4791455"/>
+            <a:ext cx="1188720" cy="237744"/>
+          </a:xfrm>
+          <a:prstGeom prst="rect">
+            <a:avLst/>
+          </a:prstGeom>
+          <a:noFill/>
+        </p:spPr>
+        <p:txBody>
+          <a:bodyPr wrap="square">
+            <a:spAutoFit/>
+          </a:bodyPr>
+          <a:lstStyle/>
+          <a:p>
+            <a:pPr algn="l"/>
+            <a:r>
+              <a:rPr sz="950" b="1" i="0">
+                <a:solidFill>
+                  <a:srgbClr val="0D47A1"/>
+                </a:solidFill>
+              </a:rPr>
+              <a:t>BR-JAC-02</a:t>
+            </a:r>
+          </a:p>
+        </p:txBody>
+      </p:sp>
+      <p:sp>
+        <p:nvSpPr>
+          <p:cNvPr id="51" name="TextBox 50"/>
+          <p:cNvSpPr txBox="1"/>
+          <p:nvPr/>
+        </p:nvSpPr>
+        <p:spPr>
+          <a:xfrm>
+            <a:off x="1554480" y="4791455"/>
+            <a:ext cx="3474720" cy="237744"/>
+          </a:xfrm>
+          <a:prstGeom prst="rect">
+            <a:avLst/>
+          </a:prstGeom>
+          <a:noFill/>
+        </p:spPr>
+        <p:txBody>
+          <a:bodyPr wrap="square">
+            <a:spAutoFit/>
+          </a:bodyPr>
+          <a:lstStyle/>
+          <a:p>
+            <a:pPr algn="l"/>
+            <a:r>
+              <a:rPr sz="1000" b="0" i="0">
+                <a:solidFill>
+                  <a:srgbClr val="212121"/>
+                </a:solidFill>
+              </a:rPr>
+              <a:t>CCTV↔사고 Jaccard&lt;0.5</a:t>
+            </a:r>
+          </a:p>
+        </p:txBody>
+      </p:sp>
+      <p:sp>
+        <p:nvSpPr>
+          <p:cNvPr id="52" name="Rectangle 51"/>
           <p:cNvSpPr/>
           <p:nvPr/>
         </p:nvSpPr>
         <p:spPr>
           <a:xfrm>
-            <a:off x="274320" y="3127248"/>
-            <a:ext cx="11612880" cy="384048"/>
+            <a:off x="5120640" y="4754879"/>
+            <a:ext cx="1417320" cy="292608"/>
           </a:xfrm>
           <a:prstGeom prst="rect">
             <a:avLst/>
           </a:prstGeom>
           <a:solidFill>
-            <a:srgbClr val="F3E5F5"/>
+            <a:srgbClr val="F57C00"/>
           </a:solidFill>
           <a:ln>
             <a:noFill/>
@@ -23530,48 +24665,48 @@
       </p:sp>
       <p:sp>
         <p:nvSpPr>
-          <p:cNvPr id="22" name="TextBox 21"/>
-          <p:cNvSpPr txBox="1"/>
-          <p:nvPr/>
-        </p:nvSpPr>
-        <p:spPr>
-          <a:xfrm>
-            <a:off x="320040" y="3218688"/>
-            <a:ext cx="1188720" cy="237744"/>
-          </a:xfrm>
-          <a:prstGeom prst="rect">
-            <a:avLst/>
-          </a:prstGeom>
-          <a:noFill/>
-        </p:spPr>
-        <p:txBody>
-          <a:bodyPr wrap="square">
-            <a:spAutoFit/>
-          </a:bodyPr>
-          <a:lstStyle/>
-          <a:p>
-            <a:pPr algn="l"/>
+          <p:cNvPr id="53" name="TextBox 52"/>
+          <p:cNvSpPr txBox="1"/>
+          <p:nvPr/>
+        </p:nvSpPr>
+        <p:spPr>
+          <a:xfrm>
+            <a:off x="5148072" y="4791455"/>
+            <a:ext cx="1353312" cy="237744"/>
+          </a:xfrm>
+          <a:prstGeom prst="rect">
+            <a:avLst/>
+          </a:prstGeom>
+          <a:noFill/>
+        </p:spPr>
+        <p:txBody>
+          <a:bodyPr wrap="square">
+            <a:spAutoFit/>
+          </a:bodyPr>
+          <a:lstStyle/>
+          <a:p>
+            <a:pPr algn="ctr"/>
             <a:r>
               <a:rPr sz="950" b="1" i="0">
                 <a:solidFill>
-                  <a:srgbClr val="4A148C"/>
-                </a:solidFill>
-              </a:rPr>
-              <a:t>BR-FD-01</a:t>
-            </a:r>
-          </a:p>
-        </p:txBody>
-      </p:sp>
-      <p:sp>
-        <p:nvSpPr>
-          <p:cNvPr id="23" name="TextBox 22"/>
-          <p:cNvSpPr txBox="1"/>
-          <p:nvPr/>
-        </p:nvSpPr>
-        <p:spPr>
-          <a:xfrm>
-            <a:off x="1554480" y="3218688"/>
-            <a:ext cx="3474720" cy="237744"/>
+                  <a:srgbClr val="FFFFFF"/>
+                </a:solidFill>
+              </a:rPr>
+              <a:t>Soft→우선순위</a:t>
+            </a:r>
+          </a:p>
+        </p:txBody>
+      </p:sp>
+      <p:sp>
+        <p:nvSpPr>
+          <p:cNvPr id="54" name="TextBox 53"/>
+          <p:cNvSpPr txBox="1"/>
+          <p:nvPr/>
+        </p:nvSpPr>
+        <p:spPr>
+          <a:xfrm>
+            <a:off x="6601968" y="4791455"/>
+            <a:ext cx="3291840" cy="237744"/>
           </a:xfrm>
           <a:prstGeom prst="rect">
             <a:avLst/>
@@ -23591,165 +24726,54 @@
                   <a:srgbClr val="212121"/>
                 </a:solidFill>
               </a:rPr>
-              <a:t>위도/경도 NOT NULL</a:t>
-            </a:r>
-          </a:p>
-        </p:txBody>
-      </p:sp>
-      <p:sp>
-        <p:nvSpPr>
-          <p:cNvPr id="24" name="Rectangle 23"/>
+              <a:t>재배치 Priority 목록 생성</a:t>
+            </a:r>
+          </a:p>
+        </p:txBody>
+      </p:sp>
+      <p:sp>
+        <p:nvSpPr>
+          <p:cNvPr id="55" name="TextBox 54"/>
+          <p:cNvSpPr txBox="1"/>
+          <p:nvPr/>
+        </p:nvSpPr>
+        <p:spPr>
+          <a:xfrm>
+            <a:off x="9948672" y="4791455"/>
+            <a:ext cx="2103120" cy="237744"/>
+          </a:xfrm>
+          <a:prstGeom prst="rect">
+            <a:avLst/>
+          </a:prstGeom>
+          <a:noFill/>
+        </p:spPr>
+        <p:txBody>
+          <a:bodyPr wrap="square">
+            <a:spAutoFit/>
+          </a:bodyPr>
+          <a:lstStyle/>
+          <a:p>
+            <a:pPr algn="l"/>
+            <a:r>
+              <a:rPr sz="950" b="0" i="0">
+                <a:solidFill>
+                  <a:srgbClr val="616161"/>
+                </a:solidFill>
+              </a:rPr>
+              <a:t>CCTV 설치 후 재계산</a:t>
+            </a:r>
+          </a:p>
+        </p:txBody>
+      </p:sp>
+      <p:sp>
+        <p:nvSpPr>
+          <p:cNvPr id="56" name="Rectangle 55"/>
           <p:cNvSpPr/>
           <p:nvPr/>
         </p:nvSpPr>
         <p:spPr>
           <a:xfrm>
-            <a:off x="5120640" y="3182112"/>
-            <a:ext cx="1417320" cy="292608"/>
-          </a:xfrm>
-          <a:prstGeom prst="rect">
-            <a:avLst/>
-          </a:prstGeom>
-          <a:solidFill>
-            <a:srgbClr val="C62828"/>
-          </a:solidFill>
-          <a:ln>
-            <a:noFill/>
-          </a:ln>
-        </p:spPr>
-        <p:style>
-          <a:lnRef idx="1">
-            <a:schemeClr val="accent1"/>
-          </a:lnRef>
-          <a:fillRef idx="3">
-            <a:schemeClr val="accent1"/>
-          </a:fillRef>
-          <a:effectRef idx="2">
-            <a:schemeClr val="accent1"/>
-          </a:effectRef>
-          <a:fontRef idx="minor">
-            <a:schemeClr val="lt1"/>
-          </a:fontRef>
-        </p:style>
-        <p:txBody>
-          <a:bodyPr rtlCol="0" anchor="ctr"/>
-          <a:lstStyle/>
-          <a:p>
-            <a:pPr algn="ctr"/>
-          </a:p>
-        </p:txBody>
-      </p:sp>
-      <p:sp>
-        <p:nvSpPr>
-          <p:cNvPr id="25" name="TextBox 24"/>
-          <p:cNvSpPr txBox="1"/>
-          <p:nvPr/>
-        </p:nvSpPr>
-        <p:spPr>
-          <a:xfrm>
-            <a:off x="5148072" y="3218688"/>
-            <a:ext cx="1353312" cy="237744"/>
-          </a:xfrm>
-          <a:prstGeom prst="rect">
-            <a:avLst/>
-          </a:prstGeom>
-          <a:noFill/>
-        </p:spPr>
-        <p:txBody>
-          <a:bodyPr wrap="square">
-            <a:spAutoFit/>
-          </a:bodyPr>
-          <a:lstStyle/>
-          <a:p>
-            <a:pPr algn="ctr"/>
-            <a:r>
-              <a:rPr sz="950" b="1" i="0">
-                <a:solidFill>
-                  <a:srgbClr val="FFFFFF"/>
-                </a:solidFill>
-              </a:rPr>
-              <a:t>Hard</a:t>
-            </a:r>
-          </a:p>
-        </p:txBody>
-      </p:sp>
-      <p:sp>
-        <p:nvSpPr>
-          <p:cNvPr id="26" name="TextBox 25"/>
-          <p:cNvSpPr txBox="1"/>
-          <p:nvPr/>
-        </p:nvSpPr>
-        <p:spPr>
-          <a:xfrm>
-            <a:off x="6601968" y="3218688"/>
-            <a:ext cx="3291840" cy="237744"/>
-          </a:xfrm>
-          <a:prstGeom prst="rect">
-            <a:avLst/>
-          </a:prstGeom>
-          <a:noFill/>
-        </p:spPr>
-        <p:txBody>
-          <a:bodyPr wrap="square">
-            <a:spAutoFit/>
-          </a:bodyPr>
-          <a:lstStyle/>
-          <a:p>
-            <a:pPr algn="l"/>
-            <a:r>
-              <a:rPr sz="1000" b="0" i="0">
-                <a:solidFill>
-                  <a:srgbClr val="212121"/>
-                </a:solidFill>
-              </a:rPr>
-              <a:t>FP Lift=19.88 의존 / 공간분석 불가</a:t>
-            </a:r>
-          </a:p>
-        </p:txBody>
-      </p:sp>
-      <p:sp>
-        <p:nvSpPr>
-          <p:cNvPr id="27" name="TextBox 26"/>
-          <p:cNvSpPr txBox="1"/>
-          <p:nvPr/>
-        </p:nvSpPr>
-        <p:spPr>
-          <a:xfrm>
-            <a:off x="9948672" y="3218688"/>
-            <a:ext cx="2103120" cy="237744"/>
-          </a:xfrm>
-          <a:prstGeom prst="rect">
-            <a:avLst/>
-          </a:prstGeom>
-          <a:noFill/>
-        </p:spPr>
-        <p:txBody>
-          <a:bodyPr wrap="square">
-            <a:spAutoFit/>
-          </a:bodyPr>
-          <a:lstStyle/>
-          <a:p>
-            <a:pPr algn="l"/>
-            <a:r>
-              <a:rPr sz="950" b="0" i="0">
-                <a:solidFill>
-                  <a:srgbClr val="616161"/>
-                </a:solidFill>
-              </a:rPr>
-              <a:t>없음(필수값)</a:t>
-            </a:r>
-          </a:p>
-        </p:txBody>
-      </p:sp>
-      <p:sp>
-        <p:nvSpPr>
-          <p:cNvPr id="28" name="Rectangle 27"/>
-          <p:cNvSpPr/>
-          <p:nvPr/>
-        </p:nvSpPr>
-        <p:spPr>
-          <a:xfrm>
-            <a:off x="274320" y="3520440"/>
+            <a:off x="274320" y="5093207"/>
             <a:ext cx="11612880" cy="384048"/>
           </a:xfrm>
           <a:prstGeom prst="rect">
@@ -23786,13 +24810,13 @@
       </p:sp>
       <p:sp>
         <p:nvSpPr>
-          <p:cNvPr id="29" name="TextBox 28"/>
-          <p:cNvSpPr txBox="1"/>
-          <p:nvPr/>
-        </p:nvSpPr>
-        <p:spPr>
-          <a:xfrm>
-            <a:off x="320040" y="3611880"/>
+          <p:cNvPr id="57" name="TextBox 56"/>
+          <p:cNvSpPr txBox="1"/>
+          <p:nvPr/>
+        </p:nvSpPr>
+        <p:spPr>
+          <a:xfrm>
+            <a:off x="320040" y="5184647"/>
             <a:ext cx="1188720" cy="237744"/>
           </a:xfrm>
           <a:prstGeom prst="rect">
@@ -23810,23 +24834,23 @@
             <a:r>
               <a:rPr sz="950" b="1" i="0">
                 <a:solidFill>
-                  <a:srgbClr val="4A148C"/>
-                </a:solidFill>
-              </a:rPr>
-              <a:t>BR-FD-02</a:t>
-            </a:r>
-          </a:p>
-        </p:txBody>
-      </p:sp>
-      <p:sp>
-        <p:nvSpPr>
-          <p:cNvPr id="30" name="TextBox 29"/>
-          <p:cNvSpPr txBox="1"/>
-          <p:nvPr/>
-        </p:nvSpPr>
-        <p:spPr>
-          <a:xfrm>
-            <a:off x="1554480" y="3611880"/>
+                  <a:srgbClr val="0D47A1"/>
+                </a:solidFill>
+              </a:rPr>
+              <a:t>BR-FD-04</a:t>
+            </a:r>
+          </a:p>
+        </p:txBody>
+      </p:sp>
+      <p:sp>
+        <p:nvSpPr>
+          <p:cNvPr id="58" name="TextBox 57"/>
+          <p:cNvSpPr txBox="1"/>
+          <p:nvPr/>
+        </p:nvSpPr>
+        <p:spPr>
+          <a:xfrm>
+            <a:off x="1554480" y="5184647"/>
             <a:ext cx="3474720" cy="237744"/>
           </a:xfrm>
           <a:prstGeom prst="rect">
@@ -23847,532 +24871,20 @@
                   <a:srgbClr val="212121"/>
                 </a:solidFill>
               </a:rPr>
-              <a:t>사고종류→대상 FD=1.0</a:t>
-            </a:r>
-          </a:p>
-        </p:txBody>
-      </p:sp>
-      <p:sp>
-        <p:nvSpPr>
-          <p:cNvPr id="31" name="Rectangle 30"/>
+              <a:t>기타 분류 6종 세분화</a:t>
+            </a:r>
+          </a:p>
+        </p:txBody>
+      </p:sp>
+      <p:sp>
+        <p:nvSpPr>
+          <p:cNvPr id="59" name="Rectangle 58"/>
           <p:cNvSpPr/>
           <p:nvPr/>
         </p:nvSpPr>
         <p:spPr>
           <a:xfrm>
-            <a:off x="5120640" y="3575304"/>
-            <a:ext cx="1417320" cy="292608"/>
-          </a:xfrm>
-          <a:prstGeom prst="rect">
-            <a:avLst/>
-          </a:prstGeom>
-          <a:solidFill>
-            <a:srgbClr val="C62828"/>
-          </a:solidFill>
-          <a:ln>
-            <a:noFill/>
-          </a:ln>
-        </p:spPr>
-        <p:style>
-          <a:lnRef idx="1">
-            <a:schemeClr val="accent1"/>
-          </a:lnRef>
-          <a:fillRef idx="3">
-            <a:schemeClr val="accent1"/>
-          </a:fillRef>
-          <a:effectRef idx="2">
-            <a:schemeClr val="accent1"/>
-          </a:effectRef>
-          <a:fontRef idx="minor">
-            <a:schemeClr val="lt1"/>
-          </a:fontRef>
-        </p:style>
-        <p:txBody>
-          <a:bodyPr rtlCol="0" anchor="ctr"/>
-          <a:lstStyle/>
-          <a:p>
-            <a:pPr algn="ctr"/>
-          </a:p>
-        </p:txBody>
-      </p:sp>
-      <p:sp>
-        <p:nvSpPr>
-          <p:cNvPr id="32" name="TextBox 31"/>
-          <p:cNvSpPr txBox="1"/>
-          <p:nvPr/>
-        </p:nvSpPr>
-        <p:spPr>
-          <a:xfrm>
-            <a:off x="5148072" y="3611880"/>
-            <a:ext cx="1353312" cy="237744"/>
-          </a:xfrm>
-          <a:prstGeom prst="rect">
-            <a:avLst/>
-          </a:prstGeom>
-          <a:noFill/>
-        </p:spPr>
-        <p:txBody>
-          <a:bodyPr wrap="square">
-            <a:spAutoFit/>
-          </a:bodyPr>
-          <a:lstStyle/>
-          <a:p>
-            <a:pPr algn="ctr"/>
-            <a:r>
-              <a:rPr sz="950" b="1" i="0">
-                <a:solidFill>
-                  <a:srgbClr val="FFFFFF"/>
-                </a:solidFill>
-              </a:rPr>
-              <a:t>Hard</a:t>
-            </a:r>
-          </a:p>
-        </p:txBody>
-      </p:sp>
-      <p:sp>
-        <p:nvSpPr>
-          <p:cNvPr id="33" name="TextBox 32"/>
-          <p:cNvSpPr txBox="1"/>
-          <p:nvPr/>
-        </p:nvSpPr>
-        <p:spPr>
-          <a:xfrm>
-            <a:off x="6601968" y="3611880"/>
-            <a:ext cx="3291840" cy="237744"/>
-          </a:xfrm>
-          <a:prstGeom prst="rect">
-            <a:avLst/>
-          </a:prstGeom>
-          <a:noFill/>
-        </p:spPr>
-        <p:txBody>
-          <a:bodyPr wrap="square">
-            <a:spAutoFit/>
-          </a:bodyPr>
-          <a:lstStyle/>
-          <a:p>
-            <a:pPr algn="l"/>
-            <a:r>
-              <a:rPr sz="1000" b="0" i="0">
-                <a:solidFill>
-                  <a:srgbClr val="212121"/>
-                </a:solidFill>
-              </a:rPr>
-              <a:t>완전 FD — 위반=데이터 오염</a:t>
-            </a:r>
-          </a:p>
-        </p:txBody>
-      </p:sp>
-      <p:sp>
-        <p:nvSpPr>
-          <p:cNvPr id="34" name="TextBox 33"/>
-          <p:cNvSpPr txBox="1"/>
-          <p:nvPr/>
-        </p:nvSpPr>
-        <p:spPr>
-          <a:xfrm>
-            <a:off x="9948672" y="3611880"/>
-            <a:ext cx="2103120" cy="237744"/>
-          </a:xfrm>
-          <a:prstGeom prst="rect">
-            <a:avLst/>
-          </a:prstGeom>
-          <a:noFill/>
-        </p:spPr>
-        <p:txBody>
-          <a:bodyPr wrap="square">
-            <a:spAutoFit/>
-          </a:bodyPr>
-          <a:lstStyle/>
-          <a:p>
-            <a:pPr algn="l"/>
-            <a:r>
-              <a:rPr sz="950" b="0" i="0">
-                <a:solidFill>
-                  <a:srgbClr val="616161"/>
-                </a:solidFill>
-              </a:rPr>
-              <a:t>신규유형 시 FD 재측정</a:t>
-            </a:r>
-          </a:p>
-        </p:txBody>
-      </p:sp>
-      <p:sp>
-        <p:nvSpPr>
-          <p:cNvPr id="35" name="Rectangle 34"/>
-          <p:cNvSpPr/>
-          <p:nvPr/>
-        </p:nvSpPr>
-        <p:spPr>
-          <a:xfrm>
-            <a:off x="274320" y="3913632"/>
-            <a:ext cx="11612880" cy="384048"/>
-          </a:xfrm>
-          <a:prstGeom prst="rect">
-            <a:avLst/>
-          </a:prstGeom>
-          <a:solidFill>
-            <a:srgbClr val="F3E5F5"/>
-          </a:solidFill>
-          <a:ln>
-            <a:noFill/>
-          </a:ln>
-        </p:spPr>
-        <p:style>
-          <a:lnRef idx="1">
-            <a:schemeClr val="accent1"/>
-          </a:lnRef>
-          <a:fillRef idx="3">
-            <a:schemeClr val="accent1"/>
-          </a:fillRef>
-          <a:effectRef idx="2">
-            <a:schemeClr val="accent1"/>
-          </a:effectRef>
-          <a:fontRef idx="minor">
-            <a:schemeClr val="lt1"/>
-          </a:fontRef>
-        </p:style>
-        <p:txBody>
-          <a:bodyPr rtlCol="0" anchor="ctr"/>
-          <a:lstStyle/>
-          <a:p>
-            <a:pPr algn="ctr"/>
-          </a:p>
-        </p:txBody>
-      </p:sp>
-      <p:sp>
-        <p:nvSpPr>
-          <p:cNvPr id="36" name="TextBox 35"/>
-          <p:cNvSpPr txBox="1"/>
-          <p:nvPr/>
-        </p:nvSpPr>
-        <p:spPr>
-          <a:xfrm>
-            <a:off x="320040" y="4005072"/>
-            <a:ext cx="1188720" cy="237744"/>
-          </a:xfrm>
-          <a:prstGeom prst="rect">
-            <a:avLst/>
-          </a:prstGeom>
-          <a:noFill/>
-        </p:spPr>
-        <p:txBody>
-          <a:bodyPr wrap="square">
-            <a:spAutoFit/>
-          </a:bodyPr>
-          <a:lstStyle/>
-          <a:p>
-            <a:pPr algn="l"/>
-            <a:r>
-              <a:rPr sz="950" b="1" i="0">
-                <a:solidFill>
-                  <a:srgbClr val="4A148C"/>
-                </a:solidFill>
-              </a:rPr>
-              <a:t>BR-FD-03</a:t>
-            </a:r>
-          </a:p>
-        </p:txBody>
-      </p:sp>
-      <p:sp>
-        <p:nvSpPr>
-          <p:cNvPr id="37" name="TextBox 36"/>
-          <p:cNvSpPr txBox="1"/>
-          <p:nvPr/>
-        </p:nvSpPr>
-        <p:spPr>
-          <a:xfrm>
-            <a:off x="1554480" y="4005072"/>
-            <a:ext cx="3474720" cy="237744"/>
-          </a:xfrm>
-          <a:prstGeom prst="rect">
-            <a:avLst/>
-          </a:prstGeom>
-          <a:noFill/>
-        </p:spPr>
-        <p:txBody>
-          <a:bodyPr wrap="square">
-            <a:spAutoFit/>
-          </a:bodyPr>
-          <a:lstStyle/>
-          <a:p>
-            <a:pPr algn="l"/>
-            <a:r>
-              <a:rPr sz="1000" b="0" i="0">
-                <a:solidFill>
-                  <a:srgbClr val="212121"/>
-                </a:solidFill>
-              </a:rPr>
-              <a:t>시설ID→명칭/주소 NOT NULL</a:t>
-            </a:r>
-          </a:p>
-        </p:txBody>
-      </p:sp>
-      <p:sp>
-        <p:nvSpPr>
-          <p:cNvPr id="38" name="Rectangle 37"/>
-          <p:cNvSpPr/>
-          <p:nvPr/>
-        </p:nvSpPr>
-        <p:spPr>
-          <a:xfrm>
-            <a:off x="5120640" y="3968496"/>
-            <a:ext cx="1417320" cy="292608"/>
-          </a:xfrm>
-          <a:prstGeom prst="rect">
-            <a:avLst/>
-          </a:prstGeom>
-          <a:solidFill>
-            <a:srgbClr val="C62828"/>
-          </a:solidFill>
-          <a:ln>
-            <a:noFill/>
-          </a:ln>
-        </p:spPr>
-        <p:style>
-          <a:lnRef idx="1">
-            <a:schemeClr val="accent1"/>
-          </a:lnRef>
-          <a:fillRef idx="3">
-            <a:schemeClr val="accent1"/>
-          </a:fillRef>
-          <a:effectRef idx="2">
-            <a:schemeClr val="accent1"/>
-          </a:effectRef>
-          <a:fontRef idx="minor">
-            <a:schemeClr val="lt1"/>
-          </a:fontRef>
-        </p:style>
-        <p:txBody>
-          <a:bodyPr rtlCol="0" anchor="ctr"/>
-          <a:lstStyle/>
-          <a:p>
-            <a:pPr algn="ctr"/>
-          </a:p>
-        </p:txBody>
-      </p:sp>
-      <p:sp>
-        <p:nvSpPr>
-          <p:cNvPr id="39" name="TextBox 38"/>
-          <p:cNvSpPr txBox="1"/>
-          <p:nvPr/>
-        </p:nvSpPr>
-        <p:spPr>
-          <a:xfrm>
-            <a:off x="5148072" y="4005072"/>
-            <a:ext cx="1353312" cy="237744"/>
-          </a:xfrm>
-          <a:prstGeom prst="rect">
-            <a:avLst/>
-          </a:prstGeom>
-          <a:noFill/>
-        </p:spPr>
-        <p:txBody>
-          <a:bodyPr wrap="square">
-            <a:spAutoFit/>
-          </a:bodyPr>
-          <a:lstStyle/>
-          <a:p>
-            <a:pPr algn="ctr"/>
-            <a:r>
-              <a:rPr sz="950" b="1" i="0">
-                <a:solidFill>
-                  <a:srgbClr val="FFFFFF"/>
-                </a:solidFill>
-              </a:rPr>
-              <a:t>Hard</a:t>
-            </a:r>
-          </a:p>
-        </p:txBody>
-      </p:sp>
-      <p:sp>
-        <p:nvSpPr>
-          <p:cNvPr id="40" name="TextBox 39"/>
-          <p:cNvSpPr txBox="1"/>
-          <p:nvPr/>
-        </p:nvSpPr>
-        <p:spPr>
-          <a:xfrm>
-            <a:off x="6601968" y="4005072"/>
-            <a:ext cx="3291840" cy="237744"/>
-          </a:xfrm>
-          <a:prstGeom prst="rect">
-            <a:avLst/>
-          </a:prstGeom>
-          <a:noFill/>
-        </p:spPr>
-        <p:txBody>
-          <a:bodyPr wrap="square">
-            <a:spAutoFit/>
-          </a:bodyPr>
-          <a:lstStyle/>
-          <a:p>
-            <a:pPr algn="l"/>
-            <a:r>
-              <a:rPr sz="1000" b="0" i="0">
-                <a:solidFill>
-                  <a:srgbClr val="212121"/>
-                </a:solidFill>
-              </a:rPr>
-              <a:t>식별 불가→운영 규칙 적용 불가</a:t>
-            </a:r>
-          </a:p>
-        </p:txBody>
-      </p:sp>
-      <p:sp>
-        <p:nvSpPr>
-          <p:cNvPr id="41" name="TextBox 40"/>
-          <p:cNvSpPr txBox="1"/>
-          <p:nvPr/>
-        </p:nvSpPr>
-        <p:spPr>
-          <a:xfrm>
-            <a:off x="9948672" y="4005072"/>
-            <a:ext cx="2103120" cy="237744"/>
-          </a:xfrm>
-          <a:prstGeom prst="rect">
-            <a:avLst/>
-          </a:prstGeom>
-          <a:noFill/>
-        </p:spPr>
-        <p:txBody>
-          <a:bodyPr wrap="square">
-            <a:spAutoFit/>
-          </a:bodyPr>
-          <a:lstStyle/>
-          <a:p>
-            <a:pPr algn="l"/>
-            <a:r>
-              <a:rPr sz="950" b="0" i="0">
-                <a:solidFill>
-                  <a:srgbClr val="616161"/>
-                </a:solidFill>
-              </a:rPr>
-              <a:t>없음(필수값)</a:t>
-            </a:r>
-          </a:p>
-        </p:txBody>
-      </p:sp>
-      <p:sp>
-        <p:nvSpPr>
-          <p:cNvPr id="42" name="Rectangle 41"/>
-          <p:cNvSpPr/>
-          <p:nvPr/>
-        </p:nvSpPr>
-        <p:spPr>
-          <a:xfrm>
-            <a:off x="274320" y="4306824"/>
-            <a:ext cx="11612880" cy="384048"/>
-          </a:xfrm>
-          <a:prstGeom prst="rect">
-            <a:avLst/>
-          </a:prstGeom>
-          <a:solidFill>
-            <a:srgbClr val="FFFFFF"/>
-          </a:solidFill>
-          <a:ln>
-            <a:noFill/>
-          </a:ln>
-        </p:spPr>
-        <p:style>
-          <a:lnRef idx="1">
-            <a:schemeClr val="accent1"/>
-          </a:lnRef>
-          <a:fillRef idx="3">
-            <a:schemeClr val="accent1"/>
-          </a:fillRef>
-          <a:effectRef idx="2">
-            <a:schemeClr val="accent1"/>
-          </a:effectRef>
-          <a:fontRef idx="minor">
-            <a:schemeClr val="lt1"/>
-          </a:fontRef>
-        </p:style>
-        <p:txBody>
-          <a:bodyPr rtlCol="0" anchor="ctr"/>
-          <a:lstStyle/>
-          <a:p>
-            <a:pPr algn="ctr"/>
-          </a:p>
-        </p:txBody>
-      </p:sp>
-      <p:sp>
-        <p:nvSpPr>
-          <p:cNvPr id="43" name="TextBox 42"/>
-          <p:cNvSpPr txBox="1"/>
-          <p:nvPr/>
-        </p:nvSpPr>
-        <p:spPr>
-          <a:xfrm>
-            <a:off x="320040" y="4398264"/>
-            <a:ext cx="1188720" cy="237744"/>
-          </a:xfrm>
-          <a:prstGeom prst="rect">
-            <a:avLst/>
-          </a:prstGeom>
-          <a:noFill/>
-        </p:spPr>
-        <p:txBody>
-          <a:bodyPr wrap="square">
-            <a:spAutoFit/>
-          </a:bodyPr>
-          <a:lstStyle/>
-          <a:p>
-            <a:pPr algn="l"/>
-            <a:r>
-              <a:rPr sz="950" b="1" i="0">
-                <a:solidFill>
-                  <a:srgbClr val="4A148C"/>
-                </a:solidFill>
-              </a:rPr>
-              <a:t>BR-JAC-01</a:t>
-            </a:r>
-          </a:p>
-        </p:txBody>
-      </p:sp>
-      <p:sp>
-        <p:nvSpPr>
-          <p:cNvPr id="44" name="TextBox 43"/>
-          <p:cNvSpPr txBox="1"/>
-          <p:nvPr/>
-        </p:nvSpPr>
-        <p:spPr>
-          <a:xfrm>
-            <a:off x="1554480" y="4398264"/>
-            <a:ext cx="3474720" cy="237744"/>
-          </a:xfrm>
-          <a:prstGeom prst="rect">
-            <a:avLst/>
-          </a:prstGeom>
-          <a:noFill/>
-        </p:spPr>
-        <p:txBody>
-          <a:bodyPr wrap="square">
-            <a:spAutoFit/>
-          </a:bodyPr>
-          <a:lstStyle/>
-          <a:p>
-            <a:pPr algn="l"/>
-            <a:r>
-              <a:rPr sz="1000" b="0" i="0">
-                <a:solidFill>
-                  <a:srgbClr val="212121"/>
-                </a:solidFill>
-              </a:rPr>
-              <a:t>PM10 Jaccard≥0.7 연계</a:t>
-            </a:r>
-          </a:p>
-        </p:txBody>
-      </p:sp>
-      <p:sp>
-        <p:nvSpPr>
-          <p:cNvPr id="45" name="Rectangle 44"/>
-          <p:cNvSpPr/>
-          <p:nvPr/>
-        </p:nvSpPr>
-        <p:spPr>
-          <a:xfrm>
-            <a:off x="5120640" y="4361688"/>
+            <a:off x="5120640" y="5148071"/>
             <a:ext cx="1417320" cy="292608"/>
           </a:xfrm>
           <a:prstGeom prst="rect">
@@ -24409,518 +24921,6 @@
       </p:sp>
       <p:sp>
         <p:nvSpPr>
-          <p:cNvPr id="46" name="TextBox 45"/>
-          <p:cNvSpPr txBox="1"/>
-          <p:nvPr/>
-        </p:nvSpPr>
-        <p:spPr>
-          <a:xfrm>
-            <a:off x="5148072" y="4398264"/>
-            <a:ext cx="1353312" cy="237744"/>
-          </a:xfrm>
-          <a:prstGeom prst="rect">
-            <a:avLst/>
-          </a:prstGeom>
-          <a:noFill/>
-        </p:spPr>
-        <p:txBody>
-          <a:bodyPr wrap="square">
-            <a:spAutoFit/>
-          </a:bodyPr>
-          <a:lstStyle/>
-          <a:p>
-            <a:pPr algn="ctr"/>
-            <a:r>
-              <a:rPr sz="950" b="1" i="0">
-                <a:solidFill>
-                  <a:srgbClr val="FFFFFF"/>
-                </a:solidFill>
-              </a:rPr>
-              <a:t>Soft→Flag</a:t>
-            </a:r>
-          </a:p>
-        </p:txBody>
-      </p:sp>
-      <p:sp>
-        <p:nvSpPr>
-          <p:cNvPr id="47" name="TextBox 46"/>
-          <p:cNvSpPr txBox="1"/>
-          <p:nvPr/>
-        </p:nvSpPr>
-        <p:spPr>
-          <a:xfrm>
-            <a:off x="6601968" y="4398264"/>
-            <a:ext cx="3291840" cy="237744"/>
-          </a:xfrm>
-          <a:prstGeom prst="rect">
-            <a:avLst/>
-          </a:prstGeom>
-          <a:noFill/>
-        </p:spPr>
-        <p:txBody>
-          <a:bodyPr wrap="square">
-            <a:spAutoFit/>
-          </a:bodyPr>
-          <a:lstStyle/>
-          <a:p>
-            <a:pPr algn="l"/>
-            <a:r>
-              <a:rPr sz="1000" b="0" i="0">
-                <a:solidFill>
-                  <a:srgbClr val="212121"/>
-                </a:solidFill>
-              </a:rPr>
-              <a:t>기준 미달 시 표준화 알림 발송</a:t>
-            </a:r>
-          </a:p>
-        </p:txBody>
-      </p:sp>
-      <p:sp>
-        <p:nvSpPr>
-          <p:cNvPr id="48" name="TextBox 47"/>
-          <p:cNvSpPr txBox="1"/>
-          <p:nvPr/>
-        </p:nvSpPr>
-        <p:spPr>
-          <a:xfrm>
-            <a:off x="9948672" y="4398264"/>
-            <a:ext cx="2103120" cy="237744"/>
-          </a:xfrm>
-          <a:prstGeom prst="rect">
-            <a:avLst/>
-          </a:prstGeom>
-          <a:noFill/>
-        </p:spPr>
-        <p:txBody>
-          <a:bodyPr wrap="square">
-            <a:spAutoFit/>
-          </a:bodyPr>
-          <a:lstStyle/>
-          <a:p>
-            <a:pPr algn="l"/>
-            <a:r>
-              <a:rPr sz="950" b="0" i="0">
-                <a:solidFill>
-                  <a:srgbClr val="616161"/>
-                </a:solidFill>
-              </a:rPr>
-              <a:t>측정장비 교체 시 갱신</a:t>
-            </a:r>
-          </a:p>
-        </p:txBody>
-      </p:sp>
-      <p:sp>
-        <p:nvSpPr>
-          <p:cNvPr id="49" name="Rectangle 48"/>
-          <p:cNvSpPr/>
-          <p:nvPr/>
-        </p:nvSpPr>
-        <p:spPr>
-          <a:xfrm>
-            <a:off x="274320" y="4700016"/>
-            <a:ext cx="11612880" cy="384048"/>
-          </a:xfrm>
-          <a:prstGeom prst="rect">
-            <a:avLst/>
-          </a:prstGeom>
-          <a:solidFill>
-            <a:srgbClr val="F3E5F5"/>
-          </a:solidFill>
-          <a:ln>
-            <a:noFill/>
-          </a:ln>
-        </p:spPr>
-        <p:style>
-          <a:lnRef idx="1">
-            <a:schemeClr val="accent1"/>
-          </a:lnRef>
-          <a:fillRef idx="3">
-            <a:schemeClr val="accent1"/>
-          </a:fillRef>
-          <a:effectRef idx="2">
-            <a:schemeClr val="accent1"/>
-          </a:effectRef>
-          <a:fontRef idx="minor">
-            <a:schemeClr val="lt1"/>
-          </a:fontRef>
-        </p:style>
-        <p:txBody>
-          <a:bodyPr rtlCol="0" anchor="ctr"/>
-          <a:lstStyle/>
-          <a:p>
-            <a:pPr algn="ctr"/>
-          </a:p>
-        </p:txBody>
-      </p:sp>
-      <p:sp>
-        <p:nvSpPr>
-          <p:cNvPr id="50" name="TextBox 49"/>
-          <p:cNvSpPr txBox="1"/>
-          <p:nvPr/>
-        </p:nvSpPr>
-        <p:spPr>
-          <a:xfrm>
-            <a:off x="320040" y="4791455"/>
-            <a:ext cx="1188720" cy="237744"/>
-          </a:xfrm>
-          <a:prstGeom prst="rect">
-            <a:avLst/>
-          </a:prstGeom>
-          <a:noFill/>
-        </p:spPr>
-        <p:txBody>
-          <a:bodyPr wrap="square">
-            <a:spAutoFit/>
-          </a:bodyPr>
-          <a:lstStyle/>
-          <a:p>
-            <a:pPr algn="l"/>
-            <a:r>
-              <a:rPr sz="950" b="1" i="0">
-                <a:solidFill>
-                  <a:srgbClr val="4A148C"/>
-                </a:solidFill>
-              </a:rPr>
-              <a:t>BR-JAC-02</a:t>
-            </a:r>
-          </a:p>
-        </p:txBody>
-      </p:sp>
-      <p:sp>
-        <p:nvSpPr>
-          <p:cNvPr id="51" name="TextBox 50"/>
-          <p:cNvSpPr txBox="1"/>
-          <p:nvPr/>
-        </p:nvSpPr>
-        <p:spPr>
-          <a:xfrm>
-            <a:off x="1554480" y="4791455"/>
-            <a:ext cx="3474720" cy="237744"/>
-          </a:xfrm>
-          <a:prstGeom prst="rect">
-            <a:avLst/>
-          </a:prstGeom>
-          <a:noFill/>
-        </p:spPr>
-        <p:txBody>
-          <a:bodyPr wrap="square">
-            <a:spAutoFit/>
-          </a:bodyPr>
-          <a:lstStyle/>
-          <a:p>
-            <a:pPr algn="l"/>
-            <a:r>
-              <a:rPr sz="1000" b="0" i="0">
-                <a:solidFill>
-                  <a:srgbClr val="212121"/>
-                </a:solidFill>
-              </a:rPr>
-              <a:t>CCTV↔사고 Jaccard&lt;0.5</a:t>
-            </a:r>
-          </a:p>
-        </p:txBody>
-      </p:sp>
-      <p:sp>
-        <p:nvSpPr>
-          <p:cNvPr id="52" name="Rectangle 51"/>
-          <p:cNvSpPr/>
-          <p:nvPr/>
-        </p:nvSpPr>
-        <p:spPr>
-          <a:xfrm>
-            <a:off x="5120640" y="4754879"/>
-            <a:ext cx="1417320" cy="292608"/>
-          </a:xfrm>
-          <a:prstGeom prst="rect">
-            <a:avLst/>
-          </a:prstGeom>
-          <a:solidFill>
-            <a:srgbClr val="F57C00"/>
-          </a:solidFill>
-          <a:ln>
-            <a:noFill/>
-          </a:ln>
-        </p:spPr>
-        <p:style>
-          <a:lnRef idx="1">
-            <a:schemeClr val="accent1"/>
-          </a:lnRef>
-          <a:fillRef idx="3">
-            <a:schemeClr val="accent1"/>
-          </a:fillRef>
-          <a:effectRef idx="2">
-            <a:schemeClr val="accent1"/>
-          </a:effectRef>
-          <a:fontRef idx="minor">
-            <a:schemeClr val="lt1"/>
-          </a:fontRef>
-        </p:style>
-        <p:txBody>
-          <a:bodyPr rtlCol="0" anchor="ctr"/>
-          <a:lstStyle/>
-          <a:p>
-            <a:pPr algn="ctr"/>
-          </a:p>
-        </p:txBody>
-      </p:sp>
-      <p:sp>
-        <p:nvSpPr>
-          <p:cNvPr id="53" name="TextBox 52"/>
-          <p:cNvSpPr txBox="1"/>
-          <p:nvPr/>
-        </p:nvSpPr>
-        <p:spPr>
-          <a:xfrm>
-            <a:off x="5148072" y="4791455"/>
-            <a:ext cx="1353312" cy="237744"/>
-          </a:xfrm>
-          <a:prstGeom prst="rect">
-            <a:avLst/>
-          </a:prstGeom>
-          <a:noFill/>
-        </p:spPr>
-        <p:txBody>
-          <a:bodyPr wrap="square">
-            <a:spAutoFit/>
-          </a:bodyPr>
-          <a:lstStyle/>
-          <a:p>
-            <a:pPr algn="ctr"/>
-            <a:r>
-              <a:rPr sz="950" b="1" i="0">
-                <a:solidFill>
-                  <a:srgbClr val="FFFFFF"/>
-                </a:solidFill>
-              </a:rPr>
-              <a:t>Soft→우선순위</a:t>
-            </a:r>
-          </a:p>
-        </p:txBody>
-      </p:sp>
-      <p:sp>
-        <p:nvSpPr>
-          <p:cNvPr id="54" name="TextBox 53"/>
-          <p:cNvSpPr txBox="1"/>
-          <p:nvPr/>
-        </p:nvSpPr>
-        <p:spPr>
-          <a:xfrm>
-            <a:off x="6601968" y="4791455"/>
-            <a:ext cx="3291840" cy="237744"/>
-          </a:xfrm>
-          <a:prstGeom prst="rect">
-            <a:avLst/>
-          </a:prstGeom>
-          <a:noFill/>
-        </p:spPr>
-        <p:txBody>
-          <a:bodyPr wrap="square">
-            <a:spAutoFit/>
-          </a:bodyPr>
-          <a:lstStyle/>
-          <a:p>
-            <a:pPr algn="l"/>
-            <a:r>
-              <a:rPr sz="1000" b="0" i="0">
-                <a:solidFill>
-                  <a:srgbClr val="212121"/>
-                </a:solidFill>
-              </a:rPr>
-              <a:t>재배치 Priority 목록 생성</a:t>
-            </a:r>
-          </a:p>
-        </p:txBody>
-      </p:sp>
-      <p:sp>
-        <p:nvSpPr>
-          <p:cNvPr id="55" name="TextBox 54"/>
-          <p:cNvSpPr txBox="1"/>
-          <p:nvPr/>
-        </p:nvSpPr>
-        <p:spPr>
-          <a:xfrm>
-            <a:off x="9948672" y="4791455"/>
-            <a:ext cx="2103120" cy="237744"/>
-          </a:xfrm>
-          <a:prstGeom prst="rect">
-            <a:avLst/>
-          </a:prstGeom>
-          <a:noFill/>
-        </p:spPr>
-        <p:txBody>
-          <a:bodyPr wrap="square">
-            <a:spAutoFit/>
-          </a:bodyPr>
-          <a:lstStyle/>
-          <a:p>
-            <a:pPr algn="l"/>
-            <a:r>
-              <a:rPr sz="950" b="0" i="0">
-                <a:solidFill>
-                  <a:srgbClr val="616161"/>
-                </a:solidFill>
-              </a:rPr>
-              <a:t>CCTV 설치 후 재계산</a:t>
-            </a:r>
-          </a:p>
-        </p:txBody>
-      </p:sp>
-      <p:sp>
-        <p:nvSpPr>
-          <p:cNvPr id="56" name="Rectangle 55"/>
-          <p:cNvSpPr/>
-          <p:nvPr/>
-        </p:nvSpPr>
-        <p:spPr>
-          <a:xfrm>
-            <a:off x="274320" y="5093207"/>
-            <a:ext cx="11612880" cy="384048"/>
-          </a:xfrm>
-          <a:prstGeom prst="rect">
-            <a:avLst/>
-          </a:prstGeom>
-          <a:solidFill>
-            <a:srgbClr val="FFFFFF"/>
-          </a:solidFill>
-          <a:ln>
-            <a:noFill/>
-          </a:ln>
-        </p:spPr>
-        <p:style>
-          <a:lnRef idx="1">
-            <a:schemeClr val="accent1"/>
-          </a:lnRef>
-          <a:fillRef idx="3">
-            <a:schemeClr val="accent1"/>
-          </a:fillRef>
-          <a:effectRef idx="2">
-            <a:schemeClr val="accent1"/>
-          </a:effectRef>
-          <a:fontRef idx="minor">
-            <a:schemeClr val="lt1"/>
-          </a:fontRef>
-        </p:style>
-        <p:txBody>
-          <a:bodyPr rtlCol="0" anchor="ctr"/>
-          <a:lstStyle/>
-          <a:p>
-            <a:pPr algn="ctr"/>
-          </a:p>
-        </p:txBody>
-      </p:sp>
-      <p:sp>
-        <p:nvSpPr>
-          <p:cNvPr id="57" name="TextBox 56"/>
-          <p:cNvSpPr txBox="1"/>
-          <p:nvPr/>
-        </p:nvSpPr>
-        <p:spPr>
-          <a:xfrm>
-            <a:off x="320040" y="5184647"/>
-            <a:ext cx="1188720" cy="237744"/>
-          </a:xfrm>
-          <a:prstGeom prst="rect">
-            <a:avLst/>
-          </a:prstGeom>
-          <a:noFill/>
-        </p:spPr>
-        <p:txBody>
-          <a:bodyPr wrap="square">
-            <a:spAutoFit/>
-          </a:bodyPr>
-          <a:lstStyle/>
-          <a:p>
-            <a:pPr algn="l"/>
-            <a:r>
-              <a:rPr sz="950" b="1" i="0">
-                <a:solidFill>
-                  <a:srgbClr val="4A148C"/>
-                </a:solidFill>
-              </a:rPr>
-              <a:t>BR-FD-04</a:t>
-            </a:r>
-          </a:p>
-        </p:txBody>
-      </p:sp>
-      <p:sp>
-        <p:nvSpPr>
-          <p:cNvPr id="58" name="TextBox 57"/>
-          <p:cNvSpPr txBox="1"/>
-          <p:nvPr/>
-        </p:nvSpPr>
-        <p:spPr>
-          <a:xfrm>
-            <a:off x="1554480" y="5184647"/>
-            <a:ext cx="3474720" cy="237744"/>
-          </a:xfrm>
-          <a:prstGeom prst="rect">
-            <a:avLst/>
-          </a:prstGeom>
-          <a:noFill/>
-        </p:spPr>
-        <p:txBody>
-          <a:bodyPr wrap="square">
-            <a:spAutoFit/>
-          </a:bodyPr>
-          <a:lstStyle/>
-          <a:p>
-            <a:pPr algn="l"/>
-            <a:r>
-              <a:rPr sz="1000" b="0" i="0">
-                <a:solidFill>
-                  <a:srgbClr val="212121"/>
-                </a:solidFill>
-              </a:rPr>
-              <a:t>기타 분류 6종 세분화</a:t>
-            </a:r>
-          </a:p>
-        </p:txBody>
-      </p:sp>
-      <p:sp>
-        <p:nvSpPr>
-          <p:cNvPr id="59" name="Rectangle 58"/>
-          <p:cNvSpPr/>
-          <p:nvPr/>
-        </p:nvSpPr>
-        <p:spPr>
-          <a:xfrm>
-            <a:off x="5120640" y="5148071"/>
-            <a:ext cx="1417320" cy="292608"/>
-          </a:xfrm>
-          <a:prstGeom prst="rect">
-            <a:avLst/>
-          </a:prstGeom>
-          <a:solidFill>
-            <a:srgbClr val="F57C00"/>
-          </a:solidFill>
-          <a:ln>
-            <a:noFill/>
-          </a:ln>
-        </p:spPr>
-        <p:style>
-          <a:lnRef idx="1">
-            <a:schemeClr val="accent1"/>
-          </a:lnRef>
-          <a:fillRef idx="3">
-            <a:schemeClr val="accent1"/>
-          </a:fillRef>
-          <a:effectRef idx="2">
-            <a:schemeClr val="accent1"/>
-          </a:effectRef>
-          <a:fontRef idx="minor">
-            <a:schemeClr val="lt1"/>
-          </a:fontRef>
-        </p:style>
-        <p:txBody>
-          <a:bodyPr rtlCol="0" anchor="ctr"/>
-          <a:lstStyle/>
-          <a:p>
-            <a:pPr algn="ctr"/>
-          </a:p>
-        </p:txBody>
-      </p:sp>
-      <p:sp>
-        <p:nvSpPr>
           <p:cNvPr id="60" name="TextBox 59"/>
           <p:cNvSpPr txBox="1"/>
           <p:nvPr/>
@@ -25036,7 +25036,7 @@
             <a:avLst/>
           </a:prstGeom>
           <a:solidFill>
-            <a:srgbClr val="4A148C"/>
+            <a:srgbClr val="0D47A1"/>
           </a:solidFill>
           <a:ln>
             <a:noFill/>
@@ -25220,7 +25220,7 @@
             <a:avLst/>
           </a:prstGeom>
           <a:solidFill>
-            <a:srgbClr val="4A148C"/>
+            <a:srgbClr val="0D47A1"/>
           </a:solidFill>
           <a:ln>
             <a:noFill/>
@@ -25263,7 +25263,7 @@
             <a:avLst/>
           </a:prstGeom>
           <a:solidFill>
-            <a:srgbClr val="CE93D8"/>
+            <a:srgbClr val="42A5F5"/>
           </a:solidFill>
           <a:ln>
             <a:noFill/>
@@ -25374,7 +25374,7 @@
             <a:avLst/>
           </a:prstGeom>
           <a:solidFill>
-            <a:srgbClr val="7B1FA2"/>
+            <a:srgbClr val="1565C0"/>
           </a:solidFill>
           <a:ln>
             <a:noFill/>
@@ -25485,7 +25485,7 @@
             <a:avLst/>
           </a:prstGeom>
           <a:solidFill>
-            <a:srgbClr val="4A148C"/>
+            <a:srgbClr val="0D47A1"/>
           </a:solidFill>
           <a:ln>
             <a:noFill/>
@@ -25597,7 +25597,7 @@
             <a:avLst/>
           </a:prstGeom>
           <a:solidFill>
-            <a:srgbClr val="7B1FA2"/>
+            <a:srgbClr val="1565C0"/>
           </a:solidFill>
           <a:ln>
             <a:noFill/>
@@ -25709,7 +25709,7 @@
             <a:avLst/>
           </a:prstGeom>
           <a:solidFill>
-            <a:srgbClr val="7B1FA2"/>
+            <a:srgbClr val="1565C0"/>
           </a:solidFill>
           <a:ln>
             <a:noFill/>
@@ -25922,7 +25922,7 @@
             <a:avLst/>
           </a:prstGeom>
           <a:solidFill>
-            <a:srgbClr val="F3E5F5"/>
+            <a:srgbClr val="E3F2FD"/>
           </a:solidFill>
           <a:ln>
             <a:noFill/>
@@ -26112,7 +26112,7 @@
             <a:r>
               <a:rPr sz="1100" b="1" i="0">
                 <a:solidFill>
-                  <a:srgbClr val="4A148C"/>
+                  <a:srgbClr val="0D47A1"/>
                 </a:solidFill>
               </a:rPr>
               <a:t>BR-CROSS-01</a:t>
@@ -26325,7 +26325,7 @@
             <a:r>
               <a:rPr sz="1100" b="1" i="0">
                 <a:solidFill>
-                  <a:srgbClr val="4A148C"/>
+                  <a:srgbClr val="0D47A1"/>
                 </a:solidFill>
               </a:rPr>
               <a:t>BR-FD-02</a:t>
@@ -26348,7 +26348,7 @@
             <a:avLst/>
           </a:prstGeom>
           <a:solidFill>
-            <a:srgbClr val="F3E5F5"/>
+            <a:srgbClr val="E3F2FD"/>
           </a:solidFill>
           <a:ln>
             <a:noFill/>
@@ -26538,7 +26538,7 @@
             <a:r>
               <a:rPr sz="1100" b="1" i="0">
                 <a:solidFill>
-                  <a:srgbClr val="4A148C"/>
+                  <a:srgbClr val="0D47A1"/>
                 </a:solidFill>
               </a:rPr>
               <a:t>BR-FD-02</a:t>
@@ -26751,7 +26751,7 @@
             <a:r>
               <a:rPr sz="1100" b="1" i="0">
                 <a:solidFill>
-                  <a:srgbClr val="4A148C"/>
+                  <a:srgbClr val="0D47A1"/>
                 </a:solidFill>
               </a:rPr>
               <a:t>BR-JAC-02</a:t>
@@ -26774,7 +26774,7 @@
             <a:avLst/>
           </a:prstGeom>
           <a:solidFill>
-            <a:srgbClr val="CE93D8"/>
+            <a:srgbClr val="42A5F5"/>
           </a:solidFill>
           <a:ln>
             <a:noFill/>
@@ -26817,7 +26817,7 @@
             <a:avLst/>
           </a:prstGeom>
           <a:solidFill>
-            <a:srgbClr val="7B1FA2"/>
+            <a:srgbClr val="1565C0"/>
           </a:solidFill>
           <a:ln>
             <a:noFill/>
@@ -26929,7 +26929,7 @@
             <a:avLst/>
           </a:prstGeom>
           <a:solidFill>
-            <a:srgbClr val="4A148C"/>
+            <a:srgbClr val="0D47A1"/>
           </a:solidFill>
           <a:ln>
             <a:noFill/>
@@ -27041,7 +27041,7 @@
             <a:avLst/>
           </a:prstGeom>
           <a:solidFill>
-            <a:srgbClr val="7B1FA2"/>
+            <a:srgbClr val="1565C0"/>
           </a:solidFill>
           <a:ln>
             <a:noFill/>
@@ -27153,7 +27153,7 @@
             <a:avLst/>
           </a:prstGeom>
           <a:solidFill>
-            <a:srgbClr val="4A148C"/>
+            <a:srgbClr val="0D47A1"/>
           </a:solidFill>
           <a:ln>
             <a:noFill/>

--- a/스마트시티_데이터거버넌스_BR마이닝_v4.pptx
+++ b/스마트시티_데이터거버넌스_BR마이닝_v4.pptx
@@ -3298,6 +3298,7 @@
                 <a:solidFill>
                   <a:srgbClr val="FFFFFF"/>
                 </a:solidFill>
+                <a:latin typeface="함초롱돋움"/>
               </a:rPr>
               <a:t>데이터가 스스로 제어하는</a:t>
             </a:r>
@@ -3332,6 +3333,7 @@
                 <a:solidFill>
                   <a:srgbClr val="FFFFFF"/>
                 </a:solidFill>
+                <a:latin typeface="함초롱돋움"/>
               </a:rPr>
               <a:t>지능형 거버넌스 시스템 설계</a:t>
             </a:r>
@@ -3366,6 +3368,7 @@
                 <a:solidFill>
                   <a:srgbClr val="BBDEFB"/>
                 </a:solidFill>
+                <a:latin typeface="함초롱돋움"/>
               </a:rPr>
               <a:t>스마트시티 공공데이터 기반  ·  KDD Process  ·  Entropy → AOI → FP-growth → BR</a:t>
             </a:r>
@@ -3400,6 +3403,7 @@
                 <a:solidFill>
                   <a:srgbClr val="90CAF9"/>
                 </a:solidFill>
+                <a:latin typeface="함초롱돋움"/>
               </a:rPr>
               <a:t>Hard Rule  /  Soft Rule  /  Adaptive Quality Management</a:t>
             </a:r>
@@ -3477,6 +3481,7 @@
                 <a:solidFill>
                   <a:srgbClr val="90CAF9"/>
                 </a:solidFill>
+                <a:latin typeface="함초롱돋움"/>
               </a:rPr>
               <a:t>연세대학교 데이터베이스 연구실  |  데이터 인텔리전스  |  2026</a:t>
             </a:r>
@@ -3658,6 +3663,7 @@
                 <a:solidFill>
                   <a:srgbClr val="FFFFFF"/>
                 </a:solidFill>
+                <a:latin typeface="함초롱돋움"/>
               </a:rPr>
               <a:t>09  최종 BR 룰셋 — 14개</a:t>
             </a:r>
@@ -3692,6 +3698,7 @@
                 <a:solidFill>
                   <a:srgbClr val="BBDEFB"/>
                 </a:solidFill>
+                <a:latin typeface="함초롱돋움"/>
               </a:rPr>
               <a:t>데이터 선별(SEL) + KDD 파이프라인 도출(FD·Jaccard·FP·RI) | 전량 실측 수치 기반</a:t>
             </a:r>
@@ -3769,6 +3776,7 @@
                 <a:solidFill>
                   <a:srgbClr val="FFFFFF"/>
                 </a:solidFill>
+                <a:latin typeface="함초롱돋움"/>
               </a:rPr>
               <a:t>BR ID</a:t>
             </a:r>
@@ -3803,6 +3811,7 @@
                 <a:solidFill>
                   <a:srgbClr val="FFFFFF"/>
                 </a:solidFill>
+                <a:latin typeface="함초롱돋움"/>
               </a:rPr>
               <a:t>방법</a:t>
             </a:r>
@@ -3837,6 +3846,7 @@
                 <a:solidFill>
                   <a:srgbClr val="FFFFFF"/>
                 </a:solidFill>
+                <a:latin typeface="함초롱돋움"/>
               </a:rPr>
               <a:t>유형</a:t>
             </a:r>
@@ -3871,6 +3881,7 @@
                 <a:solidFill>
                   <a:srgbClr val="FFFFFF"/>
                 </a:solidFill>
+                <a:latin typeface="함초롱돋움"/>
               </a:rPr>
               <a:t>IF → THEN</a:t>
             </a:r>
@@ -3905,6 +3916,7 @@
                 <a:solidFill>
                   <a:srgbClr val="FFFFFF"/>
                 </a:solidFill>
+                <a:latin typeface="함초롱돋움"/>
               </a:rPr>
               <a:t>근거 수치</a:t>
             </a:r>
@@ -3939,6 +3951,7 @@
                 <a:solidFill>
                   <a:srgbClr val="FFFFFF"/>
                 </a:solidFill>
+                <a:latin typeface="함초롱돋움"/>
               </a:rPr>
               <a:t>Hard/Soft</a:t>
             </a:r>
@@ -4016,6 +4029,7 @@
                 <a:solidFill>
                   <a:srgbClr val="F57C00"/>
                 </a:solidFill>
+                <a:latin typeface="함초롱돋움"/>
               </a:rPr>
               <a:t>BR-SEL-01</a:t>
             </a:r>
@@ -4050,6 +4064,7 @@
                 <a:solidFill>
                   <a:srgbClr val="F57C00"/>
                 </a:solidFill>
+                <a:latin typeface="함초롱돋움"/>
               </a:rPr>
               <a:t>선별BR</a:t>
             </a:r>
@@ -4084,6 +4099,7 @@
                 <a:solidFill>
                   <a:srgbClr val="616161"/>
                 </a:solidFill>
+                <a:latin typeface="함초롱돋움"/>
               </a:rPr>
               <a:t>스마트시티선별</a:t>
             </a:r>
@@ -4118,6 +4134,7 @@
                 <a:solidFill>
                   <a:srgbClr val="212121"/>
                 </a:solidFill>
+                <a:latin typeface="함초롱돋움"/>
               </a:rPr>
               <a:t>5대 서비스 영역 → 수집 대상=Y</a:t>
             </a:r>
@@ -4152,6 +4169,7 @@
                 <a:solidFill>
                   <a:srgbClr val="0D47A1"/>
                 </a:solidFill>
+                <a:latin typeface="함초롱돋움"/>
               </a:rPr>
               <a:t>BR-SEL</a:t>
             </a:r>
@@ -4229,6 +4247,7 @@
                 <a:solidFill>
                   <a:srgbClr val="FFFFFF"/>
                 </a:solidFill>
+                <a:latin typeface="함초롱돋움"/>
               </a:rPr>
               <a:t>Soft</a:t>
             </a:r>
@@ -4306,6 +4325,7 @@
                 <a:solidFill>
                   <a:srgbClr val="F57C00"/>
                 </a:solidFill>
+                <a:latin typeface="함초롱돋움"/>
               </a:rPr>
               <a:t>BR-SEL-02</a:t>
             </a:r>
@@ -4340,6 +4360,7 @@
                 <a:solidFill>
                   <a:srgbClr val="F57C00"/>
                 </a:solidFill>
+                <a:latin typeface="함초롱돋움"/>
               </a:rPr>
               <a:t>선별BR</a:t>
             </a:r>
@@ -4374,6 +4395,7 @@
                 <a:solidFill>
                   <a:srgbClr val="616161"/>
                 </a:solidFill>
+                <a:latin typeface="함초롱돋움"/>
               </a:rPr>
               <a:t>Static/Dynamic</a:t>
             </a:r>
@@ -4408,6 +4430,7 @@
                 <a:solidFill>
                   <a:srgbClr val="212121"/>
                 </a:solidFill>
+                <a:latin typeface="함초롱돋움"/>
               </a:rPr>
               <a:t>업데이트주기=수시 → Dynamic</a:t>
             </a:r>
@@ -4442,6 +4465,7 @@
                 <a:solidFill>
                   <a:srgbClr val="0D47A1"/>
                 </a:solidFill>
+                <a:latin typeface="함초롱돋움"/>
               </a:rPr>
               <a:t>BR-SEL</a:t>
             </a:r>
@@ -4519,6 +4543,7 @@
                 <a:solidFill>
                   <a:srgbClr val="FFFFFF"/>
                 </a:solidFill>
+                <a:latin typeface="함초롱돋움"/>
               </a:rPr>
               <a:t>Soft</a:t>
             </a:r>
@@ -4596,6 +4621,7 @@
                 <a:solidFill>
                   <a:srgbClr val="F57C00"/>
                 </a:solidFill>
+                <a:latin typeface="함초롱돋움"/>
               </a:rPr>
               <a:t>BR-SEL-03</a:t>
             </a:r>
@@ -4630,6 +4656,7 @@
                 <a:solidFill>
                   <a:srgbClr val="F57C00"/>
                 </a:solidFill>
+                <a:latin typeface="함초롱돋움"/>
               </a:rPr>
               <a:t>선별BR</a:t>
             </a:r>
@@ -4664,6 +4691,7 @@
                 <a:solidFill>
                   <a:srgbClr val="616161"/>
                 </a:solidFill>
+                <a:latin typeface="함초롱돋움"/>
               </a:rPr>
               <a:t>A안 컷</a:t>
             </a:r>
@@ -4698,6 +4726,7 @@
                 <a:solidFill>
                   <a:srgbClr val="212121"/>
                 </a:solidFill>
+                <a:latin typeface="함초롱돋움"/>
               </a:rPr>
               <a:t>score 상위 300건 → 다운로드대상</a:t>
             </a:r>
@@ -4732,6 +4761,7 @@
                 <a:solidFill>
                   <a:srgbClr val="0D47A1"/>
                 </a:solidFill>
+                <a:latin typeface="함초롱돋움"/>
               </a:rPr>
               <a:t>300건</a:t>
             </a:r>
@@ -4809,6 +4839,7 @@
                 <a:solidFill>
                   <a:srgbClr val="FFFFFF"/>
                 </a:solidFill>
+                <a:latin typeface="함초롱돋움"/>
               </a:rPr>
               <a:t>Soft</a:t>
             </a:r>
@@ -4886,6 +4917,7 @@
                 <a:solidFill>
                   <a:srgbClr val="C62828"/>
                 </a:solidFill>
+                <a:latin typeface="함초롱돋움"/>
               </a:rPr>
               <a:t>BR-FD-01</a:t>
             </a:r>
@@ -4920,6 +4952,7 @@
                 <a:solidFill>
                   <a:srgbClr val="C62828"/>
                 </a:solidFill>
+                <a:latin typeface="함초롱돋움"/>
               </a:rPr>
               <a:t>FD</a:t>
             </a:r>
@@ -4954,6 +4987,7 @@
                 <a:solidFill>
                   <a:srgbClr val="616161"/>
                 </a:solidFill>
+                <a:latin typeface="함초롱돋움"/>
               </a:rPr>
               <a:t>무결성</a:t>
             </a:r>
@@ -4988,6 +5022,7 @@
                 <a:solidFill>
                   <a:srgbClr val="212121"/>
                 </a:solidFill>
+                <a:latin typeface="함초롱돋움"/>
               </a:rPr>
               <a:t>사고ID → 위도/경도 MUST NOT NULL</a:t>
             </a:r>
@@ -5022,6 +5057,7 @@
                 <a:solidFill>
                   <a:srgbClr val="0D47A1"/>
                 </a:solidFill>
+                <a:latin typeface="함초롱돋움"/>
               </a:rPr>
               <a:t>FD=1.0 / Lift=19.88</a:t>
             </a:r>
@@ -5099,6 +5135,7 @@
                 <a:solidFill>
                   <a:srgbClr val="FFFFFF"/>
                 </a:solidFill>
+                <a:latin typeface="함초롱돋움"/>
               </a:rPr>
               <a:t>Hard</a:t>
             </a:r>
@@ -5176,6 +5213,7 @@
                 <a:solidFill>
                   <a:srgbClr val="C62828"/>
                 </a:solidFill>
+                <a:latin typeface="함초롱돋움"/>
               </a:rPr>
               <a:t>BR-FD-02</a:t>
             </a:r>
@@ -5210,6 +5248,7 @@
                 <a:solidFill>
                   <a:srgbClr val="C62828"/>
                 </a:solidFill>
+                <a:latin typeface="함초롱돋움"/>
               </a:rPr>
               <a:t>FD</a:t>
             </a:r>
@@ -5244,6 +5283,7 @@
                 <a:solidFill>
                   <a:srgbClr val="616161"/>
                 </a:solidFill>
+                <a:latin typeface="함초롱돋움"/>
               </a:rPr>
               <a:t>도메인표준</a:t>
             </a:r>
@@ -5278,6 +5318,7 @@
                 <a:solidFill>
                   <a:srgbClr val="212121"/>
                 </a:solidFill>
+                <a:latin typeface="함초롱돋움"/>
               </a:rPr>
               <a:t>사고종류=CHILD → 대상=어린이 MUST</a:t>
             </a:r>
@@ -5312,6 +5353,7 @@
                 <a:solidFill>
                   <a:srgbClr val="0D47A1"/>
                 </a:solidFill>
+                <a:latin typeface="함초롱돋움"/>
               </a:rPr>
               <a:t>FD=1.0 (8,381건)</a:t>
             </a:r>
@@ -5389,6 +5431,7 @@
                 <a:solidFill>
                   <a:srgbClr val="FFFFFF"/>
                 </a:solidFill>
+                <a:latin typeface="함초롱돋움"/>
               </a:rPr>
               <a:t>Hard</a:t>
             </a:r>
@@ -5466,6 +5509,7 @@
                 <a:solidFill>
                   <a:srgbClr val="C62828"/>
                 </a:solidFill>
+                <a:latin typeface="함초롱돋움"/>
               </a:rPr>
               <a:t>BR-FD-03</a:t>
             </a:r>
@@ -5500,6 +5544,7 @@
                 <a:solidFill>
                   <a:srgbClr val="C62828"/>
                 </a:solidFill>
+                <a:latin typeface="함초롱돋움"/>
               </a:rPr>
               <a:t>FD</a:t>
             </a:r>
@@ -5534,6 +5579,7 @@
                 <a:solidFill>
                   <a:srgbClr val="616161"/>
                 </a:solidFill>
+                <a:latin typeface="함초롱돋움"/>
               </a:rPr>
               <a:t>참조무결성</a:t>
             </a:r>
@@ -5568,6 +5614,7 @@
                 <a:solidFill>
                   <a:srgbClr val="212121"/>
                 </a:solidFill>
+                <a:latin typeface="함초롱돋움"/>
               </a:rPr>
               <a:t>시설ID → 시설명/주소 NOT NULL</a:t>
             </a:r>
@@ -5602,6 +5649,7 @@
                 <a:solidFill>
                   <a:srgbClr val="0D47A1"/>
                 </a:solidFill>
+                <a:latin typeface="함초롱돋움"/>
               </a:rPr>
               <a:t>FD=1.0</a:t>
             </a:r>
@@ -5679,6 +5727,7 @@
                 <a:solidFill>
                   <a:srgbClr val="FFFFFF"/>
                 </a:solidFill>
+                <a:latin typeface="함초롱돋움"/>
               </a:rPr>
               <a:t>Hard</a:t>
             </a:r>
@@ -5756,6 +5805,7 @@
                 <a:solidFill>
                   <a:srgbClr val="616161"/>
                 </a:solidFill>
+                <a:latin typeface="함초롱돋움"/>
               </a:rPr>
               <a:t>BR-FD-04</a:t>
             </a:r>
@@ -5790,6 +5840,7 @@
                 <a:solidFill>
                   <a:srgbClr val="616161"/>
                 </a:solidFill>
+                <a:latin typeface="함초롱돋움"/>
               </a:rPr>
               <a:t>FD+크로스탭</a:t>
             </a:r>
@@ -5824,6 +5875,7 @@
                 <a:solidFill>
                   <a:srgbClr val="616161"/>
                 </a:solidFill>
+                <a:latin typeface="함초롱돋움"/>
               </a:rPr>
               <a:t>거버넌스과제</a:t>
             </a:r>
@@ -5858,6 +5910,7 @@
                 <a:solidFill>
                   <a:srgbClr val="212121"/>
                 </a:solidFill>
+                <a:latin typeface="함초롱돋움"/>
               </a:rPr>
               <a:t>기타 6종 → 분류 세분화 Flag</a:t>
             </a:r>
@@ -5892,6 +5945,7 @@
                 <a:solidFill>
                   <a:srgbClr val="0D47A1"/>
                 </a:solidFill>
+                <a:latin typeface="함초롱돋움"/>
               </a:rPr>
               <a:t>75%가 기타</a:t>
             </a:r>
@@ -5969,6 +6023,7 @@
                 <a:solidFill>
                   <a:srgbClr val="FFFFFF"/>
                 </a:solidFill>
+                <a:latin typeface="함초롱돋움"/>
               </a:rPr>
               <a:t>Soft→Adaptive</a:t>
             </a:r>
@@ -6046,6 +6101,7 @@
                 <a:solidFill>
                   <a:srgbClr val="0D47A1"/>
                 </a:solidFill>
+                <a:latin typeface="함초롱돋움"/>
               </a:rPr>
               <a:t>BR-JAC-01</a:t>
             </a:r>
@@ -6080,6 +6136,7 @@
                 <a:solidFill>
                   <a:srgbClr val="0D47A1"/>
                 </a:solidFill>
+                <a:latin typeface="함초롱돋움"/>
               </a:rPr>
               <a:t>Jaccard</a:t>
             </a:r>
@@ -6114,6 +6171,7 @@
                 <a:solidFill>
                   <a:srgbClr val="616161"/>
                 </a:solidFill>
+                <a:latin typeface="함초롱돋움"/>
               </a:rPr>
               <a:t>도메인표준</a:t>
             </a:r>
@@ -6148,6 +6206,7 @@
                 <a:solidFill>
                   <a:srgbClr val="212121"/>
                 </a:solidFill>
+                <a:latin typeface="함초롱돋움"/>
               </a:rPr>
               <a:t>도시간 PM10 Jaccard≥0.7 MUST</a:t>
             </a:r>
@@ -6182,6 +6241,7 @@
                 <a:solidFill>
                   <a:srgbClr val="0D47A1"/>
                 </a:solidFill>
+                <a:latin typeface="함초롱돋움"/>
               </a:rPr>
               <a:t>현재 0.409</a:t>
             </a:r>
@@ -6259,6 +6319,7 @@
                 <a:solidFill>
                   <a:srgbClr val="FFFFFF"/>
                 </a:solidFill>
+                <a:latin typeface="함초롱돋움"/>
               </a:rPr>
               <a:t>Soft</a:t>
             </a:r>
@@ -6336,6 +6397,7 @@
                 <a:solidFill>
                   <a:srgbClr val="0D47A1"/>
                 </a:solidFill>
+                <a:latin typeface="함초롱돋움"/>
               </a:rPr>
               <a:t>BR-JAC-02</a:t>
             </a:r>
@@ -6370,6 +6432,7 @@
                 <a:solidFill>
                   <a:srgbClr val="0D47A1"/>
                 </a:solidFill>
+                <a:latin typeface="함초롱돋움"/>
               </a:rPr>
               <a:t>Jaccard공간</a:t>
             </a:r>
@@ -6404,6 +6467,7 @@
                 <a:solidFill>
                   <a:srgbClr val="616161"/>
                 </a:solidFill>
+                <a:latin typeface="함초롱돋움"/>
               </a:rPr>
               <a:t>공간거버넌스</a:t>
             </a:r>
@@ -6438,6 +6502,7 @@
                 <a:solidFill>
                   <a:srgbClr val="212121"/>
                 </a:solidFill>
+                <a:latin typeface="함초롱돋움"/>
               </a:rPr>
               <a:t>CCTV↔사고 Jaccard&lt;0.5 → 재배치</a:t>
             </a:r>
@@ -6472,6 +6537,7 @@
                 <a:solidFill>
                   <a:srgbClr val="0D47A1"/>
                 </a:solidFill>
+                <a:latin typeface="함초롱돋움"/>
               </a:rPr>
               <a:t>현재 0.134</a:t>
             </a:r>
@@ -6549,6 +6615,7 @@
                 <a:solidFill>
                   <a:srgbClr val="FFFFFF"/>
                 </a:solidFill>
+                <a:latin typeface="함초롱돋움"/>
               </a:rPr>
               <a:t>Soft</a:t>
             </a:r>
@@ -6626,6 +6693,7 @@
                 <a:solidFill>
                   <a:srgbClr val="2E7D32"/>
                 </a:solidFill>
+                <a:latin typeface="함초롱돋움"/>
               </a:rPr>
               <a:t>BR-FP-01</a:t>
             </a:r>
@@ -6660,6 +6728,7 @@
                 <a:solidFill>
                   <a:srgbClr val="2E7D32"/>
                 </a:solidFill>
+                <a:latin typeface="함초롱돋움"/>
               </a:rPr>
               <a:t>이산화+FP</a:t>
             </a:r>
@@ -6694,6 +6763,7 @@
                 <a:solidFill>
                   <a:srgbClr val="616161"/>
                 </a:solidFill>
+                <a:latin typeface="함초롱돋움"/>
               </a:rPr>
               <a:t>운영BR</a:t>
             </a:r>
@@ -6728,6 +6798,7 @@
                 <a:solidFill>
                   <a:srgbClr val="212121"/>
                 </a:solidFill>
+                <a:latin typeface="함초롱돋움"/>
               </a:rPr>
               <a:t>PM10 L3/L4 → 취약계층 알림 ≤1h</a:t>
             </a:r>
@@ -6762,6 +6833,7 @@
                 <a:solidFill>
                   <a:srgbClr val="0D47A1"/>
                 </a:solidFill>
+                <a:latin typeface="함초롱돋움"/>
               </a:rPr>
               <a:t>supp=3.8%</a:t>
             </a:r>
@@ -6839,6 +6911,7 @@
                 <a:solidFill>
                   <a:srgbClr val="FFFFFF"/>
                 </a:solidFill>
+                <a:latin typeface="함초롱돋움"/>
               </a:rPr>
               <a:t>Soft</a:t>
             </a:r>
@@ -6916,6 +6989,7 @@
                 <a:solidFill>
                   <a:srgbClr val="616161"/>
                 </a:solidFill>
+                <a:latin typeface="함초롱돋움"/>
               </a:rPr>
               <a:t>BR-FP-02</a:t>
             </a:r>
@@ -6950,6 +7024,7 @@
                 <a:solidFill>
                   <a:srgbClr val="616161"/>
                 </a:solidFill>
+                <a:latin typeface="함초롱돋움"/>
               </a:rPr>
               <a:t>엔트로피</a:t>
             </a:r>
@@ -6984,6 +7059,7 @@
                 <a:solidFill>
                   <a:srgbClr val="616161"/>
                 </a:solidFill>
+                <a:latin typeface="함초롱돋움"/>
               </a:rPr>
               <a:t>변수선택</a:t>
             </a:r>
@@ -7018,6 +7094,7 @@
                 <a:solidFill>
                   <a:srgbClr val="212121"/>
                 </a:solidFill>
+                <a:latin typeface="함초롱돋움"/>
               </a:rPr>
               <a:t>col_val_ratio(1.69) 주분석 / red_dom 제거</a:t>
             </a:r>
@@ -7052,6 +7129,7 @@
                 <a:solidFill>
                   <a:srgbClr val="0D47A1"/>
                 </a:solidFill>
+                <a:latin typeface="함초롱돋움"/>
               </a:rPr>
               <a:t>E=0.024 노이즈</a:t>
             </a:r>
@@ -7129,6 +7207,7 @@
                 <a:solidFill>
                   <a:srgbClr val="FFFFFF"/>
                 </a:solidFill>
+                <a:latin typeface="함초롱돋움"/>
               </a:rPr>
               <a:t>Hard→제거</a:t>
             </a:r>
@@ -7206,6 +7285,7 @@
                 <a:solidFill>
                   <a:srgbClr val="616161"/>
                 </a:solidFill>
+                <a:latin typeface="함초롱돋움"/>
               </a:rPr>
               <a:t>BR-RI-01</a:t>
             </a:r>
@@ -7240,6 +7320,7 @@
                 <a:solidFill>
                   <a:srgbClr val="616161"/>
                 </a:solidFill>
+                <a:latin typeface="함초롱돋움"/>
               </a:rPr>
               <a:t>참조무결성</a:t>
             </a:r>
@@ -7274,6 +7355,7 @@
                 <a:solidFill>
                   <a:srgbClr val="616161"/>
                 </a:solidFill>
+                <a:latin typeface="함초롱돋움"/>
               </a:rPr>
               <a:t>무결성</a:t>
             </a:r>
@@ -7308,6 +7390,7 @@
                 <a:solidFill>
                   <a:srgbClr val="212121"/>
                 </a:solidFill>
+                <a:latin typeface="함초롱돋움"/>
               </a:rPr>
               <a:t>인프라 위도/경도 완전성=100%</a:t>
             </a:r>
@@ -7342,6 +7425,7 @@
                 <a:solidFill>
                   <a:srgbClr val="0D47A1"/>
                 </a:solidFill>
+                <a:latin typeface="함초롱돋움"/>
               </a:rPr>
               <a:t>현행 100%</a:t>
             </a:r>
@@ -7419,6 +7503,7 @@
                 <a:solidFill>
                   <a:srgbClr val="FFFFFF"/>
                 </a:solidFill>
+                <a:latin typeface="함초롱돋움"/>
               </a:rPr>
               <a:t>Hard</a:t>
             </a:r>
@@ -7496,6 +7581,7 @@
                 <a:solidFill>
                   <a:srgbClr val="616161"/>
                 </a:solidFill>
+                <a:latin typeface="함초롱돋움"/>
               </a:rPr>
               <a:t>BR-RI-02</a:t>
             </a:r>
@@ -7530,6 +7616,7 @@
                 <a:solidFill>
                   <a:srgbClr val="616161"/>
                 </a:solidFill>
+                <a:latin typeface="함초롱돋움"/>
               </a:rPr>
               <a:t>유효성</a:t>
             </a:r>
@@ -7564,6 +7651,7 @@
                 <a:solidFill>
                   <a:srgbClr val="616161"/>
                 </a:solidFill>
+                <a:latin typeface="함초롱돋움"/>
               </a:rPr>
               <a:t>품질BR</a:t>
             </a:r>
@@ -7598,6 +7686,7 @@
                 <a:solidFill>
                   <a:srgbClr val="212121"/>
                 </a:solidFill>
+                <a:latin typeface="함초롱돋움"/>
               </a:rPr>
               <a:t>대기오염 NULL율 5% 초과 → 자동점검</a:t>
             </a:r>
@@ -7632,6 +7721,7 @@
                 <a:solidFill>
                   <a:srgbClr val="0D47A1"/>
                 </a:solidFill>
+                <a:latin typeface="함초롱돋움"/>
               </a:rPr>
               <a:t>현행 2.2%</a:t>
             </a:r>
@@ -7709,6 +7799,7 @@
                 <a:solidFill>
                   <a:srgbClr val="FFFFFF"/>
                 </a:solidFill>
+                <a:latin typeface="함초롱돋움"/>
               </a:rPr>
               <a:t>Soft</a:t>
             </a:r>
@@ -7786,6 +7877,7 @@
                 <a:solidFill>
                   <a:srgbClr val="0D47A1"/>
                 </a:solidFill>
+                <a:latin typeface="함초롱돋움"/>
               </a:rPr>
               <a:t>BR-CROSS-01</a:t>
             </a:r>
@@ -7820,6 +7912,7 @@
                 <a:solidFill>
                   <a:srgbClr val="0D47A1"/>
                 </a:solidFill>
+                <a:latin typeface="함초롱돋움"/>
               </a:rPr>
               <a:t>FD+Jaccard</a:t>
             </a:r>
@@ -7854,6 +7947,7 @@
                 <a:solidFill>
                   <a:srgbClr val="616161"/>
                 </a:solidFill>
+                <a:latin typeface="함초롱돋움"/>
               </a:rPr>
               <a:t>크로스도메인</a:t>
             </a:r>
@@ -7888,6 +7982,7 @@
                 <a:solidFill>
                   <a:srgbClr val="212121"/>
                 </a:solidFill>
+                <a:latin typeface="함초롱돋움"/>
               </a:rPr>
               <a:t>SCHOOLZONE+CCTV 2km미커버 → P.1</a:t>
             </a:r>
@@ -7922,6 +8017,7 @@
                 <a:solidFill>
                   <a:srgbClr val="0D47A1"/>
                 </a:solidFill>
+                <a:latin typeface="함초롱돋움"/>
               </a:rPr>
               <a:t>44,380m</a:t>
             </a:r>
@@ -7999,6 +8095,7 @@
                 <a:solidFill>
                   <a:srgbClr val="FFFFFF"/>
                 </a:solidFill>
+                <a:latin typeface="함초롱돋움"/>
               </a:rPr>
               <a:t>Soft→우선순위</a:t>
             </a:r>
@@ -8180,6 +8277,7 @@
                 <a:solidFill>
                   <a:srgbClr val="FFFFFF"/>
                 </a:solidFill>
+                <a:latin typeface="함초롱돋움"/>
               </a:rPr>
               <a:t>10  결론 및 의의</a:t>
             </a:r>
@@ -8214,6 +8312,7 @@
                 <a:solidFill>
                   <a:srgbClr val="BBDEFB"/>
                 </a:solidFill>
+                <a:latin typeface="함초롱돋움"/>
               </a:rPr>
               <a:t>KDD 파이프라인 완결: Entropy → AOI → FP-growth → BR → Hard/Soft Rule 고도화</a:t>
             </a:r>
@@ -8334,6 +8433,7 @@
                 <a:solidFill>
                   <a:srgbClr val="FFFFFF"/>
                 </a:solidFill>
+                <a:latin typeface="함초롱돋움"/>
               </a:rPr>
               <a:t>KDD 파이프라인 성과</a:t>
             </a:r>
@@ -8411,6 +8511,7 @@
                 <a:solidFill>
                   <a:srgbClr val="FFFFFF"/>
                 </a:solidFill>
+                <a:latin typeface="함초롱돋움"/>
               </a:rPr>
               <a:t>변수 선택</a:t>
             </a:r>
@@ -8445,6 +8546,7 @@
                 <a:solidFill>
                   <a:srgbClr val="212121"/>
                 </a:solidFill>
+                <a:latin typeface="함초롱돋움"/>
               </a:rPr>
               <a:t>col_val_ratio(1.6891) 자동 도출, red_dom(0.024) 제거</a:t>
             </a:r>
@@ -8522,6 +8624,7 @@
                 <a:solidFill>
                   <a:srgbClr val="FFFFFF"/>
                 </a:solidFill>
+                <a:latin typeface="함초롱돋움"/>
               </a:rPr>
               <a:t>이산화(AOI)</a:t>
             </a:r>
@@ -8556,6 +8659,7 @@
                 <a:solidFill>
                   <a:srgbClr val="212121"/>
                 </a:solidFill>
+                <a:latin typeface="함초롱돋움"/>
               </a:rPr>
               <a:t>L0~L4 5단계 개념 계층, PM10·col_val_ratio 적용</a:t>
             </a:r>
@@ -8633,6 +8737,7 @@
                 <a:solidFill>
                   <a:srgbClr val="FFFFFF"/>
                 </a:solidFill>
+                <a:latin typeface="함초롱돋움"/>
               </a:rPr>
               <a:t>FP-growth</a:t>
             </a:r>
@@ -8667,6 +8772,7 @@
                 <a:solidFill>
                   <a:srgbClr val="212121"/>
                 </a:solidFill>
+                <a:latin typeface="함초롱돋움"/>
               </a:rPr>
               <a:t>[L1-L3-L4] 전역 도메인 발견 (3,338건 1위)</a:t>
             </a:r>
@@ -8744,6 +8850,7 @@
                 <a:solidFill>
                   <a:srgbClr val="FFFFFF"/>
                 </a:solidFill>
+                <a:latin typeface="함초롱돋움"/>
               </a:rPr>
               <a:t>BR 도출</a:t>
             </a:r>
@@ -8778,6 +8885,7 @@
                 <a:solidFill>
                   <a:srgbClr val="212121"/>
                 </a:solidFill>
+                <a:latin typeface="함초롱돋움"/>
               </a:rPr>
               <a:t>14개 규칙 — FD·Jaccard·RI 정량화</a:t>
             </a:r>
@@ -8855,6 +8963,7 @@
                 <a:solidFill>
                   <a:srgbClr val="FFFFFF"/>
                 </a:solidFill>
+                <a:latin typeface="함초롱돋움"/>
               </a:rPr>
               <a:t>Hard/Soft</a:t>
             </a:r>
@@ -8889,6 +8998,7 @@
                 <a:solidFill>
                   <a:srgbClr val="212121"/>
                 </a:solidFill>
+                <a:latin typeface="함초롱돋움"/>
               </a:rPr>
               <a:t>6개 Hard + 8개 Soft — 학습하는 거버넌스</a:t>
             </a:r>
@@ -8966,6 +9076,7 @@
                 <a:solidFill>
                   <a:srgbClr val="FFFFFF"/>
                 </a:solidFill>
+                <a:latin typeface="함초롱돋움"/>
               </a:rPr>
               <a:t>검증</a:t>
             </a:r>
@@ -9000,6 +9111,7 @@
                 <a:solidFill>
                   <a:srgbClr val="212121"/>
                 </a:solidFill>
+                <a:latin typeface="함초롱돋움"/>
               </a:rPr>
               <a:t>공간 Jaccard=0.134, CCTV공백 87.1% 실증</a:t>
             </a:r>
@@ -9120,6 +9232,7 @@
                 <a:solidFill>
                   <a:srgbClr val="FFFFFF"/>
                 </a:solidFill>
+                <a:latin typeface="함초롱돋움"/>
               </a:rPr>
               <a:t>교수님 지시사항 준수 확인</a:t>
             </a:r>
@@ -9154,6 +9267,7 @@
                 <a:solidFill>
                   <a:srgbClr val="2E7D32"/>
                 </a:solidFill>
+                <a:latin typeface="함초롱돋움"/>
               </a:rPr>
               <a:t>✅ N-D 군집화 배제 — 1-D Entropy만 사용</a:t>
             </a:r>
@@ -9188,6 +9302,7 @@
                 <a:solidFill>
                   <a:srgbClr val="2E7D32"/>
                 </a:solidFill>
+                <a:latin typeface="함초롱돋움"/>
               </a:rPr>
               <a:t>✅ AOI 이산화 — L0~L4로 모든 수치 변환</a:t>
             </a:r>
@@ -9222,6 +9337,7 @@
                 <a:solidFill>
                   <a:srgbClr val="2E7D32"/>
                 </a:solidFill>
+                <a:latin typeface="함초롱돋움"/>
               </a:rPr>
               <a:t>✅ FP-growth (비지도 학습) — 가설 없이 패턴 발견</a:t>
             </a:r>
@@ -9256,6 +9372,7 @@
                 <a:solidFill>
                   <a:srgbClr val="2E7D32"/>
                 </a:solidFill>
+                <a:latin typeface="함초롱돋움"/>
               </a:rPr>
               <a:t>✅ 의외성 — [L1-L3-L4] 전역 도메인 자동 발견</a:t>
             </a:r>
@@ -9290,6 +9407,7 @@
                 <a:solidFill>
                   <a:srgbClr val="2E7D32"/>
                 </a:solidFill>
+                <a:latin typeface="함초롱돋움"/>
               </a:rPr>
               <a:t>✅ Subspace Focusing — 스마트시티 5대 영역 집중</a:t>
             </a:r>
@@ -9324,6 +9442,7 @@
                 <a:solidFill>
                   <a:srgbClr val="2E7D32"/>
                 </a:solidFill>
+                <a:latin typeface="함초롱돋움"/>
               </a:rPr>
               <a:t>✅ BR 정형화 — IF-THEN + 신뢰도/Lift/Jaccard 수치</a:t>
             </a:r>
@@ -9401,6 +9520,7 @@
                 <a:solidFill>
                   <a:srgbClr val="FFFFFF"/>
                 </a:solidFill>
+                <a:latin typeface="함초롱돋움"/>
               </a:rPr>
               <a:t>"이 프로젝트는 시나리오를 미리 정하고 데이터를 맞춘 것이 아니다.
 Entropy가 col_val_ratio를 선택했고, FP-growth가 [L1-L3-L4] 전역 도메인을 스스로 찾았으며,
@@ -9585,6 +9705,7 @@
                 <a:solidFill>
                   <a:srgbClr val="FFFFFF"/>
                 </a:solidFill>
+                <a:latin typeface="함초롱돋움"/>
               </a:rPr>
               <a:t>01  연구 배경 및 목적</a:t>
             </a:r>
@@ -9619,6 +9740,7 @@
                 <a:solidFill>
                   <a:srgbClr val="BBDEFB"/>
                 </a:solidFill>
+                <a:latin typeface="함초롱돋움"/>
               </a:rPr>
               <a:t>BI(현상 묘사 / 인간 편향)에서 BR(기계적 자동 통제)로의 패러다임 전환</a:t>
             </a:r>
@@ -9739,6 +9861,7 @@
                 <a:solidFill>
                   <a:srgbClr val="FFFFFF"/>
                 </a:solidFill>
+                <a:latin typeface="함초롱돋움"/>
               </a:rPr>
               <a:t>BI 방식의 한계</a:t>
             </a:r>
@@ -9773,6 +9896,7 @@
                 <a:solidFill>
                   <a:srgbClr val="212121"/>
                 </a:solidFill>
+                <a:latin typeface="함초롱돋움"/>
               </a:rPr>
               <a:t>• 연구자가 직관으로 변수를 선택 → 인간 편향 개입</a:t>
             </a:r>
@@ -9807,6 +9931,7 @@
                 <a:solidFill>
                   <a:srgbClr val="212121"/>
                 </a:solidFill>
+                <a:latin typeface="함초롱돋움"/>
               </a:rPr>
               <a:t>• 수치 시각화에 머물러 실제 통제 규칙 도출 불가</a:t>
             </a:r>
@@ -9841,6 +9966,7 @@
                 <a:solidFill>
                   <a:srgbClr val="212121"/>
                 </a:solidFill>
+                <a:latin typeface="함초롱돋움"/>
               </a:rPr>
               <a:t>• 기관 간 데이터 연계 시 도메인 불일치 무방비</a:t>
             </a:r>
@@ -9875,6 +10001,7 @@
                 <a:solidFill>
                   <a:srgbClr val="212121"/>
                 </a:solidFill>
+                <a:latin typeface="함초롱돋움"/>
               </a:rPr>
               <a:t>• 새로운 사고 유형·센서 등장 시 규칙 수동 갱신 필요</a:t>
             </a:r>
@@ -9909,6 +10036,7 @@
                 <a:solidFill>
                   <a:srgbClr val="212121"/>
                 </a:solidFill>
+                <a:latin typeface="함초롱돋움"/>
               </a:rPr>
               <a:t>• N-D 군집화: 차원의 저주로 실루엣 스코어 저하</a:t>
             </a:r>
@@ -10029,6 +10157,7 @@
                 <a:solidFill>
                   <a:srgbClr val="FFFFFF"/>
                 </a:solidFill>
+                <a:latin typeface="함초롱돋움"/>
               </a:rPr>
               <a:t>BR 기반 지능형 거버넌스 목표</a:t>
             </a:r>
@@ -10063,6 +10192,7 @@
                 <a:solidFill>
                   <a:srgbClr val="212121"/>
                 </a:solidFill>
+                <a:latin typeface="함초롱돋움"/>
               </a:rPr>
               <a:t>• Entropy로 변수를 기계가 스스로 선별</a:t>
             </a:r>
@@ -10097,6 +10227,7 @@
                 <a:solidFill>
                   <a:srgbClr val="212121"/>
                 </a:solidFill>
+                <a:latin typeface="함초롱돋움"/>
               </a:rPr>
               <a:t>• AOI 이산화로 수치를 개념 계층(L0~L4)으로 변환</a:t>
             </a:r>
@@ -10131,6 +10262,7 @@
                 <a:solidFill>
                   <a:srgbClr val="212121"/>
                 </a:solidFill>
+                <a:latin typeface="함초롱돋움"/>
               </a:rPr>
               <a:t>• FP-growth가 의외의 패턴(Unexpectedness)을 자동 발견</a:t>
             </a:r>
@@ -10165,6 +10297,7 @@
                 <a:solidFill>
                   <a:srgbClr val="212121"/>
                 </a:solidFill>
+                <a:latin typeface="함초롱돋움"/>
               </a:rPr>
               <a:t>• FD·Jaccard·RI로 IF-THEN 통제 규칙(BR) 정량 도출</a:t>
             </a:r>
@@ -10199,6 +10332,7 @@
                 <a:solidFill>
                   <a:srgbClr val="212121"/>
                 </a:solidFill>
+                <a:latin typeface="함초롱돋움"/>
               </a:rPr>
               <a:t>• Hard/Soft Rule로 '닫힌 통제'와 '학습 가능 설계' 구분</a:t>
             </a:r>
@@ -10276,6 +10410,7 @@
                 <a:solidFill>
                   <a:srgbClr val="1565C0"/>
                 </a:solidFill>
+                <a:latin typeface="함초롱돋움"/>
               </a:rPr>
               <a:t>BI  (Business Intelligence)</a:t>
             </a:r>
@@ -10310,6 +10445,7 @@
                 <a:solidFill>
                   <a:srgbClr val="616161"/>
                 </a:solidFill>
+                <a:latin typeface="함초롱돋움"/>
               </a:rPr>
               <a:t>데이터가 이런 상태다  →  묘사·시각화</a:t>
             </a:r>
@@ -10387,6 +10523,7 @@
                 <a:solidFill>
                   <a:srgbClr val="FFFFFF"/>
                 </a:solidFill>
+                <a:latin typeface="함초롱돋움"/>
               </a:rPr>
               <a:t>→</a:t>
             </a:r>
@@ -10464,6 +10601,7 @@
                 <a:solidFill>
                   <a:srgbClr val="FFFFFF"/>
                 </a:solidFill>
+                <a:latin typeface="함초롱돋움"/>
               </a:rPr>
               <a:t>BR  (Business Rules)</a:t>
             </a:r>
@@ -10498,6 +10636,7 @@
                 <a:solidFill>
                   <a:srgbClr val="BBDEFB"/>
                 </a:solidFill>
+                <a:latin typeface="함초롱돋움"/>
               </a:rPr>
               <a:t>데이터는 반드시 이 규칙을 따라야 한다  →  기계적 자동 통제</a:t>
             </a:r>
@@ -10618,6 +10757,7 @@
                 <a:solidFill>
                   <a:srgbClr val="212121"/>
                 </a:solidFill>
+                <a:latin typeface="함초롱돋움"/>
               </a:rPr>
               <a:t>핵심:  규칙을 '정하는 것'이 아니라 데이터가 스스로 말하는 규칙을 '발견하는 것'.  N-D 군집화 대신 1-D Entropy 기반 분석 + FP-growth로 의외성(Unexpectedness) 포착</a:t>
             </a:r>
@@ -10799,6 +10939,7 @@
                 <a:solidFill>
                   <a:srgbClr val="FFFFFF"/>
                 </a:solidFill>
+                <a:latin typeface="함초롱돋움"/>
               </a:rPr>
               <a:t>02  분석 데이터 소개</a:t>
             </a:r>
@@ -10833,6 +10974,7 @@
                 <a:solidFill>
                   <a:srgbClr val="BBDEFB"/>
                 </a:solidFill>
+                <a:latin typeface="함초롱돋움"/>
               </a:rPr>
               <a:t>기존 DataIntelligenceProject (999 테이블) + 신규 스마트시티 수집 (11개)</a:t>
             </a:r>
@@ -10910,6 +11052,7 @@
                 <a:solidFill>
                   <a:srgbClr val="FFFFFF"/>
                 </a:solidFill>
+                <a:latin typeface="함초롱돋움"/>
               </a:rPr>
               <a:t>① 기존 DataIntelligenceProject</a:t>
             </a:r>
@@ -11030,6 +11173,7 @@
                 <a:solidFill>
                   <a:srgbClr val="0D47A1"/>
                 </a:solidFill>
+                <a:latin typeface="함초롱돋움"/>
               </a:rPr>
               <a:t>table_map</a:t>
             </a:r>
@@ -11064,6 +11208,7 @@
                 <a:solidFill>
                   <a:srgbClr val="212121"/>
                 </a:solidFill>
+                <a:latin typeface="함초롱돋움"/>
               </a:rPr>
               <a:t>999개 테이블 / 18컬럼</a:t>
             </a:r>
@@ -11141,6 +11286,7 @@
                 <a:solidFill>
                   <a:srgbClr val="0D47A1"/>
                 </a:solidFill>
+                <a:latin typeface="함초롱돋움"/>
               </a:rPr>
               <a:t>column_map</a:t>
             </a:r>
@@ -11175,6 +11321,7 @@
                 <a:solidFill>
                   <a:srgbClr val="212121"/>
                 </a:solidFill>
+                <a:latin typeface="함초롱돋움"/>
               </a:rPr>
               <a:t>9,840개 컬럼 메타데이터</a:t>
             </a:r>
@@ -11252,6 +11399,7 @@
                 <a:solidFill>
                   <a:srgbClr val="0D47A1"/>
                 </a:solidFill>
+                <a:latin typeface="함초롱돋움"/>
               </a:rPr>
               <a:t>column_pair_map</a:t>
             </a:r>
@@ -11286,6 +11434,7 @@
                 <a:solidFill>
                   <a:srgbClr val="212121"/>
                 </a:solidFill>
+                <a:latin typeface="함초롱돋움"/>
               </a:rPr>
               <a:t>컬럼 간 유사도 (296MB)</a:t>
             </a:r>
@@ -11363,6 +11512,7 @@
                 <a:solidFill>
                   <a:srgbClr val="0D47A1"/>
                 </a:solidFill>
+                <a:latin typeface="함초롱돋움"/>
               </a:rPr>
               <a:t>distinct_value</a:t>
             </a:r>
@@ -11397,6 +11547,7 @@
                 <a:solidFill>
                   <a:srgbClr val="212121"/>
                 </a:solidFill>
+                <a:latin typeface="함초롱돋움"/>
               </a:rPr>
               <a:t>고유값 목록 (635MB)</a:t>
             </a:r>
@@ -11474,6 +11625,7 @@
                 <a:solidFill>
                   <a:srgbClr val="0D47A1"/>
                 </a:solidFill>
+                <a:latin typeface="함초롱돋움"/>
               </a:rPr>
               <a:t>분석 결과</a:t>
             </a:r>
@@ -11508,6 +11660,7 @@
                 <a:solidFill>
                   <a:srgbClr val="212121"/>
                 </a:solidFill>
+                <a:latin typeface="함초롱돋움"/>
               </a:rPr>
               <a:t>col_val_ratio 등 핵심 축 도출</a:t>
             </a:r>
@@ -11585,6 +11738,7 @@
                 <a:solidFill>
                   <a:srgbClr val="0D47A1"/>
                 </a:solidFill>
+                <a:latin typeface="함초롱돋움"/>
               </a:rPr>
               <a:t>역할</a:t>
             </a:r>
@@ -11619,6 +11773,7 @@
                 <a:solidFill>
                   <a:srgbClr val="212121"/>
                 </a:solidFill>
+                <a:latin typeface="함초롱돋움"/>
               </a:rPr>
               <a:t>Entropy→AOI→FP-growth 주 분석</a:t>
             </a:r>
@@ -11696,6 +11851,7 @@
                 <a:solidFill>
                   <a:srgbClr val="FFFFFF"/>
                 </a:solidFill>
+                <a:latin typeface="함초롱돋움"/>
               </a:rPr>
               <a:t>② 공공데이터 목록 (카탈로그)</a:t>
             </a:r>
@@ -11816,6 +11972,7 @@
                 <a:solidFill>
                   <a:srgbClr val="0D47A1"/>
                 </a:solidFill>
+                <a:latin typeface="함초롱돋움"/>
               </a:rPr>
               <a:t>총 데이터셋</a:t>
             </a:r>
@@ -11850,6 +12007,7 @@
                 <a:solidFill>
                   <a:srgbClr val="212121"/>
                 </a:solidFill>
+                <a:latin typeface="함초롱돋움"/>
               </a:rPr>
               <a:t>95,903건</a:t>
             </a:r>
@@ -11927,6 +12085,7 @@
                 <a:solidFill>
                   <a:srgbClr val="0D47A1"/>
                 </a:solidFill>
+                <a:latin typeface="함초롱돋움"/>
               </a:rPr>
               <a:t>FILE</a:t>
             </a:r>
@@ -11961,6 +12120,7 @@
                 <a:solidFill>
                   <a:srgbClr val="212121"/>
                 </a:solidFill>
+                <a:latin typeface="함초롱돋움"/>
               </a:rPr>
               <a:t>83,547건</a:t>
             </a:r>
@@ -12038,6 +12198,7 @@
                 <a:solidFill>
                   <a:srgbClr val="0D47A1"/>
                 </a:solidFill>
+                <a:latin typeface="함초롱돋움"/>
               </a:rPr>
               <a:t>API</a:t>
             </a:r>
@@ -12072,6 +12233,7 @@
                 <a:solidFill>
                   <a:srgbClr val="212121"/>
                 </a:solidFill>
+                <a:latin typeface="함초롱돋움"/>
               </a:rPr>
               <a:t>12,056건</a:t>
             </a:r>
@@ -12149,6 +12311,7 @@
                 <a:solidFill>
                   <a:srgbClr val="0D47A1"/>
                 </a:solidFill>
+                <a:latin typeface="함초롱돋움"/>
               </a:rPr>
               <a:t>대분류</a:t>
             </a:r>
@@ -12183,6 +12346,7 @@
                 <a:solidFill>
                   <a:srgbClr val="212121"/>
                 </a:solidFill>
+                <a:latin typeface="함초롱돋움"/>
               </a:rPr>
               <a:t>16개 카테고리</a:t>
             </a:r>
@@ -12260,6 +12424,7 @@
                 <a:solidFill>
                   <a:srgbClr val="0D47A1"/>
                 </a:solidFill>
+                <a:latin typeface="함초롱돋움"/>
               </a:rPr>
               <a:t>선별</a:t>
             </a:r>
@@ -12294,6 +12459,7 @@
                 <a:solidFill>
                   <a:srgbClr val="212121"/>
                 </a:solidFill>
+                <a:latin typeface="함초롱돋움"/>
               </a:rPr>
               <a:t>87,053건 → A안 300건</a:t>
             </a:r>
@@ -12371,6 +12537,7 @@
                 <a:solidFill>
                   <a:srgbClr val="0D47A1"/>
                 </a:solidFill>
+                <a:latin typeface="함초롱돋움"/>
               </a:rPr>
               <a:t>역할</a:t>
             </a:r>
@@ -12405,6 +12572,7 @@
                 <a:solidFill>
                   <a:srgbClr val="212121"/>
                 </a:solidFill>
+                <a:latin typeface="함초롱돋움"/>
               </a:rPr>
               <a:t>스마트시티 대상 선별 BR-SEL</a:t>
             </a:r>
@@ -12482,6 +12650,7 @@
                 <a:solidFill>
                   <a:srgbClr val="FFFFFF"/>
                 </a:solidFill>
+                <a:latin typeface="함초롱돋움"/>
               </a:rPr>
               <a:t>③ 신규 수집 스마트시티 데이터</a:t>
             </a:r>
@@ -12602,6 +12771,7 @@
                 <a:solidFill>
                   <a:srgbClr val="0D47A1"/>
                 </a:solidFill>
+                <a:latin typeface="함초롱돋움"/>
               </a:rPr>
               <a:t>충북 교통약자+사고</a:t>
             </a:r>
@@ -12636,6 +12806,7 @@
                 <a:solidFill>
                   <a:srgbClr val="212121"/>
                 </a:solidFill>
+                <a:latin typeface="함초롱돋움"/>
               </a:rPr>
               <a:t>8,381건</a:t>
             </a:r>
@@ -12713,6 +12884,7 @@
                 <a:solidFill>
                   <a:srgbClr val="0D47A1"/>
                 </a:solidFill>
+                <a:latin typeface="함초롱돋움"/>
               </a:rPr>
               <a:t>서울 미세먼지</a:t>
             </a:r>
@@ -12747,6 +12919,7 @@
                 <a:solidFill>
                   <a:srgbClr val="212121"/>
                 </a:solidFill>
+                <a:latin typeface="함초롱돋움"/>
               </a:rPr>
               <a:t>227,760건</a:t>
             </a:r>
@@ -12824,6 +12997,7 @@
                 <a:solidFill>
                   <a:srgbClr val="0D47A1"/>
                 </a:solidFill>
+                <a:latin typeface="함초롱돋움"/>
               </a:rPr>
               <a:t>대구 대기질</a:t>
             </a:r>
@@ -12858,6 +13032,7 @@
                 <a:solidFill>
                   <a:srgbClr val="212121"/>
                 </a:solidFill>
+                <a:latin typeface="함초롱돋움"/>
               </a:rPr>
               <a:t>659,348건</a:t>
             </a:r>
@@ -12935,6 +13110,7 @@
                 <a:solidFill>
                   <a:srgbClr val="0D47A1"/>
                 </a:solidFill>
+                <a:latin typeface="함초롱돋움"/>
               </a:rPr>
               <a:t>충주/도로공사 CCTV</a:t>
             </a:r>
@@ -12969,6 +13145,7 @@
                 <a:solidFill>
                   <a:srgbClr val="212121"/>
                 </a:solidFill>
+                <a:latin typeface="함초롱돋움"/>
               </a:rPr>
               <a:t>3,054개</a:t>
             </a:r>
@@ -13046,6 +13223,7 @@
                 <a:solidFill>
                   <a:srgbClr val="0D47A1"/>
                 </a:solidFill>
+                <a:latin typeface="함초롱돋움"/>
               </a:rPr>
               <a:t>인천 IoT 센서</a:t>
             </a:r>
@@ -13080,6 +13258,7 @@
                 <a:solidFill>
                   <a:srgbClr val="212121"/>
                 </a:solidFill>
+                <a:latin typeface="함초롱돋움"/>
               </a:rPr>
               <a:t>~22GB</a:t>
             </a:r>
@@ -13157,6 +13336,7 @@
                 <a:solidFill>
                   <a:srgbClr val="0D47A1"/>
                 </a:solidFill>
+                <a:latin typeface="함초롱돋움"/>
               </a:rPr>
               <a:t>역할</a:t>
             </a:r>
@@ -13191,6 +13371,7 @@
                 <a:solidFill>
                   <a:srgbClr val="212121"/>
                 </a:solidFill>
+                <a:latin typeface="함초롱돋움"/>
               </a:rPr>
               <a:t>BR 검증·확장 및 공간 분석</a:t>
             </a:r>
@@ -13268,6 +13449,7 @@
                 <a:solidFill>
                   <a:srgbClr val="FFFFFF"/>
                 </a:solidFill>
+                <a:latin typeface="함초롱돋움"/>
               </a:rPr>
               <a:t>999개</a:t>
             </a:r>
@@ -13302,6 +13484,7 @@
                 <a:solidFill>
                   <a:srgbClr val="BBDEFB"/>
                 </a:solidFill>
+                <a:latin typeface="함초롱돋움"/>
               </a:rPr>
               <a:t>기존 테이블</a:t>
             </a:r>
@@ -13379,6 +13562,7 @@
                 <a:solidFill>
                   <a:srgbClr val="FFFFFF"/>
                 </a:solidFill>
+                <a:latin typeface="함초롱돋움"/>
               </a:rPr>
               <a:t>95,903건</a:t>
             </a:r>
@@ -13413,6 +13597,7 @@
                 <a:solidFill>
                   <a:srgbClr val="BBDEFB"/>
                 </a:solidFill>
+                <a:latin typeface="함초롱돋움"/>
               </a:rPr>
               <a:t>메타데이터</a:t>
             </a:r>
@@ -13490,6 +13675,7 @@
                 <a:solidFill>
                   <a:srgbClr val="FFFFFF"/>
                 </a:solidFill>
+                <a:latin typeface="함초롱돋움"/>
               </a:rPr>
               <a:t>~100만 건</a:t>
             </a:r>
@@ -13524,6 +13710,7 @@
                 <a:solidFill>
                   <a:srgbClr val="BBDEFB"/>
                 </a:solidFill>
+                <a:latin typeface="함초롱돋움"/>
               </a:rPr>
               <a:t>실측 레코드</a:t>
             </a:r>
@@ -13705,6 +13892,7 @@
                 <a:solidFill>
                   <a:srgbClr val="FFFFFF"/>
                 </a:solidFill>
+                <a:latin typeface="함초롱돋움"/>
               </a:rPr>
               <a:t>03  STEP 1  엔트로피(Entropy) 기반 변수 선택</a:t>
             </a:r>
@@ -13739,6 +13927,7 @@
                 <a:solidFill>
                   <a:srgbClr val="BBDEFB"/>
                 </a:solidFill>
+                <a:latin typeface="함초롱돋움"/>
               </a:rPr>
               <a:t>N-D 군집화 금지 → 1-D Shannon Entropy로 정보량이 높은 속성만 자동 선별 (AOI)</a:t>
             </a:r>
@@ -13816,6 +14005,7 @@
                 <a:solidFill>
                   <a:srgbClr val="FFFFFF"/>
                 </a:solidFill>
+                <a:latin typeface="함초롱돋움"/>
               </a:rPr>
               <a:t>1</a:t>
             </a:r>
@@ -13850,6 +14040,7 @@
                 <a:solidFill>
                   <a:srgbClr val="0D47A1"/>
                 </a:solidFill>
+                <a:latin typeface="함초롱돋움"/>
               </a:rPr>
               <a:t>변수별 Entropy 계산: H = -Σ p·log₂p</a:t>
             </a:r>
@@ -13927,6 +14118,7 @@
                 <a:solidFill>
                   <a:srgbClr val="FFFFFF"/>
                 </a:solidFill>
+                <a:latin typeface="함초롱돋움"/>
               </a:rPr>
               <a:t>1.6891</a:t>
             </a:r>
@@ -13961,6 +14153,7 @@
                 <a:solidFill>
                   <a:srgbClr val="BBDEFB"/>
                 </a:solidFill>
+                <a:latin typeface="함초롱돋움"/>
               </a:rPr>
               <a:t>col_val_ratio</a:t>
             </a:r>
@@ -13995,6 +14188,7 @@
                 <a:solidFill>
                   <a:srgbClr val="BBDEFB"/>
                 </a:solidFill>
+                <a:latin typeface="함초롱돋움"/>
               </a:rPr>
               <a:t>컬럼 값 비율
 → 주 분석 축 선정</a:t>
@@ -14073,6 +14267,7 @@
                 <a:solidFill>
                   <a:srgbClr val="FFFFFF"/>
                 </a:solidFill>
+                <a:latin typeface="함초롱돋움"/>
               </a:rPr>
               <a:t>0.5046</a:t>
             </a:r>
@@ -14107,6 +14302,7 @@
                 <a:solidFill>
                   <a:srgbClr val="BBDEFB"/>
                 </a:solidFill>
+                <a:latin typeface="함초롱돋움"/>
               </a:rPr>
               <a:t>col_dom_ratio</a:t>
             </a:r>
@@ -14141,6 +14337,7 @@
                 <a:solidFill>
                   <a:srgbClr val="BBDEFB"/>
                 </a:solidFill>
+                <a:latin typeface="함초롱돋움"/>
               </a:rPr>
               <a:t>컬럼 도메인 비율
 → 보조 분석 축</a:t>
@@ -14219,6 +14416,7 @@
                 <a:solidFill>
                   <a:srgbClr val="FFFFFF"/>
                 </a:solidFill>
+                <a:latin typeface="함초롱돋움"/>
               </a:rPr>
               <a:t>0.0241</a:t>
             </a:r>
@@ -14253,6 +14451,7 @@
                 <a:solidFill>
                   <a:srgbClr val="BBDEFB"/>
                 </a:solidFill>
+                <a:latin typeface="함초롱돋움"/>
               </a:rPr>
               <a:t>red_dom_cnt</a:t>
             </a:r>
@@ -14287,6 +14486,7 @@
                 <a:solidFill>
                   <a:srgbClr val="BBDEFB"/>
                 </a:solidFill>
+                <a:latin typeface="함초롱돋움"/>
               </a:rPr>
               <a:t>중복 도메인 수
 → 노이즈: 제거</a:t>
@@ -14365,6 +14565,7 @@
                 <a:solidFill>
                   <a:srgbClr val="FFFFFF"/>
                 </a:solidFill>
+                <a:latin typeface="함초롱돋움"/>
               </a:rPr>
               <a:t>2</a:t>
             </a:r>
@@ -14399,6 +14600,7 @@
                 <a:solidFill>
                   <a:srgbClr val="0D47A1"/>
                 </a:solidFill>
+                <a:latin typeface="함초롱돋움"/>
               </a:rPr>
               <a:t>Entropy 임계값 기반 자동 판정</a:t>
             </a:r>
@@ -14476,6 +14678,7 @@
                 <a:solidFill>
                   <a:srgbClr val="FFFFFF"/>
                 </a:solidFill>
+                <a:latin typeface="함초롱돋움"/>
               </a:rPr>
               <a:t>컬럼</a:t>
             </a:r>
@@ -14510,6 +14713,7 @@
                 <a:solidFill>
                   <a:srgbClr val="FFFFFF"/>
                 </a:solidFill>
+                <a:latin typeface="함초롱돋움"/>
               </a:rPr>
               <a:t>Entropy</a:t>
             </a:r>
@@ -14544,6 +14748,7 @@
                 <a:solidFill>
                   <a:srgbClr val="FFFFFF"/>
                 </a:solidFill>
+                <a:latin typeface="함초롱돋움"/>
               </a:rPr>
               <a:t>판정</a:t>
             </a:r>
@@ -14578,6 +14783,7 @@
                 <a:solidFill>
                   <a:srgbClr val="FFFFFF"/>
                 </a:solidFill>
+                <a:latin typeface="함초롱돋움"/>
               </a:rPr>
               <a:t>이유</a:t>
             </a:r>
@@ -14612,6 +14818,7 @@
                 <a:solidFill>
                   <a:srgbClr val="FFFFFF"/>
                 </a:solidFill>
+                <a:latin typeface="함초롱돋움"/>
               </a:rPr>
               <a:t>처리</a:t>
             </a:r>
@@ -14689,6 +14896,7 @@
                 <a:solidFill>
                   <a:srgbClr val="212121"/>
                 </a:solidFill>
+                <a:latin typeface="함초롱돋움"/>
               </a:rPr>
               <a:t>col_val_ratio</a:t>
             </a:r>
@@ -14723,6 +14931,7 @@
                 <a:solidFill>
                   <a:srgbClr val="212121"/>
                 </a:solidFill>
+                <a:latin typeface="함초롱돋움"/>
               </a:rPr>
               <a:t>1.6891</a:t>
             </a:r>
@@ -14757,6 +14966,7 @@
                 <a:solidFill>
                   <a:srgbClr val="1565C0"/>
                 </a:solidFill>
+                <a:latin typeface="함초롱돋움"/>
               </a:rPr>
               <a:t>✅ 주 분석 축</a:t>
             </a:r>
@@ -14791,6 +15001,7 @@
                 <a:solidFill>
                   <a:srgbClr val="212121"/>
                 </a:solidFill>
+                <a:latin typeface="함초롱돋움"/>
               </a:rPr>
               <a:t>정보량 최고 — 컬럼 값 분포 변별력 최대</a:t>
             </a:r>
@@ -14825,6 +15036,7 @@
                 <a:solidFill>
                   <a:srgbClr val="0D47A1"/>
                 </a:solidFill>
+                <a:latin typeface="함초롱돋움"/>
               </a:rPr>
               <a:t>분석 대상</a:t>
             </a:r>
@@ -14902,6 +15114,7 @@
                 <a:solidFill>
                   <a:srgbClr val="212121"/>
                 </a:solidFill>
+                <a:latin typeface="함초롱돋움"/>
               </a:rPr>
               <a:t>col_dom_ratio</a:t>
             </a:r>
@@ -14936,6 +15149,7 @@
                 <a:solidFill>
                   <a:srgbClr val="212121"/>
                 </a:solidFill>
+                <a:latin typeface="함초롱돋움"/>
               </a:rPr>
               <a:t>0.5046</a:t>
             </a:r>
@@ -14970,6 +15184,7 @@
                 <a:solidFill>
                   <a:srgbClr val="1565C0"/>
                 </a:solidFill>
+                <a:latin typeface="함초롱돋움"/>
               </a:rPr>
               <a:t>✅ 보조 분석 축</a:t>
             </a:r>
@@ -15004,6 +15219,7 @@
                 <a:solidFill>
                   <a:srgbClr val="212121"/>
                 </a:solidFill>
+                <a:latin typeface="함초롱돋움"/>
               </a:rPr>
               <a:t>중간 정보량 — 도메인 구분에 활용</a:t>
             </a:r>
@@ -15038,6 +15254,7 @@
                 <a:solidFill>
                   <a:srgbClr val="0D47A1"/>
                 </a:solidFill>
+                <a:latin typeface="함초롱돋움"/>
               </a:rPr>
               <a:t>보조 활용</a:t>
             </a:r>
@@ -15115,6 +15332,7 @@
                 <a:solidFill>
                   <a:srgbClr val="212121"/>
                 </a:solidFill>
+                <a:latin typeface="함초롱돋움"/>
               </a:rPr>
               <a:t>red_dom_cnt</a:t>
             </a:r>
@@ -15149,6 +15367,7 @@
                 <a:solidFill>
                   <a:srgbClr val="212121"/>
                 </a:solidFill>
+                <a:latin typeface="함초롱돋움"/>
               </a:rPr>
               <a:t>0.0241</a:t>
             </a:r>
@@ -15183,6 +15402,7 @@
                 <a:solidFill>
                   <a:srgbClr val="6A1B9A"/>
                 </a:solidFill>
+                <a:latin typeface="함초롱돋움"/>
               </a:rPr>
               <a:t>❌ 노이즈 제거</a:t>
             </a:r>
@@ -15217,6 +15437,7 @@
                 <a:solidFill>
                   <a:srgbClr val="212121"/>
                 </a:solidFill>
+                <a:latin typeface="함초롱돋움"/>
               </a:rPr>
               <a:t>모든 데이터가 유사값 → 변별력 없음</a:t>
             </a:r>
@@ -15251,6 +15472,7 @@
                 <a:solidFill>
                   <a:srgbClr val="0D47A1"/>
                 </a:solidFill>
+                <a:latin typeface="함초롱돋움"/>
               </a:rPr>
               <a:t>리덕션(제거)</a:t>
             </a:r>
@@ -15371,6 +15593,7 @@
                 <a:solidFill>
                   <a:srgbClr val="212121"/>
                 </a:solidFill>
+                <a:latin typeface="함초롱돋움"/>
               </a:rPr>
               <a:t>교수님 지침 준수: N-D 고차원 군집화 배제 → 단일 지표(1-D Entropy)로만 변수 평가. col_val_ratio(1.6891)가 정보 이론적으로 최적 분석 축임을 수치로 증명</a:t>
             </a:r>
@@ -15552,6 +15775,7 @@
                 <a:solidFill>
                   <a:srgbClr val="FFFFFF"/>
                 </a:solidFill>
+                <a:latin typeface="함초롱돋움"/>
               </a:rPr>
               <a:t>04  STEP 2  이산화(Discretization) / AOI  —  L0~L4 개념 계층</a:t>
             </a:r>
@@ -15586,6 +15810,7 @@
                 <a:solidFill>
                   <a:srgbClr val="BBDEFB"/>
                 </a:solidFill>
+                <a:latin typeface="함초롱돋움"/>
               </a:rPr>
               <a:t>수치 데이터를 5단계 개념 계층으로 Roll-up → FP-growth용 트랜잭션 생성</a:t>
             </a:r>
@@ -15663,6 +15888,7 @@
                 <a:solidFill>
                   <a:srgbClr val="FFFFFF"/>
                 </a:solidFill>
+                <a:latin typeface="함초롱돋움"/>
               </a:rPr>
               <a:t>3</a:t>
             </a:r>
@@ -15697,6 +15923,7 @@
                 <a:solidFill>
                   <a:srgbClr val="0D47A1"/>
                 </a:solidFill>
+                <a:latin typeface="함초롱돋움"/>
               </a:rPr>
               <a:t>pd.qcut(값, q=5) → L0(최소)~L4(최대) 5단계 이산화</a:t>
             </a:r>
@@ -15817,6 +16044,7 @@
                 <a:solidFill>
                   <a:srgbClr val="FFFFFF"/>
                 </a:solidFill>
+                <a:latin typeface="함초롱돋움"/>
               </a:rPr>
               <a:t>L0
 (최소)</a:t>
@@ -15852,6 +16080,7 @@
                 <a:solidFill>
                   <a:srgbClr val="BBDEFB"/>
                 </a:solidFill>
+                <a:latin typeface="함초롱돋움"/>
               </a:rPr>
               <a:t>0~20%</a:t>
             </a:r>
@@ -15929,6 +16158,7 @@
                 <a:solidFill>
                   <a:srgbClr val="FFFFFF"/>
                 </a:solidFill>
+                <a:latin typeface="함초롱돋움"/>
               </a:rPr>
               <a:t>L1
 (하)</a:t>
@@ -15964,6 +16194,7 @@
                 <a:solidFill>
                   <a:srgbClr val="BBDEFB"/>
                 </a:solidFill>
+                <a:latin typeface="함초롱돋움"/>
               </a:rPr>
               <a:t>20~40%</a:t>
             </a:r>
@@ -16041,6 +16272,7 @@
                 <a:solidFill>
                   <a:srgbClr val="FFFFFF"/>
                 </a:solidFill>
+                <a:latin typeface="함초롱돋움"/>
               </a:rPr>
               <a:t>L2
 (중)</a:t>
@@ -16076,6 +16308,7 @@
                 <a:solidFill>
                   <a:srgbClr val="BBDEFB"/>
                 </a:solidFill>
+                <a:latin typeface="함초롱돋움"/>
               </a:rPr>
               <a:t>40~60%</a:t>
             </a:r>
@@ -16153,6 +16386,7 @@
                 <a:solidFill>
                   <a:srgbClr val="FFFFFF"/>
                 </a:solidFill>
+                <a:latin typeface="함초롱돋움"/>
               </a:rPr>
               <a:t>L3
 (상)</a:t>
@@ -16188,6 +16422,7 @@
                 <a:solidFill>
                   <a:srgbClr val="BBDEFB"/>
                 </a:solidFill>
+                <a:latin typeface="함초롱돋움"/>
               </a:rPr>
               <a:t>60~80%</a:t>
             </a:r>
@@ -16265,6 +16500,7 @@
                 <a:solidFill>
                   <a:srgbClr val="FFFFFF"/>
                 </a:solidFill>
+                <a:latin typeface="함초롱돋움"/>
               </a:rPr>
               <a:t>L4
 (최대)</a:t>
@@ -16300,6 +16536,7 @@
                 <a:solidFill>
                   <a:srgbClr val="BBDEFB"/>
                 </a:solidFill>
+                <a:latin typeface="함초롱돋움"/>
               </a:rPr>
               <a:t>80~100%</a:t>
             </a:r>
@@ -16377,6 +16614,7 @@
                 <a:solidFill>
                   <a:srgbClr val="FFFFFF"/>
                 </a:solidFill>
+                <a:latin typeface="함초롱돋움"/>
               </a:rPr>
               <a:t>4</a:t>
             </a:r>
@@ -16411,6 +16649,7 @@
                 <a:solidFill>
                   <a:srgbClr val="0D47A1"/>
                 </a:solidFill>
+                <a:latin typeface="함초롱돋움"/>
               </a:rPr>
               <a:t>이산화 적용 결과 — 주요 컬럼</a:t>
             </a:r>
@@ -16531,6 +16770,7 @@
                 <a:solidFill>
                   <a:srgbClr val="FFFFFF"/>
                 </a:solidFill>
+                <a:latin typeface="함초롱돋움"/>
               </a:rPr>
               <a:t>col_val_ratio → L0~L4 이산화 (DataIntelligenceProject)</a:t>
             </a:r>
@@ -16608,6 +16848,7 @@
                 <a:solidFill>
                   <a:srgbClr val="212121"/>
                 </a:solidFill>
+                <a:latin typeface="함초롱돋움"/>
               </a:rPr>
               <a:t>L0</a:t>
             </a:r>
@@ -16642,6 +16883,7 @@
                 <a:solidFill>
                   <a:srgbClr val="212121"/>
                 </a:solidFill>
+                <a:latin typeface="함초롱돋움"/>
               </a:rPr>
               <a:t>0.000~0.200</a:t>
             </a:r>
@@ -16676,6 +16918,7 @@
                 <a:solidFill>
                   <a:srgbClr val="212121"/>
                 </a:solidFill>
+                <a:latin typeface="함초롱돋움"/>
               </a:rPr>
               <a:t>21.0%</a:t>
             </a:r>
@@ -16710,6 +16953,7 @@
                 <a:solidFill>
                   <a:srgbClr val="212121"/>
                 </a:solidFill>
+                <a:latin typeface="함초롱돋움"/>
               </a:rPr>
               <a:t>값 희소 — 데이터 공백 구간</a:t>
             </a:r>
@@ -16787,6 +17031,7 @@
                 <a:solidFill>
                   <a:srgbClr val="FFFFFF"/>
                 </a:solidFill>
+                <a:latin typeface="함초롱돋움"/>
               </a:rPr>
               <a:t>L1</a:t>
             </a:r>
@@ -16821,6 +17066,7 @@
                 <a:solidFill>
                   <a:srgbClr val="FFFFFF"/>
                 </a:solidFill>
+                <a:latin typeface="함초롱돋움"/>
               </a:rPr>
               <a:t>0.200~0.350</a:t>
             </a:r>
@@ -16855,6 +17101,7 @@
                 <a:solidFill>
                   <a:srgbClr val="F57C00"/>
                 </a:solidFill>
+                <a:latin typeface="함초롱돋움"/>
               </a:rPr>
               <a:t>20.2%</a:t>
             </a:r>
@@ -16889,6 +17136,7 @@
                 <a:solidFill>
                   <a:srgbClr val="FFFFFF"/>
                 </a:solidFill>
+                <a:latin typeface="함초롱돋움"/>
               </a:rPr>
               <a:t>낮은 밀도 — 표준 도메인 후보</a:t>
             </a:r>
@@ -16966,6 +17214,7 @@
                 <a:solidFill>
                   <a:srgbClr val="212121"/>
                 </a:solidFill>
+                <a:latin typeface="함초롱돋움"/>
               </a:rPr>
               <a:t>L2</a:t>
             </a:r>
@@ -17000,6 +17249,7 @@
                 <a:solidFill>
                   <a:srgbClr val="212121"/>
                 </a:solidFill>
+                <a:latin typeface="함초롱돋움"/>
               </a:rPr>
               <a:t>0.350~0.500</a:t>
             </a:r>
@@ -17034,6 +17284,7 @@
                 <a:solidFill>
                   <a:srgbClr val="212121"/>
                 </a:solidFill>
+                <a:latin typeface="함초롱돋움"/>
               </a:rPr>
               <a:t>20.0%</a:t>
             </a:r>
@@ -17068,6 +17319,7 @@
                 <a:solidFill>
                   <a:srgbClr val="212121"/>
                 </a:solidFill>
+                <a:latin typeface="함초롱돋움"/>
               </a:rPr>
               <a:t>중간 밀도</a:t>
             </a:r>
@@ -17145,6 +17397,7 @@
                 <a:solidFill>
                   <a:srgbClr val="FFFFFF"/>
                 </a:solidFill>
+                <a:latin typeface="함초롱돋움"/>
               </a:rPr>
               <a:t>L3</a:t>
             </a:r>
@@ -17179,6 +17432,7 @@
                 <a:solidFill>
                   <a:srgbClr val="FFFFFF"/>
                 </a:solidFill>
+                <a:latin typeface="함초롱돋움"/>
               </a:rPr>
               <a:t>0.500~0.700</a:t>
             </a:r>
@@ -17213,6 +17467,7 @@
                 <a:solidFill>
                   <a:srgbClr val="F57C00"/>
                 </a:solidFill>
+                <a:latin typeface="함초롱돋움"/>
               </a:rPr>
               <a:t>19.5%</a:t>
             </a:r>
@@ -17247,6 +17502,7 @@
                 <a:solidFill>
                   <a:srgbClr val="FFFFFF"/>
                 </a:solidFill>
+                <a:latin typeface="함초롱돋움"/>
               </a:rPr>
               <a:t>높은 중복도 — 공통 도메인</a:t>
             </a:r>
@@ -17324,6 +17580,7 @@
                 <a:solidFill>
                   <a:srgbClr val="FFFFFF"/>
                 </a:solidFill>
+                <a:latin typeface="함초롱돋움"/>
               </a:rPr>
               <a:t>L4</a:t>
             </a:r>
@@ -17358,6 +17615,7 @@
                 <a:solidFill>
                   <a:srgbClr val="FFFFFF"/>
                 </a:solidFill>
+                <a:latin typeface="함초롱돋움"/>
               </a:rPr>
               <a:t>0.700~1.000</a:t>
             </a:r>
@@ -17392,6 +17650,7 @@
                 <a:solidFill>
                   <a:srgbClr val="F57C00"/>
                 </a:solidFill>
+                <a:latin typeface="함초롱돋움"/>
               </a:rPr>
               <a:t>19.3%</a:t>
             </a:r>
@@ -17426,6 +17685,7 @@
                 <a:solidFill>
                   <a:srgbClr val="FFFFFF"/>
                 </a:solidFill>
+                <a:latin typeface="함초롱돋움"/>
               </a:rPr>
               <a:t>최고 밀도 — 플랫폼 전반 공통</a:t>
             </a:r>
@@ -17546,6 +17806,7 @@
                 <a:solidFill>
                   <a:srgbClr val="FFFFFF"/>
                 </a:solidFill>
+                <a:latin typeface="함초롱돋움"/>
               </a:rPr>
               <a:t>PM10 이산화 (서울 미세먼지 227,760건 적용)</a:t>
             </a:r>
@@ -17623,6 +17884,7 @@
                 <a:solidFill>
                   <a:srgbClr val="212121"/>
                 </a:solidFill>
+                <a:latin typeface="함초롱돋움"/>
               </a:rPr>
               <a:t>L0</a:t>
             </a:r>
@@ -17657,6 +17919,7 @@
                 <a:solidFill>
                   <a:srgbClr val="212121"/>
                 </a:solidFill>
+                <a:latin typeface="함초롱돋움"/>
               </a:rPr>
               <a:t>0~14 μg/m³</a:t>
             </a:r>
@@ -17691,6 +17954,7 @@
                 <a:solidFill>
                   <a:srgbClr val="212121"/>
                 </a:solidFill>
+                <a:latin typeface="함초롱돋움"/>
               </a:rPr>
               <a:t>58.4%</a:t>
             </a:r>
@@ -17725,6 +17989,7 @@
                 <a:solidFill>
                   <a:srgbClr val="212121"/>
                 </a:solidFill>
+                <a:latin typeface="함초롱돋움"/>
               </a:rPr>
               <a:t>좋음</a:t>
             </a:r>
@@ -17802,6 +18067,7 @@
                 <a:solidFill>
                   <a:srgbClr val="212121"/>
                 </a:solidFill>
+                <a:latin typeface="함초롱돋움"/>
               </a:rPr>
               <a:t>L1</a:t>
             </a:r>
@@ -17836,6 +18102,7 @@
                 <a:solidFill>
                   <a:srgbClr val="212121"/>
                 </a:solidFill>
+                <a:latin typeface="함초롱돋움"/>
               </a:rPr>
               <a:t>15~27 μg/m³</a:t>
             </a:r>
@@ -17870,6 +18137,7 @@
                 <a:solidFill>
                   <a:srgbClr val="212121"/>
                 </a:solidFill>
+                <a:latin typeface="함초롱돋움"/>
               </a:rPr>
               <a:t>23.2%</a:t>
             </a:r>
@@ -17904,6 +18172,7 @@
                 <a:solidFill>
                   <a:srgbClr val="212121"/>
                 </a:solidFill>
+                <a:latin typeface="함초롱돋움"/>
               </a:rPr>
               <a:t>보통</a:t>
             </a:r>
@@ -17981,6 +18250,7 @@
                 <a:solidFill>
                   <a:srgbClr val="212121"/>
                 </a:solidFill>
+                <a:latin typeface="함초롱돋움"/>
               </a:rPr>
               <a:t>L2</a:t>
             </a:r>
@@ -18015,6 +18285,7 @@
                 <a:solidFill>
                   <a:srgbClr val="212121"/>
                 </a:solidFill>
+                <a:latin typeface="함초롱돋움"/>
               </a:rPr>
               <a:t>28~40 μg/m³</a:t>
             </a:r>
@@ -18049,6 +18320,7 @@
                 <a:solidFill>
                   <a:srgbClr val="212121"/>
                 </a:solidFill>
+                <a:latin typeface="함초롱돋움"/>
               </a:rPr>
               <a:t>14.6%</a:t>
             </a:r>
@@ -18083,6 +18355,7 @@
                 <a:solidFill>
                   <a:srgbClr val="212121"/>
                 </a:solidFill>
+                <a:latin typeface="함초롱돋움"/>
               </a:rPr>
               <a:t>보통</a:t>
             </a:r>
@@ -18160,6 +18433,7 @@
                 <a:solidFill>
                   <a:srgbClr val="FFFFFF"/>
                 </a:solidFill>
+                <a:latin typeface="함초롱돋움"/>
               </a:rPr>
               <a:t>L3</a:t>
             </a:r>
@@ -18194,6 +18468,7 @@
                 <a:solidFill>
                   <a:srgbClr val="FFFFFF"/>
                 </a:solidFill>
+                <a:latin typeface="함초롱돋움"/>
               </a:rPr>
               <a:t>41~80 μg/m³</a:t>
             </a:r>
@@ -18228,6 +18503,7 @@
                 <a:solidFill>
                   <a:srgbClr val="F57C00"/>
                 </a:solidFill>
+                <a:latin typeface="함초롱돋움"/>
               </a:rPr>
               <a:t>3.7%</a:t>
             </a:r>
@@ -18262,6 +18538,7 @@
                 <a:solidFill>
                   <a:srgbClr val="FFFFFF"/>
                 </a:solidFill>
+                <a:latin typeface="함초롱돋움"/>
               </a:rPr>
               <a:t>나쁨 → 알림 대상</a:t>
             </a:r>
@@ -18339,6 +18616,7 @@
                 <a:solidFill>
                   <a:srgbClr val="FFFFFF"/>
                 </a:solidFill>
+                <a:latin typeface="함초롱돋움"/>
               </a:rPr>
               <a:t>L4</a:t>
             </a:r>
@@ -18373,6 +18651,7 @@
                 <a:solidFill>
                   <a:srgbClr val="FFFFFF"/>
                 </a:solidFill>
+                <a:latin typeface="함초롱돋움"/>
               </a:rPr>
               <a:t>&gt; 80 μg/m³</a:t>
             </a:r>
@@ -18407,6 +18686,7 @@
                 <a:solidFill>
                   <a:srgbClr val="F57C00"/>
                 </a:solidFill>
+                <a:latin typeface="함초롱돋움"/>
               </a:rPr>
               <a:t>0.1%</a:t>
             </a:r>
@@ -18441,6 +18721,7 @@
                 <a:solidFill>
                   <a:srgbClr val="FFFFFF"/>
                 </a:solidFill>
+                <a:latin typeface="함초롱돋움"/>
               </a:rPr>
               <a:t>매우나쁨 → 즉시 알림</a:t>
             </a:r>
@@ -18622,6 +18903,7 @@
                 <a:solidFill>
                   <a:srgbClr val="FFFFFF"/>
                 </a:solidFill>
+                <a:latin typeface="함초롱돋움"/>
               </a:rPr>
               <a:t>05  STEP 3  FP-growth 패턴 발견  —  의외성(Unexpectedness) 포착</a:t>
             </a:r>
@@ -18656,6 +18938,7 @@
                 <a:solidFill>
                   <a:srgbClr val="BBDEFB"/>
                 </a:solidFill>
+                <a:latin typeface="함초롱돋움"/>
               </a:rPr>
               <a:t>이산화된 트랜잭션 DB에서 FP-growth 구동 → 사전 가설 없이 알고리즘이 스스로 발견</a:t>
             </a:r>
@@ -18733,6 +19016,7 @@
                 <a:solidFill>
                   <a:srgbClr val="FFFFFF"/>
                 </a:solidFill>
+                <a:latin typeface="함초롱돋움"/>
               </a:rPr>
               <a:t>5</a:t>
             </a:r>
@@ -18767,6 +19051,7 @@
                 <a:solidFill>
                   <a:srgbClr val="0D47A1"/>
                 </a:solidFill>
+                <a:latin typeface="함초롱돋움"/>
               </a:rPr>
               <a:t>FP-growth: min_support=0.05, confidence≥0.95 → BR</a:t>
             </a:r>
@@ -18887,6 +19172,7 @@
                 <a:solidFill>
                   <a:srgbClr val="FFFFFF"/>
                 </a:solidFill>
+                <a:latin typeface="함초롱돋움"/>
               </a:rPr>
               <a:t>핵심 발견 ①  [L1-L3-L4] 전역 표준 도메인</a:t>
             </a:r>
@@ -18964,6 +19250,7 @@
                 <a:solidFill>
                   <a:srgbClr val="FFFFFF"/>
                 </a:solidFill>
+                <a:latin typeface="함초롱돋움"/>
               </a:rPr>
               <a:t>패턴: [L1 - L3 - L4]</a:t>
             </a:r>
@@ -18998,6 +19285,7 @@
                 <a:solidFill>
                   <a:srgbClr val="FFCC80"/>
                 </a:solidFill>
+                <a:latin typeface="함초롱돋움"/>
               </a:rPr>
               <a:t>빈도수 3,338건 — 전체 패턴 중 1위  (Unexpectedness: 예측 불가)</a:t>
             </a:r>
@@ -19075,6 +19363,7 @@
                 <a:solidFill>
                   <a:srgbClr val="FFFFFF"/>
                 </a:solidFill>
+                <a:latin typeface="함초롱돋움"/>
               </a:rPr>
               <a:t>L1</a:t>
             </a:r>
@@ -19109,6 +19398,7 @@
                 <a:solidFill>
                   <a:srgbClr val="212121"/>
                 </a:solidFill>
+                <a:latin typeface="함초롱돋움"/>
               </a:rPr>
               <a:t>특정 업무 전용이 아닌 보편적 속성</a:t>
             </a:r>
@@ -19186,6 +19476,7 @@
                 <a:solidFill>
                   <a:srgbClr val="FFFFFF"/>
                 </a:solidFill>
+                <a:latin typeface="함초롱돋움"/>
               </a:rPr>
               <a:t>L3</a:t>
             </a:r>
@@ -19220,6 +19511,7 @@
                 <a:solidFill>
                   <a:srgbClr val="212121"/>
                 </a:solidFill>
+                <a:latin typeface="함초롱돋움"/>
               </a:rPr>
               <a:t>여러 테이블에서 반복 등장</a:t>
             </a:r>
@@ -19297,6 +19589,7 @@
                 <a:solidFill>
                   <a:srgbClr val="FFFFFF"/>
                 </a:solidFill>
+                <a:latin typeface="함초롱돋움"/>
               </a:rPr>
               <a:t>L4</a:t>
             </a:r>
@@ -19331,6 +19624,7 @@
                 <a:solidFill>
                   <a:srgbClr val="212121"/>
                 </a:solidFill>
+                <a:latin typeface="함초롱돋움"/>
               </a:rPr>
               <a:t>단일 시스템이 아닌 전체 플랫폼 횡단</a:t>
             </a:r>
@@ -19451,6 +19745,7 @@
                 <a:solidFill>
                   <a:srgbClr val="212121"/>
                 </a:solidFill>
+                <a:latin typeface="함초롱돋움"/>
               </a:rPr>
               <a:t>도메인 해석 (의외성):
 '주소', '날짜', '연락처'처럼 시스템 전반을 관통하는
@@ -19573,6 +19868,7 @@
                 <a:solidFill>
                   <a:srgbClr val="FFFFFF"/>
                 </a:solidFill>
+                <a:latin typeface="함초롱돋움"/>
               </a:rPr>
               <a:t>핵심 발견 ②  [경도] → [위도]  Lift=19.88</a:t>
             </a:r>
@@ -19650,6 +19946,7 @@
                 <a:solidFill>
                   <a:srgbClr val="FFFFFF"/>
                 </a:solidFill>
+                <a:latin typeface="함초롱돋움"/>
               </a:rPr>
               <a:t>IF   [컬럼=경도]  THEN  [컬럼=위도]</a:t>
             </a:r>
@@ -19684,6 +19981,7 @@
                 <a:solidFill>
                   <a:srgbClr val="F57C00"/>
                 </a:solidFill>
+                <a:latin typeface="함초롱돋움"/>
               </a:rPr>
               <a:t>confidence=100%  |  support=5.0%  |  Lift=19.88</a:t>
             </a:r>
@@ -19718,6 +20016,7 @@
                 <a:solidFill>
                   <a:srgbClr val="0D47A1"/>
                 </a:solidFill>
+                <a:latin typeface="함초롱돋움"/>
               </a:rPr>
               <a:t>Lift 해석 (기술적 정확성):</a:t>
             </a:r>
@@ -19752,6 +20051,7 @@
                 <a:solidFill>
                   <a:srgbClr val="212121"/>
                 </a:solidFill>
+                <a:latin typeface="함초롱돋움"/>
               </a:rPr>
               <a:t>위도와 경도는 독립적이지 않음. 경도가 있을 때 위도가
 함께 등장할 확률이 우연 대비 19.88배 높음.
@@ -19875,6 +20175,7 @@
                 <a:solidFill>
                   <a:srgbClr val="212121"/>
                 </a:solidFill>
+                <a:latin typeface="함초롱돋움"/>
               </a:rPr>
               <a:t>추가 발견: [수치형=적음] → [NULL율=낮음]  conf=100%
 → Static 데이터는 범주형 위주이며 결측이 거의 없음
@@ -20058,6 +20359,7 @@
                 <a:solidFill>
                   <a:srgbClr val="FFFFFF"/>
                 </a:solidFill>
+                <a:latin typeface="함초롱돋움"/>
               </a:rPr>
               <a:t>06  STEP 4  BR 도출  —  함수적 종속관계(FD) + 자카드 유사도(Jaccard)</a:t>
             </a:r>
@@ -20092,6 +20394,7 @@
                 <a:solidFill>
                   <a:srgbClr val="BBDEFB"/>
                 </a:solidFill>
+                <a:latin typeface="함초롱돋움"/>
               </a:rPr>
               <a:t>품질관리 PDF p.9/p.39  |  FP-growth 패턴 위에 FD·Jaccard로 규칙 정형화</a:t>
             </a:r>
@@ -20212,6 +20515,7 @@
                 <a:solidFill>
                   <a:srgbClr val="FFFFFF"/>
                 </a:solidFill>
+                <a:latin typeface="함초롱돋움"/>
               </a:rPr>
               <a:t>함수적 종속관계 (FD) 기반 BR</a:t>
             </a:r>
@@ -20246,6 +20550,7 @@
                 <a:solidFill>
                   <a:srgbClr val="0D47A1"/>
                 </a:solidFill>
+                <a:latin typeface="함초롱돋움"/>
               </a:rPr>
               <a:t>공식: FD신뢰도 = (A별 B고유값수==1) 비율
 신뢰도 1.0 = 예외 없는 완전 종속 → BR 직접 도출</a:t>
@@ -20324,6 +20629,7 @@
                 <a:solidFill>
                   <a:srgbClr val="FFFFFF"/>
                 </a:solidFill>
+                <a:latin typeface="함초롱돋움"/>
               </a:rPr>
               <a:t>A → B</a:t>
             </a:r>
@@ -20358,6 +20664,7 @@
                 <a:solidFill>
                   <a:srgbClr val="FFFFFF"/>
                 </a:solidFill>
+                <a:latin typeface="함초롱돋움"/>
               </a:rPr>
               <a:t>FD신뢰도</a:t>
             </a:r>
@@ -20392,6 +20699,7 @@
                 <a:solidFill>
                   <a:srgbClr val="FFFFFF"/>
                 </a:solidFill>
+                <a:latin typeface="함초롱돋움"/>
               </a:rPr>
               <a:t>BR ID</a:t>
             </a:r>
@@ -20426,6 +20734,7 @@
                 <a:solidFill>
                   <a:srgbClr val="FFFFFF"/>
                 </a:solidFill>
+                <a:latin typeface="함초롱돋움"/>
               </a:rPr>
               <a:t>Hard/Soft</a:t>
             </a:r>
@@ -20503,6 +20812,7 @@
                 <a:solidFill>
                   <a:srgbClr val="212121"/>
                 </a:solidFill>
+                <a:latin typeface="함초롱돋움"/>
               </a:rPr>
               <a:t>다발지역ID→위도/경도</a:t>
             </a:r>
@@ -20537,6 +20847,7 @@
                 <a:solidFill>
                   <a:srgbClr val="2E7D32"/>
                 </a:solidFill>
+                <a:latin typeface="함초롱돋움"/>
               </a:rPr>
               <a:t>1.0</a:t>
             </a:r>
@@ -20571,6 +20882,7 @@
                 <a:solidFill>
                   <a:srgbClr val="0D47A1"/>
                 </a:solidFill>
+                <a:latin typeface="함초롱돋움"/>
               </a:rPr>
               <a:t>BR-FD-01</a:t>
             </a:r>
@@ -20605,6 +20917,7 @@
                 <a:solidFill>
                   <a:srgbClr val="6A1B9A"/>
                 </a:solidFill>
+                <a:latin typeface="함초롱돋움"/>
               </a:rPr>
               <a:t>Hard</a:t>
             </a:r>
@@ -20682,6 +20995,7 @@
                 <a:solidFill>
                   <a:srgbClr val="212121"/>
                 </a:solidFill>
+                <a:latin typeface="함초롱돋움"/>
               </a:rPr>
               <a:t>사고 종류→대상</a:t>
             </a:r>
@@ -20716,6 +21030,7 @@
                 <a:solidFill>
                   <a:srgbClr val="2E7D32"/>
                 </a:solidFill>
+                <a:latin typeface="함초롱돋움"/>
               </a:rPr>
               <a:t>1.0</a:t>
             </a:r>
@@ -20750,6 +21065,7 @@
                 <a:solidFill>
                   <a:srgbClr val="0D47A1"/>
                 </a:solidFill>
+                <a:latin typeface="함초롱돋움"/>
               </a:rPr>
               <a:t>BR-FD-02</a:t>
             </a:r>
@@ -20784,6 +21100,7 @@
                 <a:solidFill>
                   <a:srgbClr val="6A1B9A"/>
                 </a:solidFill>
+                <a:latin typeface="함초롱돋움"/>
               </a:rPr>
               <a:t>Hard</a:t>
             </a:r>
@@ -20861,6 +21178,7 @@
                 <a:solidFill>
                   <a:srgbClr val="212121"/>
                 </a:solidFill>
+                <a:latin typeface="함초롱돋움"/>
               </a:rPr>
               <a:t>시설 ID→시설명/주소</a:t>
             </a:r>
@@ -20895,6 +21213,7 @@
                 <a:solidFill>
                   <a:srgbClr val="2E7D32"/>
                 </a:solidFill>
+                <a:latin typeface="함초롱돋움"/>
               </a:rPr>
               <a:t>1.0</a:t>
             </a:r>
@@ -20929,6 +21248,7 @@
                 <a:solidFill>
                   <a:srgbClr val="0D47A1"/>
                 </a:solidFill>
+                <a:latin typeface="함초롱돋움"/>
               </a:rPr>
               <a:t>BR-FD-03</a:t>
             </a:r>
@@ -20963,6 +21283,7 @@
                 <a:solidFill>
                   <a:srgbClr val="6A1B9A"/>
                 </a:solidFill>
+                <a:latin typeface="함초롱돋움"/>
               </a:rPr>
               <a:t>Hard</a:t>
             </a:r>
@@ -21040,6 +21361,7 @@
                 <a:solidFill>
                   <a:srgbClr val="212121"/>
                 </a:solidFill>
+                <a:latin typeface="함초롱돋움"/>
               </a:rPr>
               <a:t>사고종류 6종→기타 통합</a:t>
             </a:r>
@@ -21074,6 +21396,7 @@
                 <a:solidFill>
                   <a:srgbClr val="2E7D32"/>
                 </a:solidFill>
+                <a:latin typeface="함초롱돋움"/>
               </a:rPr>
               <a:t>1.0</a:t>
             </a:r>
@@ -21108,6 +21431,7 @@
                 <a:solidFill>
                   <a:srgbClr val="0D47A1"/>
                 </a:solidFill>
+                <a:latin typeface="함초롱돋움"/>
               </a:rPr>
               <a:t>BR-FD-04</a:t>
             </a:r>
@@ -21142,6 +21466,7 @@
                 <a:solidFill>
                   <a:srgbClr val="E1BEE7"/>
                 </a:solidFill>
+                <a:latin typeface="함초롱돋움"/>
               </a:rPr>
               <a:t>Soft→Flag</a:t>
             </a:r>
@@ -21219,6 +21544,7 @@
                 <a:solidFill>
                   <a:srgbClr val="FFFFFF"/>
                 </a:solidFill>
+                <a:latin typeface="함초롱돋움"/>
               </a:rPr>
               <a:t>사고종류 × 대상 크로스탭 (8,381건)</a:t>
             </a:r>
@@ -21296,6 +21622,7 @@
                 <a:solidFill>
                   <a:srgbClr val="212121"/>
                 </a:solidFill>
+                <a:latin typeface="함초롱돋움"/>
               </a:rPr>
               <a:t>CHILD/SCHOOLZONE</a:t>
             </a:r>
@@ -21330,6 +21657,7 @@
                 <a:solidFill>
                   <a:srgbClr val="1565C0"/>
                 </a:solidFill>
+                <a:latin typeface="함초롱돋움"/>
               </a:rPr>
               <a:t>어린이</a:t>
             </a:r>
@@ -21364,6 +21692,7 @@
                 <a:solidFill>
                   <a:srgbClr val="1565C0"/>
                 </a:solidFill>
+                <a:latin typeface="함초롱돋움"/>
               </a:rPr>
               <a:t>1,431건</a:t>
             </a:r>
@@ -21441,6 +21770,7 @@
                 <a:solidFill>
                   <a:srgbClr val="212121"/>
                 </a:solidFill>
+                <a:latin typeface="함초롱돋움"/>
               </a:rPr>
               <a:t>OLDMAN</a:t>
             </a:r>
@@ -21475,6 +21805,7 @@
                 <a:solidFill>
                   <a:srgbClr val="1565C0"/>
                 </a:solidFill>
+                <a:latin typeface="함초롱돋움"/>
               </a:rPr>
               <a:t>노약자</a:t>
             </a:r>
@@ -21509,6 +21840,7 @@
                 <a:solidFill>
                   <a:srgbClr val="1565C0"/>
                 </a:solidFill>
+                <a:latin typeface="함초롱돋움"/>
               </a:rPr>
               <a:t>1,573건</a:t>
             </a:r>
@@ -21586,6 +21918,7 @@
                 <a:solidFill>
                   <a:srgbClr val="212121"/>
                 </a:solidFill>
+                <a:latin typeface="함초롱돋움"/>
               </a:rPr>
               <a:t>BICYCLE/VIOLT/LG/JAYWALKING/FREEZING</a:t>
             </a:r>
@@ -21620,6 +21953,7 @@
                 <a:solidFill>
                   <a:srgbClr val="E1BEE7"/>
                 </a:solidFill>
+                <a:latin typeface="함초롱돋움"/>
               </a:rPr>
               <a:t>기타</a:t>
             </a:r>
@@ -21654,6 +21988,7 @@
                 <a:solidFill>
                   <a:srgbClr val="E1BEE7"/>
                 </a:solidFill>
+                <a:latin typeface="함초롱돋움"/>
               </a:rPr>
               <a:t>5,377건 → BR-FD-04 과제</a:t>
             </a:r>
@@ -21774,6 +22109,7 @@
                 <a:solidFill>
                   <a:srgbClr val="FFFFFF"/>
                 </a:solidFill>
+                <a:latin typeface="함초롱돋움"/>
               </a:rPr>
               <a:t>자카드 유사도 (Jaccard) 기반 BR</a:t>
             </a:r>
@@ -21808,6 +22144,7 @@
                 <a:solidFill>
                   <a:srgbClr val="0D47A1"/>
                 </a:solidFill>
+                <a:latin typeface="함초롱돋움"/>
               </a:rPr>
               <a:t>공식: |X∩Y|/|X∪Y| (값 집합·범위 중첩 비율)
 기준: Jaccard≥0.7 → 연계 허용  /  &lt;0.5 → 거버넌스 조치</a:t>
@@ -21929,6 +22266,7 @@
                 <a:solidFill>
                   <a:srgbClr val="FFFFFF"/>
                 </a:solidFill>
+                <a:latin typeface="함초롱돋움"/>
               </a:rPr>
               <a:t>도시간 PM10
 범위 Jaccard</a:t>
@@ -22007,6 +22345,7 @@
                 <a:solidFill>
                   <a:srgbClr val="F57C00"/>
                 </a:solidFill>
+                <a:latin typeface="함초롱돋움"/>
               </a:rPr>
               <a:t>0.409</a:t>
             </a:r>
@@ -22041,6 +22380,7 @@
                 <a:solidFill>
                   <a:srgbClr val="212121"/>
                 </a:solidFill>
+                <a:latin typeface="함초롱돋움"/>
               </a:rPr>
               <a:t>&lt; 0.7 기준 미달
 → 표준화 의무화</a:t>
@@ -22119,6 +22459,7 @@
                 <a:solidFill>
                   <a:srgbClr val="FFFFFF"/>
                 </a:solidFill>
+                <a:latin typeface="함초롱돋움"/>
               </a:rPr>
               <a:t>BR-JAC-01</a:t>
             </a:r>
@@ -22239,6 +22580,7 @@
                 <a:solidFill>
                   <a:srgbClr val="FFFFFF"/>
                 </a:solidFill>
+                <a:latin typeface="함초롱돋움"/>
               </a:rPr>
               <a:t>CCTV↔사고지역
 공간 Jaccard</a:t>
@@ -22317,6 +22659,7 @@
                 <a:solidFill>
                   <a:srgbClr val="F57C00"/>
                 </a:solidFill>
+                <a:latin typeface="함초롱돋움"/>
               </a:rPr>
               <a:t>0.134</a:t>
             </a:r>
@@ -22351,6 +22694,7 @@
                 <a:solidFill>
                   <a:srgbClr val="212121"/>
                 </a:solidFill>
+                <a:latin typeface="함초롱돋움"/>
               </a:rPr>
               <a:t>&lt; 0.5 심각 불일치
 → 87.1% CCTV 미커버</a:t>
@@ -22429,6 +22773,7 @@
                 <a:solidFill>
                   <a:srgbClr val="FFFFFF"/>
                 </a:solidFill>
+                <a:latin typeface="함초롱돋움"/>
               </a:rPr>
               <a:t>BR-JAC-02</a:t>
             </a:r>
@@ -22549,6 +22894,7 @@
                 <a:solidFill>
                   <a:srgbClr val="FFFFFF"/>
                 </a:solidFill>
+                <a:latin typeface="함초롱돋움"/>
               </a:rPr>
               <a:t>경도↔위도
 FP-growth Lift</a:t>
@@ -22627,6 +22973,7 @@
                 <a:solidFill>
                   <a:srgbClr val="F57C00"/>
                 </a:solidFill>
+                <a:latin typeface="함초롱돋움"/>
               </a:rPr>
               <a:t>19.88</a:t>
             </a:r>
@@ -22661,6 +23008,7 @@
                 <a:solidFill>
                   <a:srgbClr val="212121"/>
                 </a:solidFill>
+                <a:latin typeface="함초롱돋움"/>
               </a:rPr>
               <a:t>우연 대비 19.88배
 → 강력 의존 관계</a:t>
@@ -22739,6 +23087,7 @@
                 <a:solidFill>
                   <a:srgbClr val="FFFFFF"/>
                 </a:solidFill>
+                <a:latin typeface="함초롱돋움"/>
               </a:rPr>
               <a:t>BR-FD-01</a:t>
             </a:r>
@@ -22920,6 +23269,7 @@
                 <a:solidFill>
                   <a:srgbClr val="FFFFFF"/>
                 </a:solidFill>
+                <a:latin typeface="함초롱돋움"/>
               </a:rPr>
               <a:t>07  STEP 5  Hard Rule vs Soft Rule  —  Adaptive Quality Management</a:t>
             </a:r>
@@ -22954,6 +23304,7 @@
                 <a:solidFill>
                   <a:srgbClr val="BBDEFB"/>
                 </a:solidFill>
+                <a:latin typeface="함초롱돋움"/>
               </a:rPr>
               <a:t>단순 오류 차단을 넘어, 예외를 학습 자산으로 전환하는 엔지니어적 설계 결단</a:t>
             </a:r>
@@ -23074,6 +23425,7 @@
                 <a:solidFill>
                   <a:srgbClr val="FFFFFF"/>
                 </a:solidFill>
+                <a:latin typeface="함초롱돋움"/>
               </a:rPr>
               <a:t>Hard Rule  (강제 차단·즉시 거부)</a:t>
             </a:r>
@@ -23108,6 +23460,7 @@
                 <a:solidFill>
                   <a:srgbClr val="212121"/>
                 </a:solidFill>
+                <a:latin typeface="함초롱돋움"/>
               </a:rPr>
               <a:t>• 위반 시 데이터 유입 자체를 차단
 • 시스템 생존에 필수 — FD=1.0 완전 종속 속성
@@ -23230,6 +23583,7 @@
                 <a:solidFill>
                   <a:srgbClr val="6A1B9A"/>
                 </a:solidFill>
+                <a:latin typeface="함초롱돋움"/>
               </a:rPr>
               <a:t>Soft Rule  (Flag 태깅 + 관리자 알림)</a:t>
             </a:r>
@@ -23264,6 +23618,7 @@
                 <a:solidFill>
                   <a:srgbClr val="212121"/>
                 </a:solidFill>
+                <a:latin typeface="함초롱돋움"/>
               </a:rPr>
               <a:t>• 위반 시 차단 대신 Anomaly Flag 기록
 • 도메인 확장 가능성 있는 규칙에 적용
@@ -23343,6 +23698,7 @@
                 <a:solidFill>
                   <a:srgbClr val="FFFFFF"/>
                 </a:solidFill>
+                <a:latin typeface="함초롱돋움"/>
               </a:rPr>
               <a:t>BR ID</a:t>
             </a:r>
@@ -23377,6 +23733,7 @@
                 <a:solidFill>
                   <a:srgbClr val="FFFFFF"/>
                 </a:solidFill>
+                <a:latin typeface="함초롱돋움"/>
               </a:rPr>
               <a:t>규칙 요약</a:t>
             </a:r>
@@ -23411,6 +23768,7 @@
                 <a:solidFill>
                   <a:srgbClr val="FFFFFF"/>
                 </a:solidFill>
+                <a:latin typeface="함초롱돋움"/>
               </a:rPr>
               <a:t>분류</a:t>
             </a:r>
@@ -23445,6 +23803,7 @@
                 <a:solidFill>
                   <a:srgbClr val="FFFFFF"/>
                 </a:solidFill>
+                <a:latin typeface="함초롱돋움"/>
               </a:rPr>
               <a:t>판단 근거</a:t>
             </a:r>
@@ -23479,6 +23838,7 @@
                 <a:solidFill>
                   <a:srgbClr val="FFFFFF"/>
                 </a:solidFill>
+                <a:latin typeface="함초롱돋움"/>
               </a:rPr>
               <a:t>확장성</a:t>
             </a:r>
@@ -23556,6 +23916,7 @@
                 <a:solidFill>
                   <a:srgbClr val="0D47A1"/>
                 </a:solidFill>
+                <a:latin typeface="함초롱돋움"/>
               </a:rPr>
               <a:t>BR-FD-01</a:t>
             </a:r>
@@ -23590,6 +23951,7 @@
                 <a:solidFill>
                   <a:srgbClr val="212121"/>
                 </a:solidFill>
+                <a:latin typeface="함초롱돋움"/>
               </a:rPr>
               <a:t>위도/경도 NOT NULL</a:t>
             </a:r>
@@ -23667,6 +24029,7 @@
                 <a:solidFill>
                   <a:srgbClr val="FFFFFF"/>
                 </a:solidFill>
+                <a:latin typeface="함초롱돋움"/>
               </a:rPr>
               <a:t>Hard</a:t>
             </a:r>
@@ -23701,6 +24064,7 @@
                 <a:solidFill>
                   <a:srgbClr val="212121"/>
                 </a:solidFill>
+                <a:latin typeface="함초롱돋움"/>
               </a:rPr>
               <a:t>FP Lift=19.88 의존 / 공간분석 불가</a:t>
             </a:r>
@@ -23735,6 +24099,7 @@
                 <a:solidFill>
                   <a:srgbClr val="616161"/>
                 </a:solidFill>
+                <a:latin typeface="함초롱돋움"/>
               </a:rPr>
               <a:t>없음(필수값)</a:t>
             </a:r>
@@ -23812,6 +24177,7 @@
                 <a:solidFill>
                   <a:srgbClr val="0D47A1"/>
                 </a:solidFill>
+                <a:latin typeface="함초롱돋움"/>
               </a:rPr>
               <a:t>BR-FD-02</a:t>
             </a:r>
@@ -23846,6 +24212,7 @@
                 <a:solidFill>
                   <a:srgbClr val="212121"/>
                 </a:solidFill>
+                <a:latin typeface="함초롱돋움"/>
               </a:rPr>
               <a:t>사고종류→대상 FD=1.0</a:t>
             </a:r>
@@ -23923,6 +24290,7 @@
                 <a:solidFill>
                   <a:srgbClr val="FFFFFF"/>
                 </a:solidFill>
+                <a:latin typeface="함초롱돋움"/>
               </a:rPr>
               <a:t>Hard</a:t>
             </a:r>
@@ -23957,6 +24325,7 @@
                 <a:solidFill>
                   <a:srgbClr val="212121"/>
                 </a:solidFill>
+                <a:latin typeface="함초롱돋움"/>
               </a:rPr>
               <a:t>완전 FD — 위반=데이터 오염</a:t>
             </a:r>
@@ -23991,6 +24360,7 @@
                 <a:solidFill>
                   <a:srgbClr val="616161"/>
                 </a:solidFill>
+                <a:latin typeface="함초롱돋움"/>
               </a:rPr>
               <a:t>신규유형 시 FD 재측정</a:t>
             </a:r>
@@ -24068,6 +24438,7 @@
                 <a:solidFill>
                   <a:srgbClr val="0D47A1"/>
                 </a:solidFill>
+                <a:latin typeface="함초롱돋움"/>
               </a:rPr>
               <a:t>BR-FD-03</a:t>
             </a:r>
@@ -24102,6 +24473,7 @@
                 <a:solidFill>
                   <a:srgbClr val="212121"/>
                 </a:solidFill>
+                <a:latin typeface="함초롱돋움"/>
               </a:rPr>
               <a:t>시설ID→명칭/주소 NOT NULL</a:t>
             </a:r>
@@ -24179,6 +24551,7 @@
                 <a:solidFill>
                   <a:srgbClr val="FFFFFF"/>
                 </a:solidFill>
+                <a:latin typeface="함초롱돋움"/>
               </a:rPr>
               <a:t>Hard</a:t>
             </a:r>
@@ -24213,6 +24586,7 @@
                 <a:solidFill>
                   <a:srgbClr val="212121"/>
                 </a:solidFill>
+                <a:latin typeface="함초롱돋움"/>
               </a:rPr>
               <a:t>식별 불가→운영 규칙 적용 불가</a:t>
             </a:r>
@@ -24247,6 +24621,7 @@
                 <a:solidFill>
                   <a:srgbClr val="616161"/>
                 </a:solidFill>
+                <a:latin typeface="함초롱돋움"/>
               </a:rPr>
               <a:t>없음(필수값)</a:t>
             </a:r>
@@ -24324,6 +24699,7 @@
                 <a:solidFill>
                   <a:srgbClr val="0D47A1"/>
                 </a:solidFill>
+                <a:latin typeface="함초롱돋움"/>
               </a:rPr>
               <a:t>BR-JAC-01</a:t>
             </a:r>
@@ -24358,6 +24734,7 @@
                 <a:solidFill>
                   <a:srgbClr val="212121"/>
                 </a:solidFill>
+                <a:latin typeface="함초롱돋움"/>
               </a:rPr>
               <a:t>PM10 Jaccard≥0.7 연계</a:t>
             </a:r>
@@ -24435,6 +24812,7 @@
                 <a:solidFill>
                   <a:srgbClr val="FFFFFF"/>
                 </a:solidFill>
+                <a:latin typeface="함초롱돋움"/>
               </a:rPr>
               <a:t>Soft→Flag</a:t>
             </a:r>
@@ -24469,6 +24847,7 @@
                 <a:solidFill>
                   <a:srgbClr val="212121"/>
                 </a:solidFill>
+                <a:latin typeface="함초롱돋움"/>
               </a:rPr>
               <a:t>기준 미달 시 표준화 알림 발송</a:t>
             </a:r>
@@ -24503,6 +24882,7 @@
                 <a:solidFill>
                   <a:srgbClr val="616161"/>
                 </a:solidFill>
+                <a:latin typeface="함초롱돋움"/>
               </a:rPr>
               <a:t>측정장비 교체 시 갱신</a:t>
             </a:r>
@@ -24580,6 +24960,7 @@
                 <a:solidFill>
                   <a:srgbClr val="0D47A1"/>
                 </a:solidFill>
+                <a:latin typeface="함초롱돋움"/>
               </a:rPr>
               <a:t>BR-JAC-02</a:t>
             </a:r>
@@ -24614,6 +24995,7 @@
                 <a:solidFill>
                   <a:srgbClr val="212121"/>
                 </a:solidFill>
+                <a:latin typeface="함초롱돋움"/>
               </a:rPr>
               <a:t>CCTV↔사고 Jaccard&lt;0.5</a:t>
             </a:r>
@@ -24691,6 +25073,7 @@
                 <a:solidFill>
                   <a:srgbClr val="FFFFFF"/>
                 </a:solidFill>
+                <a:latin typeface="함초롱돋움"/>
               </a:rPr>
               <a:t>Soft→우선순위</a:t>
             </a:r>
@@ -24725,6 +25108,7 @@
                 <a:solidFill>
                   <a:srgbClr val="212121"/>
                 </a:solidFill>
+                <a:latin typeface="함초롱돋움"/>
               </a:rPr>
               <a:t>재배치 Priority 목록 생성</a:t>
             </a:r>
@@ -24759,6 +25143,7 @@
                 <a:solidFill>
                   <a:srgbClr val="616161"/>
                 </a:solidFill>
+                <a:latin typeface="함초롱돋움"/>
               </a:rPr>
               <a:t>CCTV 설치 후 재계산</a:t>
             </a:r>
@@ -24836,6 +25221,7 @@
                 <a:solidFill>
                   <a:srgbClr val="0D47A1"/>
                 </a:solidFill>
+                <a:latin typeface="함초롱돋움"/>
               </a:rPr>
               <a:t>BR-FD-04</a:t>
             </a:r>
@@ -24870,6 +25256,7 @@
                 <a:solidFill>
                   <a:srgbClr val="212121"/>
                 </a:solidFill>
+                <a:latin typeface="함초롱돋움"/>
               </a:rPr>
               <a:t>기타 분류 6종 세분화</a:t>
             </a:r>
@@ -24947,6 +25334,7 @@
                 <a:solidFill>
                   <a:srgbClr val="FFFFFF"/>
                 </a:solidFill>
+                <a:latin typeface="함초롱돋움"/>
               </a:rPr>
               <a:t>Soft→Adaptive</a:t>
             </a:r>
@@ -24981,6 +25369,7 @@
                 <a:solidFill>
                   <a:srgbClr val="212121"/>
                 </a:solidFill>
+                <a:latin typeface="함초롱돋움"/>
               </a:rPr>
               <a:t>Flag + 신규 유형 학습 트리거</a:t>
             </a:r>
@@ -25015,6 +25404,7 @@
                 <a:solidFill>
                   <a:srgbClr val="616161"/>
                 </a:solidFill>
+                <a:latin typeface="함초롱돋움"/>
               </a:rPr>
               <a:t>킥보드 등 자동 학습</a:t>
             </a:r>
@@ -25135,6 +25525,7 @@
                 <a:solidFill>
                   <a:srgbClr val="FFFFFF"/>
                 </a:solidFill>
+                <a:latin typeface="함초롱돋움"/>
               </a:rPr>
               <a:t>엔지니어적 결단:
 "Hard Rule은 시스템의 생존을 보장하고, Soft Rule은 시스템의 진화를 가능하게 한다.
@@ -25319,6 +25710,7 @@
                 <a:solidFill>
                   <a:srgbClr val="FFFFFF"/>
                 </a:solidFill>
+                <a:latin typeface="함초롱돋움"/>
               </a:rPr>
               <a:t>08  핵심 발견  —  공간 거버넌스 공백 + 환경 품질 기준</a:t>
             </a:r>
@@ -25353,6 +25745,7 @@
                 <a:solidFill>
                   <a:srgbClr val="BBDEFB"/>
                 </a:solidFill>
+                <a:latin typeface="함초롱돋움"/>
               </a:rPr>
               <a:t>알고리즘이 발견한 패턴의 실측 검증 | Jaccard·FD·이산화 수치 근거</a:t>
             </a:r>
@@ -25430,6 +25823,7 @@
                 <a:solidFill>
                   <a:srgbClr val="FFFFFF"/>
                 </a:solidFill>
+                <a:latin typeface="함초롱돋움"/>
               </a:rPr>
               <a:t>87.1%</a:t>
             </a:r>
@@ -25464,6 +25858,7 @@
                 <a:solidFill>
                   <a:srgbClr val="BBDEFB"/>
                 </a:solidFill>
+                <a:latin typeface="함초롱돋움"/>
               </a:rPr>
               <a:t>CCTV 2km 밖 사고지점</a:t>
             </a:r>
@@ -25541,6 +25936,7 @@
                 <a:solidFill>
                   <a:srgbClr val="FFFFFF"/>
                 </a:solidFill>
+                <a:latin typeface="함초롱돋움"/>
               </a:rPr>
               <a:t>0.134</a:t>
             </a:r>
@@ -25575,6 +25971,7 @@
                 <a:solidFill>
                   <a:srgbClr val="BBDEFB"/>
                 </a:solidFill>
+                <a:latin typeface="함초롱돋움"/>
               </a:rPr>
               <a:t>공간 Jaccard
 (CCTV↔사고범위)</a:t>
@@ -25653,6 +26050,7 @@
                 <a:solidFill>
                   <a:srgbClr val="FFFFFF"/>
                 </a:solidFill>
+                <a:latin typeface="함초롱돋움"/>
               </a:rPr>
               <a:t>44,380m</a:t>
             </a:r>
@@ -25687,6 +26085,7 @@
                 <a:solidFill>
                   <a:srgbClr val="BBDEFB"/>
                 </a:solidFill>
+                <a:latin typeface="함초롱돋움"/>
               </a:rPr>
               <a:t>SCHOOLZONE
 최인근 CCTV거리</a:t>
@@ -25765,6 +26164,7 @@
                 <a:solidFill>
                   <a:srgbClr val="FFFFFF"/>
                 </a:solidFill>
+                <a:latin typeface="함초롱돋움"/>
               </a:rPr>
               <a:t>사고종류</a:t>
             </a:r>
@@ -25799,6 +26199,7 @@
                 <a:solidFill>
                   <a:srgbClr val="FFFFFF"/>
                 </a:solidFill>
+                <a:latin typeface="함초롱돋움"/>
               </a:rPr>
               <a:t>평균CCTV거리</a:t>
             </a:r>
@@ -25833,6 +26234,7 @@
                 <a:solidFill>
                   <a:srgbClr val="FFFFFF"/>
                 </a:solidFill>
+                <a:latin typeface="함초롱돋움"/>
               </a:rPr>
               <a:t>건수</a:t>
             </a:r>
@@ -25867,6 +26269,7 @@
                 <a:solidFill>
                   <a:srgbClr val="FFFFFF"/>
                 </a:solidFill>
+                <a:latin typeface="함초롱돋움"/>
               </a:rPr>
               <a:t>조치</a:t>
             </a:r>
@@ -25901,6 +26304,7 @@
                 <a:solidFill>
                   <a:srgbClr val="FFFFFF"/>
                 </a:solidFill>
+                <a:latin typeface="함초롱돋움"/>
               </a:rPr>
               <a:t>BR</a:t>
             </a:r>
@@ -25978,6 +26382,7 @@
                 <a:solidFill>
                   <a:srgbClr val="212121"/>
                 </a:solidFill>
+                <a:latin typeface="함초롱돋움"/>
               </a:rPr>
               <a:t>SCHOOLZONE</a:t>
             </a:r>
@@ -26012,6 +26417,7 @@
                 <a:solidFill>
                   <a:srgbClr val="212121"/>
                 </a:solidFill>
+                <a:latin typeface="함초롱돋움"/>
               </a:rPr>
               <a:t>44,380m</a:t>
             </a:r>
@@ -26046,6 +26452,7 @@
                 <a:solidFill>
                   <a:srgbClr val="212121"/>
                 </a:solidFill>
+                <a:latin typeface="함초롱돋움"/>
               </a:rPr>
               <a:t>394건</a:t>
             </a:r>
@@ -26080,6 +26487,7 @@
                 <a:solidFill>
                   <a:srgbClr val="212121"/>
                 </a:solidFill>
+                <a:latin typeface="함초롱돋움"/>
               </a:rPr>
               <a:t>CCTV 즉시 설치 P.1</a:t>
             </a:r>
@@ -26114,6 +26522,7 @@
                 <a:solidFill>
                   <a:srgbClr val="0D47A1"/>
                 </a:solidFill>
+                <a:latin typeface="함초롱돋움"/>
               </a:rPr>
               <a:t>BR-CROSS-01</a:t>
             </a:r>
@@ -26191,6 +26600,7 @@
                 <a:solidFill>
                   <a:srgbClr val="212121"/>
                 </a:solidFill>
+                <a:latin typeface="함초롱돋움"/>
               </a:rPr>
               <a:t>CHILD</a:t>
             </a:r>
@@ -26225,6 +26635,7 @@
                 <a:solidFill>
                   <a:srgbClr val="212121"/>
                 </a:solidFill>
+                <a:latin typeface="함초롱돋움"/>
               </a:rPr>
               <a:t>40,628m</a:t>
             </a:r>
@@ -26259,6 +26670,7 @@
                 <a:solidFill>
                   <a:srgbClr val="212121"/>
                 </a:solidFill>
+                <a:latin typeface="함초롱돋움"/>
               </a:rPr>
               <a:t>1,037건</a:t>
             </a:r>
@@ -26293,6 +26705,7 @@
                 <a:solidFill>
                   <a:srgbClr val="212121"/>
                 </a:solidFill>
+                <a:latin typeface="함초롱돋움"/>
               </a:rPr>
               <a:t>어린이시설 반경500m</a:t>
             </a:r>
@@ -26327,6 +26740,7 @@
                 <a:solidFill>
                   <a:srgbClr val="0D47A1"/>
                 </a:solidFill>
+                <a:latin typeface="함초롱돋움"/>
               </a:rPr>
               <a:t>BR-FD-02</a:t>
             </a:r>
@@ -26404,6 +26818,7 @@
                 <a:solidFill>
                   <a:srgbClr val="212121"/>
                 </a:solidFill>
+                <a:latin typeface="함초롱돋움"/>
               </a:rPr>
               <a:t>OLDMAN</a:t>
             </a:r>
@@ -26438,6 +26853,7 @@
                 <a:solidFill>
                   <a:srgbClr val="212121"/>
                 </a:solidFill>
+                <a:latin typeface="함초롱돋움"/>
               </a:rPr>
               <a:t>39,352m</a:t>
             </a:r>
@@ -26472,6 +26888,7 @@
                 <a:solidFill>
                   <a:srgbClr val="212121"/>
                 </a:solidFill>
+                <a:latin typeface="함초롱돋움"/>
               </a:rPr>
               <a:t>1,573건</a:t>
             </a:r>
@@ -26506,6 +26923,7 @@
                 <a:solidFill>
                   <a:srgbClr val="212121"/>
                 </a:solidFill>
+                <a:latin typeface="함초롱돋움"/>
               </a:rPr>
               <a:t>노인이동경로 강화</a:t>
             </a:r>
@@ -26540,6 +26958,7 @@
                 <a:solidFill>
                   <a:srgbClr val="0D47A1"/>
                 </a:solidFill>
+                <a:latin typeface="함초롱돋움"/>
               </a:rPr>
               <a:t>BR-FD-02</a:t>
             </a:r>
@@ -26617,6 +27036,7 @@
                 <a:solidFill>
                   <a:srgbClr val="212121"/>
                 </a:solidFill>
+                <a:latin typeface="함초롱돋움"/>
               </a:rPr>
               <a:t>BICYCLE</a:t>
             </a:r>
@@ -26651,6 +27071,7 @@
                 <a:solidFill>
                   <a:srgbClr val="212121"/>
                 </a:solidFill>
+                <a:latin typeface="함초롱돋움"/>
               </a:rPr>
               <a:t>36,454m</a:t>
             </a:r>
@@ -26685,6 +27106,7 @@
                 <a:solidFill>
                   <a:srgbClr val="212121"/>
                 </a:solidFill>
+                <a:latin typeface="함초롱돋움"/>
               </a:rPr>
               <a:t>1,545건</a:t>
             </a:r>
@@ -26719,6 +27141,7 @@
                 <a:solidFill>
                   <a:srgbClr val="212121"/>
                 </a:solidFill>
+                <a:latin typeface="함초롱돋움"/>
               </a:rPr>
               <a:t>자전거도로 CCTV</a:t>
             </a:r>
@@ -26753,6 +27176,7 @@
                 <a:solidFill>
                   <a:srgbClr val="0D47A1"/>
                 </a:solidFill>
+                <a:latin typeface="함초롱돋움"/>
               </a:rPr>
               <a:t>BR-JAC-02</a:t>
             </a:r>
@@ -26873,6 +27297,7 @@
                 <a:solidFill>
                   <a:srgbClr val="FFFFFF"/>
                 </a:solidFill>
+                <a:latin typeface="함초롱돋움"/>
               </a:rPr>
               <a:t>3.8%</a:t>
             </a:r>
@@ -26907,6 +27332,7 @@
                 <a:solidFill>
                   <a:srgbClr val="BBDEFB"/>
                 </a:solidFill>
+                <a:latin typeface="함초롱돋움"/>
               </a:rPr>
               <a:t>PM10&gt;80
 발생률(연 333h)</a:t>
@@ -26985,6 +27411,7 @@
                 <a:solidFill>
                   <a:srgbClr val="FFFFFF"/>
                 </a:solidFill>
+                <a:latin typeface="함초롱돋움"/>
               </a:rPr>
               <a:t>11.0%</a:t>
             </a:r>
@@ -27019,6 +27446,7 @@
                 <a:solidFill>
                   <a:srgbClr val="BBDEFB"/>
                 </a:solidFill>
+                <a:latin typeface="함초롱돋움"/>
               </a:rPr>
               <a:t>PM2.5&gt;35
 발생률(더 위험)</a:t>
@@ -27097,6 +27525,7 @@
                 <a:solidFill>
                   <a:srgbClr val="FFFFFF"/>
                 </a:solidFill>
+                <a:latin typeface="함초롱돋움"/>
               </a:rPr>
               <a:t>0.409</a:t>
             </a:r>
@@ -27131,6 +27560,7 @@
                 <a:solidFill>
                   <a:srgbClr val="BBDEFB"/>
                 </a:solidFill>
+                <a:latin typeface="함초롱돋움"/>
               </a:rPr>
               <a:t>서울↔대구PM10
 Jaccard(표준화필요)</a:t>
@@ -27209,6 +27639,7 @@
                 <a:solidFill>
                   <a:srgbClr val="FFFFFF"/>
                 </a:solidFill>
+                <a:latin typeface="함초롱돋움"/>
               </a:rPr>
               <a:t>Jaccard=0.409 해석: '데이터 오류'가 아닌 '측정 도메인 불일치' — 표준화 기준 없이 도시 간 대기데이터 연계 시 허위 비교 발생 → BR-JAC-01 도출 근거</a:t>
             </a:r>
